--- a/operator_hypothesis_lab/presentations/hyp_mom_04_1_regularized_trend_state_quartile_evidence.pptx
+++ b/operator_hypothesis_lab/presentations/hyp_mom_04_1_regularized_trend_state_quartile_evidence.pptx
@@ -2,26 +2,28 @@
 <file path=ppt/presentation.xml><?xml version="1.0" encoding="utf-8"?>
 <p:presentation xmlns:p="http://schemas.openxmlformats.org/presentationml/2006/main">
   <p:sldMasterIdLst>
-    <p:sldMasterId xmlns:r="http://schemas.openxmlformats.org/officeDocument/2006/relationships" id="2147483648" r:id="R52fd02f38e3b46e4"/>
+    <p:sldMasterId xmlns:r="http://schemas.openxmlformats.org/officeDocument/2006/relationships" id="2147483648" r:id="Rf70664ad23c04d32"/>
   </p:sldMasterIdLst>
   <p:notesMasterIdLst>
-    <p:notesMasterId xmlns:r="http://schemas.openxmlformats.org/officeDocument/2006/relationships" r:id="R0bdb9d1a753443c8"/>
+    <p:notesMasterId xmlns:r="http://schemas.openxmlformats.org/officeDocument/2006/relationships" r:id="Rc78b0e399ac74f4e"/>
   </p:notesMasterIdLst>
   <p:sldIdLst>
-    <p:sldId xmlns:r="http://schemas.openxmlformats.org/officeDocument/2006/relationships" id="256" r:id="Rf79163358b5647ea"/>
-    <p:sldId xmlns:r="http://schemas.openxmlformats.org/officeDocument/2006/relationships" id="257" r:id="R5c03c186a5874cde"/>
-    <p:sldId xmlns:r="http://schemas.openxmlformats.org/officeDocument/2006/relationships" id="258" r:id="R28a57b7771994744"/>
-    <p:sldId xmlns:r="http://schemas.openxmlformats.org/officeDocument/2006/relationships" id="259" r:id="R2982b7145aee4b47"/>
-    <p:sldId xmlns:r="http://schemas.openxmlformats.org/officeDocument/2006/relationships" id="260" r:id="Ra61b4916d961478e"/>
-    <p:sldId xmlns:r="http://schemas.openxmlformats.org/officeDocument/2006/relationships" id="261" r:id="Rf7e2068706554298"/>
-    <p:sldId xmlns:r="http://schemas.openxmlformats.org/officeDocument/2006/relationships" id="262" r:id="Rb7d3105f3b124b4e"/>
-    <p:sldId xmlns:r="http://schemas.openxmlformats.org/officeDocument/2006/relationships" id="263" r:id="Rbf9f2fe669054a2f"/>
-    <p:sldId xmlns:r="http://schemas.openxmlformats.org/officeDocument/2006/relationships" id="264" r:id="R176e096c9e6f4cfa"/>
-    <p:sldId xmlns:r="http://schemas.openxmlformats.org/officeDocument/2006/relationships" id="265" r:id="R4f5a7979054b421d"/>
-    <p:sldId xmlns:r="http://schemas.openxmlformats.org/officeDocument/2006/relationships" id="266" r:id="R5320ed48ea0a4a4e"/>
-    <p:sldId xmlns:r="http://schemas.openxmlformats.org/officeDocument/2006/relationships" id="267" r:id="R4d54ba12cce746e6"/>
-    <p:sldId xmlns:r="http://schemas.openxmlformats.org/officeDocument/2006/relationships" id="268" r:id="R4d3ce85edd0e43d3"/>
-    <p:sldId xmlns:r="http://schemas.openxmlformats.org/officeDocument/2006/relationships" id="269" r:id="R2757b386ebc946ec"/>
+    <p:sldId xmlns:r="http://schemas.openxmlformats.org/officeDocument/2006/relationships" id="256" r:id="R15e7beb2dbcb45a2"/>
+    <p:sldId xmlns:r="http://schemas.openxmlformats.org/officeDocument/2006/relationships" id="257" r:id="R0aa3183b22d24116"/>
+    <p:sldId xmlns:r="http://schemas.openxmlformats.org/officeDocument/2006/relationships" id="258" r:id="R2ed1910bbf324461"/>
+    <p:sldId xmlns:r="http://schemas.openxmlformats.org/officeDocument/2006/relationships" id="259" r:id="Rbf48b1566eac4d93"/>
+    <p:sldId xmlns:r="http://schemas.openxmlformats.org/officeDocument/2006/relationships" id="260" r:id="Rfcc7f25aa76b458f"/>
+    <p:sldId xmlns:r="http://schemas.openxmlformats.org/officeDocument/2006/relationships" id="261" r:id="R6483e49b44094754"/>
+    <p:sldId xmlns:r="http://schemas.openxmlformats.org/officeDocument/2006/relationships" id="262" r:id="R66b7b321aa5f4fe3"/>
+    <p:sldId xmlns:r="http://schemas.openxmlformats.org/officeDocument/2006/relationships" id="263" r:id="R1a86883303e8456b"/>
+    <p:sldId xmlns:r="http://schemas.openxmlformats.org/officeDocument/2006/relationships" id="264" r:id="R71717aa749194f73"/>
+    <p:sldId xmlns:r="http://schemas.openxmlformats.org/officeDocument/2006/relationships" id="265" r:id="R9d6b99e28ce4401e"/>
+    <p:sldId xmlns:r="http://schemas.openxmlformats.org/officeDocument/2006/relationships" id="266" r:id="Ra46a950403804405"/>
+    <p:sldId xmlns:r="http://schemas.openxmlformats.org/officeDocument/2006/relationships" id="267" r:id="Ra6d7f06f89584dd7"/>
+    <p:sldId xmlns:r="http://schemas.openxmlformats.org/officeDocument/2006/relationships" id="268" r:id="Reabe526fab0f49a6"/>
+    <p:sldId xmlns:r="http://schemas.openxmlformats.org/officeDocument/2006/relationships" id="269" r:id="Rfd2c3477ffa34a4c"/>
+    <p:sldId xmlns:r="http://schemas.openxmlformats.org/officeDocument/2006/relationships" id="270" r:id="Rf68bf597c4b44257"/>
+    <p:sldId xmlns:r="http://schemas.openxmlformats.org/officeDocument/2006/relationships" id="271" r:id="R611fb78fb7bc446b"/>
   </p:sldIdLst>
   <p:sldSz cx="12192000" cy="6858000"/>
   <p:notesSz cx="6858000" cy="9144000"/>
@@ -545,7 +547,7 @@
           <a:lstStyle xmlns:a="http://schemas.openxmlformats.org/drawingml/2006/main"/>
           <a:p xmlns:a="http://schemas.openxmlformats.org/drawingml/2006/main">
             <a:r>
-              <a:t>The failure is temporal instability, not insufficient cross-sectional sample size.</a:t>
+              <a:t>The bounded network refresh reproduced the cached panel and outcome exactly.</a:t>
             </a:r>
           </a:p>
           <a:p xmlns:a="http://schemas.openxmlformats.org/drawingml/2006/main">
@@ -555,7 +557,17 @@
           </a:p>
           <a:p xmlns:a="http://schemas.openxmlformats.org/drawingml/2006/main">
             <a:r>
-              <a:t>- hyp_mom_04_1_train_cv_details.csv</a:t>
+              <a:t>- hyp_mom_04_1_train_run_spec.csv</a:t>
+            </a:r>
+          </a:p>
+          <a:p xmlns:a="http://schemas.openxmlformats.org/drawingml/2006/main">
+            <a:r>
+              <a:t>- hyp_mom_04_1_train_integrity.csv</a:t>
+            </a:r>
+          </a:p>
+          <a:p xmlns:a="http://schemas.openxmlformats.org/drawingml/2006/main">
+            <a:r>
+              <a:t>- hyp_mom_04_1_train_coverage.csv</a:t>
             </a:r>
           </a:p>
           <a:p xmlns:a="http://schemas.openxmlformats.org/drawingml/2006/main">
@@ -630,7 +642,7 @@
           <a:lstStyle xmlns:a="http://schemas.openxmlformats.org/drawingml/2006/main"/>
           <a:p xmlns:a="http://schemas.openxmlformats.org/drawingml/2006/main">
             <a:r>
-              <a:t>Permutation significance asks whether the pooled mapping contains structure. It does not prove that coefficients learned earlier transport to the next quarter.</a:t>
+              <a:t>The one-standard-error rule correctly preferred the most regularized model, but regularization could not turn the forward relationship positive.</a:t>
             </a:r>
           </a:p>
           <a:p xmlns:a="http://schemas.openxmlformats.org/drawingml/2006/main">
@@ -640,17 +652,7 @@
           </a:p>
           <a:p xmlns:a="http://schemas.openxmlformats.org/drawingml/2006/main">
             <a:r>
-              <a:t>- hyp_mom_04_1_train_quarter_summary.csv</a:t>
-            </a:r>
-          </a:p>
-          <a:p xmlns:a="http://schemas.openxmlformats.org/drawingml/2006/main">
-            <a:r>
-              <a:t>- hyp_mom_04_1_train_block_bootstrap.csv</a:t>
-            </a:r>
-          </a:p>
-          <a:p xmlns:a="http://schemas.openxmlformats.org/drawingml/2006/main">
-            <a:r>
-              <a:t>- hyp_mom_04_1_train_permutation.csv</a:t>
+              <a:t>- hyp_mom_04_1_train_cv_summary.csv</a:t>
             </a:r>
           </a:p>
           <a:p xmlns:a="http://schemas.openxmlformats.org/drawingml/2006/main">
@@ -725,7 +727,7 @@
           <a:lstStyle xmlns:a="http://schemas.openxmlformats.org/drawingml/2006/main"/>
           <a:p xmlns:a="http://schemas.openxmlformats.org/drawingml/2006/main">
             <a:r>
-              <a:t>The failed G3 gate overrides attractive G4–G6 pooled evidence by design.</a:t>
+              <a:t>The failure is temporal instability, not insufficient cross-sectional sample size.</a:t>
             </a:r>
           </a:p>
           <a:p xmlns:a="http://schemas.openxmlformats.org/drawingml/2006/main">
@@ -735,12 +737,18 @@
           </a:p>
           <a:p xmlns:a="http://schemas.openxmlformats.org/drawingml/2006/main">
             <a:r>
-              <a:t>- hyp_mom_04_1_train_gates.csv</a:t>
+              <a:t>- hyp_mom_04_1_train_cv_details.csv</a:t>
             </a:r>
           </a:p>
           <a:p xmlns:a="http://schemas.openxmlformats.org/drawingml/2006/main">
             <a:r>
               <a:t>[/Sources]</a:t>
+            </a:r>
+          </a:p>
+          <a:p xmlns:a="http://schemas.openxmlformats.org/drawingml/2006/main">
+            <a:r>
+              <a:t>
+Chat reference: Codex task 019f741e-615f-7fd0-90f7-edce12b5cb66, 2026-08-10 explanation of why pooled fit did not override chronological failure; decision index D113.</a:t>
             </a:r>
           </a:p>
         </p:txBody>
@@ -810,7 +818,7 @@
           <a:lstStyle xmlns:a="http://schemas.openxmlformats.org/drawingml/2006/main"/>
           <a:p xmlns:a="http://schemas.openxmlformats.org/drawingml/2006/main">
             <a:r>
-              <a:t>This is the one serious next question suggested by the lane; it is not a post-hoc rescue of 04.1.</a:t>
+              <a:t>Permutation significance asks whether the pooled mapping contains structure. It does not prove that coefficients learned earlier transport to the next quarter.</a:t>
             </a:r>
           </a:p>
           <a:p xmlns:a="http://schemas.openxmlformats.org/drawingml/2006/main">
@@ -820,12 +828,17 @@
           </a:p>
           <a:p xmlns:a="http://schemas.openxmlformats.org/drawingml/2006/main">
             <a:r>
-              <a:t>- hyp_mom_04_1_train_theory_quarter_summary.csv</a:t>
-            </a:r>
-          </a:p>
-          <a:p xmlns:a="http://schemas.openxmlformats.org/drawingml/2006/main">
-            <a:r>
-              <a:t>- HYP-MOM-04.1 results, Feature-level interpretation</a:t>
+              <a:t>- hyp_mom_04_1_train_quarter_summary.csv</a:t>
+            </a:r>
+          </a:p>
+          <a:p xmlns:a="http://schemas.openxmlformats.org/drawingml/2006/main">
+            <a:r>
+              <a:t>- hyp_mom_04_1_train_block_bootstrap.csv</a:t>
+            </a:r>
+          </a:p>
+          <a:p xmlns:a="http://schemas.openxmlformats.org/drawingml/2006/main">
+            <a:r>
+              <a:t>- hyp_mom_04_1_train_permutation.csv</a:t>
             </a:r>
           </a:p>
           <a:p xmlns:a="http://schemas.openxmlformats.org/drawingml/2006/main">
@@ -900,6 +913,187 @@
           <a:lstStyle xmlns:a="http://schemas.openxmlformats.org/drawingml/2006/main"/>
           <a:p xmlns:a="http://schemas.openxmlformats.org/drawingml/2006/main">
             <a:r>
+              <a:t>The failed G3 gate overrides attractive G4–G6 pooled evidence by design.</a:t>
+            </a:r>
+          </a:p>
+          <a:p xmlns:a="http://schemas.openxmlformats.org/drawingml/2006/main">
+            <a:r>
+              <a:t>[Sources]</a:t>
+            </a:r>
+          </a:p>
+          <a:p xmlns:a="http://schemas.openxmlformats.org/drawingml/2006/main">
+            <a:r>
+              <a:t>- hyp_mom_04_1_train_gates.csv</a:t>
+            </a:r>
+          </a:p>
+          <a:p xmlns:a="http://schemas.openxmlformats.org/drawingml/2006/main">
+            <a:r>
+              <a:t>[/Sources]</a:t>
+            </a:r>
+          </a:p>
+          <a:p xmlns:a="http://schemas.openxmlformats.org/drawingml/2006/main">
+            <a:r>
+              <a:t>
+Chat reference: Codex task 019f741e-615f-7fd0-90f7-edce12b5cb66, 2026-08-10 explanation of the conjunction gate and OOS lock; decision index D113.</a:t>
+            </a:r>
+          </a:p>
+        </p:txBody>
+      </p:sp>
+      <p:sp>
+        <p:nvSpPr>
+          <p:cNvPr id="4" name="Slide Number Placeholder 3"/>
+          <p:cNvSpPr>
+            <a:spLocks xmlns:a="http://schemas.openxmlformats.org/drawingml/2006/main" noGrp="1"/>
+          </p:cNvSpPr>
+          <p:nvPr>
+            <p:ph type="sldNum" idx="5"/>
+          </p:nvPr>
+        </p:nvSpPr>
+        <p:spPr/>
+        <p:txBody>
+          <a:bodyPr xmlns:a="http://schemas.openxmlformats.org/drawingml/2006/main"/>
+          <a:lstStyle xmlns:a="http://schemas.openxmlformats.org/drawingml/2006/main"/>
+          <a:p xmlns:a="http://schemas.openxmlformats.org/drawingml/2006/main"/>
+        </p:txBody>
+      </p:sp>
+    </p:spTree>
+  </p:cSld>
+  <p:clrMapOvr>
+    <a:masterClrMapping xmlns:a="http://schemas.openxmlformats.org/drawingml/2006/main"/>
+  </p:clrMapOvr>
+</p:notes>
+</file>
+
+<file path=ppt/notesSlides/notesSlide15.xml><?xml version="1.0" encoding="utf-8"?>
+<p:notes xmlns:p="http://schemas.openxmlformats.org/presentationml/2006/main">
+  <p:cSld>
+    <p:spTree>
+      <p:nvGrpSpPr>
+        <p:cNvPr id="1" name=""/>
+        <p:cNvGrpSpPr/>
+        <p:nvPr/>
+      </p:nvGrpSpPr>
+      <p:grpSpPr>
+        <a:xfrm xmlns:a="http://schemas.openxmlformats.org/drawingml/2006/main"/>
+      </p:grpSpPr>
+      <p:sp>
+        <p:nvSpPr>
+          <p:cNvPr id="2" name="Slide Image Placeholder 1"/>
+          <p:cNvSpPr>
+            <a:spLocks xmlns:a="http://schemas.openxmlformats.org/drawingml/2006/main" noGrp="1"/>
+          </p:cNvSpPr>
+          <p:nvPr>
+            <p:ph type="sldImg" idx="0"/>
+          </p:nvPr>
+        </p:nvSpPr>
+        <p:spPr/>
+      </p:sp>
+      <p:sp>
+        <p:nvSpPr>
+          <p:cNvPr id="3" name="Notes Placeholder 2"/>
+          <p:cNvSpPr>
+            <a:spLocks xmlns:a="http://schemas.openxmlformats.org/drawingml/2006/main" noGrp="1"/>
+          </p:cNvSpPr>
+          <p:nvPr>
+            <p:ph type="body" idx="1"/>
+          </p:nvPr>
+        </p:nvSpPr>
+        <p:spPr/>
+        <p:txBody>
+          <a:bodyPr xmlns:a="http://schemas.openxmlformats.org/drawingml/2006/main"/>
+          <a:lstStyle xmlns:a="http://schemas.openxmlformats.org/drawingml/2006/main"/>
+          <a:p xmlns:a="http://schemas.openxmlformats.org/drawingml/2006/main">
+            <a:r>
+              <a:t>This is the one serious next question suggested by the lane; it is not a post-hoc rescue of 04.1.</a:t>
+            </a:r>
+          </a:p>
+          <a:p xmlns:a="http://schemas.openxmlformats.org/drawingml/2006/main">
+            <a:r>
+              <a:t>[Sources]</a:t>
+            </a:r>
+          </a:p>
+          <a:p xmlns:a="http://schemas.openxmlformats.org/drawingml/2006/main">
+            <a:r>
+              <a:t>- hyp_mom_04_1_train_theory_quarter_summary.csv</a:t>
+            </a:r>
+          </a:p>
+          <a:p xmlns:a="http://schemas.openxmlformats.org/drawingml/2006/main">
+            <a:r>
+              <a:t>- HYP-MOM-04.1 results, Feature-level interpretation</a:t>
+            </a:r>
+          </a:p>
+          <a:p xmlns:a="http://schemas.openxmlformats.org/drawingml/2006/main">
+            <a:r>
+              <a:t>[/Sources]</a:t>
+            </a:r>
+          </a:p>
+        </p:txBody>
+      </p:sp>
+      <p:sp>
+        <p:nvSpPr>
+          <p:cNvPr id="4" name="Slide Number Placeholder 3"/>
+          <p:cNvSpPr>
+            <a:spLocks xmlns:a="http://schemas.openxmlformats.org/drawingml/2006/main" noGrp="1"/>
+          </p:cNvSpPr>
+          <p:nvPr>
+            <p:ph type="sldNum" idx="5"/>
+          </p:nvPr>
+        </p:nvSpPr>
+        <p:spPr/>
+        <p:txBody>
+          <a:bodyPr xmlns:a="http://schemas.openxmlformats.org/drawingml/2006/main"/>
+          <a:lstStyle xmlns:a="http://schemas.openxmlformats.org/drawingml/2006/main"/>
+          <a:p xmlns:a="http://schemas.openxmlformats.org/drawingml/2006/main"/>
+        </p:txBody>
+      </p:sp>
+    </p:spTree>
+  </p:cSld>
+  <p:clrMapOvr>
+    <a:masterClrMapping xmlns:a="http://schemas.openxmlformats.org/drawingml/2006/main"/>
+  </p:clrMapOvr>
+</p:notes>
+</file>
+
+<file path=ppt/notesSlides/notesSlide16.xml><?xml version="1.0" encoding="utf-8"?>
+<p:notes xmlns:p="http://schemas.openxmlformats.org/presentationml/2006/main">
+  <p:cSld>
+    <p:spTree>
+      <p:nvGrpSpPr>
+        <p:cNvPr id="1" name=""/>
+        <p:cNvGrpSpPr/>
+        <p:nvPr/>
+      </p:nvGrpSpPr>
+      <p:grpSpPr>
+        <a:xfrm xmlns:a="http://schemas.openxmlformats.org/drawingml/2006/main"/>
+      </p:grpSpPr>
+      <p:sp>
+        <p:nvSpPr>
+          <p:cNvPr id="2" name="Slide Image Placeholder 1"/>
+          <p:cNvSpPr>
+            <a:spLocks xmlns:a="http://schemas.openxmlformats.org/drawingml/2006/main" noGrp="1"/>
+          </p:cNvSpPr>
+          <p:nvPr>
+            <p:ph type="sldImg" idx="0"/>
+          </p:nvPr>
+        </p:nvSpPr>
+        <p:spPr/>
+      </p:sp>
+      <p:sp>
+        <p:nvSpPr>
+          <p:cNvPr id="3" name="Notes Placeholder 2"/>
+          <p:cNvSpPr>
+            <a:spLocks xmlns:a="http://schemas.openxmlformats.org/drawingml/2006/main" noGrp="1"/>
+          </p:cNvSpPr>
+          <p:nvPr>
+            <p:ph type="body" idx="1"/>
+          </p:nvPr>
+        </p:nvSpPr>
+        <p:spPr/>
+        <p:txBody>
+          <a:bodyPr xmlns:a="http://schemas.openxmlformats.org/drawingml/2006/main"/>
+          <a:lstStyle xmlns:a="http://schemas.openxmlformats.org/drawingml/2006/main"/>
+          <a:p xmlns:a="http://schemas.openxmlformats.org/drawingml/2006/main">
+            <a:r>
               <a:t>The lane succeeded methodologically: it exposed a seductive pooled fit and stopped it before retrospective OOS could influence the model.</a:t>
             </a:r>
           </a:p>
@@ -1008,6 +1202,12 @@
               <a:t>[/Sources]</a:t>
             </a:r>
           </a:p>
+          <a:p xmlns:a="http://schemas.openxmlformats.org/drawingml/2006/main">
+            <a:r>
+              <a:t>
+Chat reference: Codex task 019f741e-615f-7fd0-90f7-edce12b5cb66, 2026-08-10 plain-English Ridge explanation; decision index D113.</a:t>
+            </a:r>
+          </a:p>
         </p:txBody>
       </p:sp>
       <p:sp>
@@ -1075,7 +1275,12 @@
           <a:lstStyle xmlns:a="http://schemas.openxmlformats.org/drawingml/2006/main"/>
           <a:p xmlns:a="http://schemas.openxmlformats.org/drawingml/2006/main">
             <a:r>
-              <a:t>The TRAIN runner could query only through 2020-12-31. This is a structural boundary, not an analyst promise.</a:t>
+              <a:t>Ridge predicts a continuous relative-return score; it is not a direct up/down classifier.</a:t>
+            </a:r>
+          </a:p>
+          <a:p xmlns:a="http://schemas.openxmlformats.org/drawingml/2006/main">
+            <a:r>
+              <a:t>The penalty shrinks feature weights toward zero, especially when predictors overlap or the sample is small.</a:t>
             </a:r>
           </a:p>
           <a:p xmlns:a="http://schemas.openxmlformats.org/drawingml/2006/main">
@@ -1085,7 +1290,12 @@
           </a:p>
           <a:p xmlns:a="http://schemas.openxmlformats.org/drawingml/2006/main">
             <a:r>
-              <a:t>- HYP-MOM-04.1 contract, Evidence sequence and data boundary</a:t>
+              <a:t>- HYP-MOM-04.1 frozen contract, sections ‘Frozen features’ and ‘Ridge model and TRAIN selection’.</a:t>
+            </a:r>
+          </a:p>
+          <a:p xmlns:a="http://schemas.openxmlformats.org/drawingml/2006/main">
+            <a:r>
+              <a:t>- Codex task 019f741e-615f-7fd0-90f7-edce12b5cb66, operator question and plain-English Ridge explanation on 2026-08-10; indexed in GEN5_4_DECISION_DIALOGUE_INDEX.md at D113.</a:t>
             </a:r>
           </a:p>
           <a:p xmlns:a="http://schemas.openxmlformats.org/drawingml/2006/main">
@@ -1160,7 +1370,17 @@
           <a:lstStyle xmlns:a="http://schemas.openxmlformats.org/drawingml/2006/main"/>
           <a:p xmlns:a="http://schemas.openxmlformats.org/drawingml/2006/main">
             <a:r>
-              <a:t>Each input uses only completed adjusted closes as of the quarter-end signal date.</a:t>
+              <a:t>Pooled fit measures association within the complete TRAIN sample. It is useful, but the same rows help estimate and judge the coefficients.</a:t>
+            </a:r>
+          </a:p>
+          <a:p xmlns:a="http://schemas.openxmlformats.org/drawingml/2006/main">
+            <a:r>
+              <a:t>Expanding validation is the transfer test: learn from earlier quarters and score later TRAIN quarters.</a:t>
+            </a:r>
+          </a:p>
+          <a:p xmlns:a="http://schemas.openxmlformats.org/drawingml/2006/main">
+            <a:r>
+              <a:t>OOS remains untouched until all frozen TRAIN gates pass.</a:t>
             </a:r>
           </a:p>
           <a:p xmlns:a="http://schemas.openxmlformats.org/drawingml/2006/main">
@@ -1170,7 +1390,12 @@
           </a:p>
           <a:p xmlns:a="http://schemas.openxmlformats.org/drawingml/2006/main">
             <a:r>
-              <a:t>- HYP-MOM-04.1 contract, Frozen features 1–3</a:t>
+              <a:t>- HYP-MOM-04.1 frozen contract, ‘Evidence sequence and data boundary’ and ‘TRAIN nomination gates’.</a:t>
+            </a:r>
+          </a:p>
+          <a:p xmlns:a="http://schemas.openxmlformats.org/drawingml/2006/main">
+            <a:r>
+              <a:t>- Codex task 019f741e-615f-7fd0-90f7-edce12b5cb66, plain-English pooled-versus-chronological explanation on 2026-08-10; indexed in GEN5_4_DECISION_DIALOGUE_INDEX.md at D113.</a:t>
             </a:r>
           </a:p>
           <a:p xmlns:a="http://schemas.openxmlformats.org/drawingml/2006/main">
@@ -1245,7 +1470,7 @@
           <a:lstStyle xmlns:a="http://schemas.openxmlformats.org/drawingml/2006/main"/>
           <a:p xmlns:a="http://schemas.openxmlformats.org/drawingml/2006/main">
             <a:r>
-              <a:t>These are compact state descriptors—not six independent trading strategies.</a:t>
+              <a:t>The TRAIN runner could query only through 2020-12-31. This is a structural boundary, not an analyst promise.</a:t>
             </a:r>
           </a:p>
           <a:p xmlns:a="http://schemas.openxmlformats.org/drawingml/2006/main">
@@ -1255,7 +1480,7 @@
           </a:p>
           <a:p xmlns:a="http://schemas.openxmlformats.org/drawingml/2006/main">
             <a:r>
-              <a:t>- HYP-MOM-04.1 contract, Frozen features 4–6</a:t>
+              <a:t>- HYP-MOM-04.1 contract, Evidence sequence and data boundary</a:t>
             </a:r>
           </a:p>
           <a:p xmlns:a="http://schemas.openxmlformats.org/drawingml/2006/main">
@@ -1330,7 +1555,7 @@
           <a:lstStyle xmlns:a="http://schemas.openxmlformats.org/drawingml/2006/main"/>
           <a:p xmlns:a="http://schemas.openxmlformats.org/drawingml/2006/main">
             <a:r>
-              <a:t>Cross-sectional rank-normalization reduces scale dominance and remains causal because it uses only that quarter's contemporaneous panel.</a:t>
+              <a:t>Each input uses only completed adjusted closes as of the quarter-end signal date.</a:t>
             </a:r>
           </a:p>
           <a:p xmlns:a="http://schemas.openxmlformats.org/drawingml/2006/main">
@@ -1340,7 +1565,7 @@
           </a:p>
           <a:p xmlns:a="http://schemas.openxmlformats.org/drawingml/2006/main">
             <a:r>
-              <a:t>- HYP-MOM-04.1 contract, Causal observation and return timing; Frozen preprocessing</a:t>
+              <a:t>- HYP-MOM-04.1 contract, Frozen features 1–3</a:t>
             </a:r>
           </a:p>
           <a:p xmlns:a="http://schemas.openxmlformats.org/drawingml/2006/main">
@@ -1415,7 +1640,7 @@
           <a:lstStyle xmlns:a="http://schemas.openxmlformats.org/drawingml/2006/main"/>
           <a:p xmlns:a="http://schemas.openxmlformats.org/drawingml/2006/main">
             <a:r>
-              <a:t>G3 is deliberately independent of the full-sample quartile chart. That separation becomes decisive.</a:t>
+              <a:t>These are compact state descriptors—not six independent trading strategies.</a:t>
             </a:r>
           </a:p>
           <a:p xmlns:a="http://schemas.openxmlformats.org/drawingml/2006/main">
@@ -1425,7 +1650,7 @@
           </a:p>
           <a:p xmlns:a="http://schemas.openxmlformats.org/drawingml/2006/main">
             <a:r>
-              <a:t>- HYP-MOM-04.1 contract, TRAIN nomination gates</a:t>
+              <a:t>- HYP-MOM-04.1 contract, Frozen features 4–6</a:t>
             </a:r>
           </a:p>
           <a:p xmlns:a="http://schemas.openxmlformats.org/drawingml/2006/main">
@@ -1500,7 +1725,7 @@
           <a:lstStyle xmlns:a="http://schemas.openxmlformats.org/drawingml/2006/main"/>
           <a:p xmlns:a="http://schemas.openxmlformats.org/drawingml/2006/main">
             <a:r>
-              <a:t>The bounded network refresh reproduced the cached panel and outcome exactly.</a:t>
+              <a:t>Cross-sectional rank-normalization reduces scale dominance and remains causal because it uses only that quarter's contemporaneous panel.</a:t>
             </a:r>
           </a:p>
           <a:p xmlns:a="http://schemas.openxmlformats.org/drawingml/2006/main">
@@ -1510,17 +1735,7 @@
           </a:p>
           <a:p xmlns:a="http://schemas.openxmlformats.org/drawingml/2006/main">
             <a:r>
-              <a:t>- hyp_mom_04_1_train_run_spec.csv</a:t>
-            </a:r>
-          </a:p>
-          <a:p xmlns:a="http://schemas.openxmlformats.org/drawingml/2006/main">
-            <a:r>
-              <a:t>- hyp_mom_04_1_train_integrity.csv</a:t>
-            </a:r>
-          </a:p>
-          <a:p xmlns:a="http://schemas.openxmlformats.org/drawingml/2006/main">
-            <a:r>
-              <a:t>- hyp_mom_04_1_train_coverage.csv</a:t>
+              <a:t>- HYP-MOM-04.1 contract, Causal observation and return timing; Frozen preprocessing</a:t>
             </a:r>
           </a:p>
           <a:p xmlns:a="http://schemas.openxmlformats.org/drawingml/2006/main">
@@ -1595,7 +1810,7 @@
           <a:lstStyle xmlns:a="http://schemas.openxmlformats.org/drawingml/2006/main"/>
           <a:p xmlns:a="http://schemas.openxmlformats.org/drawingml/2006/main">
             <a:r>
-              <a:t>The one-standard-error rule correctly preferred the most regularized model, but regularization could not turn the forward relationship positive.</a:t>
+              <a:t>G3 is deliberately independent of the full-sample quartile chart. That separation becomes decisive.</a:t>
             </a:r>
           </a:p>
           <a:p xmlns:a="http://schemas.openxmlformats.org/drawingml/2006/main">
@@ -1605,7 +1820,7 @@
           </a:p>
           <a:p xmlns:a="http://schemas.openxmlformats.org/drawingml/2006/main">
             <a:r>
-              <a:t>- hyp_mom_04_1_train_cv_summary.csv</a:t>
+              <a:t>- HYP-MOM-04.1 contract, TRAIN nomination gates</a:t>
             </a:r>
           </a:p>
           <a:p xmlns:a="http://schemas.openxmlformats.org/drawingml/2006/main">
@@ -1678,7 +1893,7 @@
   </p:cSld>
   <p:clrMap bg1="lt1" tx1="dk1" bg2="lt2" tx2="dk2" accent1="accent1" accent2="accent2" accent3="accent3" accent4="accent4" accent5="accent5" accent6="accent6" hlink="hlink" folHlink="folHlink"/>
   <p:sldLayoutIdLst>
-    <p:sldLayoutId xmlns:r="http://schemas.openxmlformats.org/officeDocument/2006/relationships" id="2147483649" r:id="Rbb8500d0c1ed4c7a"/>
+    <p:sldLayoutId xmlns:r="http://schemas.openxmlformats.org/officeDocument/2006/relationships" id="2147483649" r:id="Rdd83754f3cac41bb"/>
   </p:sldLayoutIdLst>
   <p:txStyles>
     <p:titleStyle>
@@ -2247,6 +2462,7 @@
           <a:lstStyle xmlns:a="http://schemas.openxmlformats.org/drawingml/2006/main"/>
           <a:p xmlns:a="http://schemas.openxmlformats.org/drawingml/2006/main">
             <a:pPr algn="l">
+              <a:buNone/>
               <a:defRPr sz="6000">
                 <a:solidFill>
                   <a:srgbClr val="000000"/>
@@ -2292,6 +2508,7 @@
           <a:lstStyle xmlns:a="http://schemas.openxmlformats.org/drawingml/2006/main"/>
           <a:p xmlns:a="http://schemas.openxmlformats.org/drawingml/2006/main">
             <a:pPr algn="l">
+              <a:buNone/>
               <a:defRPr sz="2400">
                 <a:solidFill>
                   <a:srgbClr val="000000"/>
@@ -2337,6 +2554,7 @@
           <a:lstStyle xmlns:a="http://schemas.openxmlformats.org/drawingml/2006/main"/>
           <a:p xmlns:a="http://schemas.openxmlformats.org/drawingml/2006/main">
             <a:pPr algn="l">
+              <a:buNone/>
               <a:defRPr sz="2400">
                 <a:solidFill>
                   <a:srgbClr val="000000"/>
@@ -2376,10 +2594,97 @@
       </p:grpSpPr>
       <p:sp>
         <p:nvSpPr>
-          <p:cNvPr id="6" name="Google-Shape-532-p58-2">
-            <a:extLst xmlns:a="http://schemas.openxmlformats.org/drawingml/2006/main">
-              <a:ext uri="{FF2B5EF4-FFF2-40B4-BE49-F238E27FC236}">
-                <a16:creationId xmlns:a16="http://schemas.microsoft.com/office/drawing/2014/main" id="{2932BA42-F0B8-4FC4-99CA-302C40439087}"/>
+          <p:cNvPr id="13" name="Rounded-Rectangle-5-1">
+            <a:extLst xmlns:a="http://schemas.openxmlformats.org/drawingml/2006/main">
+              <a:ext uri="{FF2B5EF4-FFF2-40B4-BE49-F238E27FC236}">
+                <a16:creationId xmlns:a16="http://schemas.microsoft.com/office/drawing/2014/main" id="{17C06F09-B532-40B9-873C-AD5632712289}"/>
+              </a:ext>
+            </a:extLst>
+          </p:cNvPr>
+          <p:cNvSpPr>
+            <a:spLocks xmlns:a="http://schemas.openxmlformats.org/drawingml/2006/main" noGrp="1"/>
+          </p:cNvSpPr>
+          <p:nvPr/>
+        </p:nvSpPr>
+        <p:spPr>
+          <a:xfrm xmlns:a="http://schemas.openxmlformats.org/drawingml/2006/main">
+            <a:off x="393668" y="3022568"/>
+            <a:ext cx="3568732" cy="2971800"/>
+          </a:xfrm>
+          <a:prstGeom xmlns:a="http://schemas.openxmlformats.org/drawingml/2006/main" prst="roundRect">
+            <a:avLst>
+              <a:gd name="adj" fmla="val 2564"/>
+            </a:avLst>
+          </a:prstGeom>
+          <a:solidFill xmlns:a="http://schemas.openxmlformats.org/drawingml/2006/main">
+            <a:srgbClr val="F2F2F2"/>
+          </a:solidFill>
+        </p:spPr>
+      </p:sp>
+      <p:sp>
+        <p:nvSpPr>
+          <p:cNvPr id="2" name="Rounded-Rectangle-6-2">
+            <a:extLst xmlns:a="http://schemas.openxmlformats.org/drawingml/2006/main">
+              <a:ext uri="{FF2B5EF4-FFF2-40B4-BE49-F238E27FC236}">
+                <a16:creationId xmlns:a16="http://schemas.microsoft.com/office/drawing/2014/main" id="{F76997C6-7E75-4EFF-936A-64F4F95E0A54}"/>
+              </a:ext>
+            </a:extLst>
+          </p:cNvPr>
+          <p:cNvSpPr>
+            <a:spLocks xmlns:a="http://schemas.openxmlformats.org/drawingml/2006/main" noGrp="1"/>
+          </p:cNvSpPr>
+          <p:nvPr/>
+        </p:nvSpPr>
+        <p:spPr>
+          <a:xfrm xmlns:a="http://schemas.openxmlformats.org/drawingml/2006/main">
+            <a:off x="4311682" y="3022568"/>
+            <a:ext cx="3568732" cy="2971800"/>
+          </a:xfrm>
+          <a:prstGeom xmlns:a="http://schemas.openxmlformats.org/drawingml/2006/main" prst="roundRect">
+            <a:avLst>
+              <a:gd name="adj" fmla="val 2564"/>
+            </a:avLst>
+          </a:prstGeom>
+          <a:solidFill xmlns:a="http://schemas.openxmlformats.org/drawingml/2006/main">
+            <a:srgbClr val="F2F2F2"/>
+          </a:solidFill>
+        </p:spPr>
+      </p:sp>
+      <p:sp>
+        <p:nvSpPr>
+          <p:cNvPr id="3" name="Rounded-Rectangle-7-3">
+            <a:extLst xmlns:a="http://schemas.openxmlformats.org/drawingml/2006/main">
+              <a:ext uri="{FF2B5EF4-FFF2-40B4-BE49-F238E27FC236}">
+                <a16:creationId xmlns:a16="http://schemas.microsoft.com/office/drawing/2014/main" id="{C8D56EED-C6DF-4DA7-A0E7-7C5D61CC94BE}"/>
+              </a:ext>
+            </a:extLst>
+          </p:cNvPr>
+          <p:cNvSpPr>
+            <a:spLocks xmlns:a="http://schemas.openxmlformats.org/drawingml/2006/main" noGrp="1"/>
+          </p:cNvSpPr>
+          <p:nvPr/>
+        </p:nvSpPr>
+        <p:spPr>
+          <a:xfrm xmlns:a="http://schemas.openxmlformats.org/drawingml/2006/main">
+            <a:off x="8232267" y="3022568"/>
+            <a:ext cx="3568732" cy="2971800"/>
+          </a:xfrm>
+          <a:prstGeom xmlns:a="http://schemas.openxmlformats.org/drawingml/2006/main" prst="roundRect">
+            <a:avLst>
+              <a:gd name="adj" fmla="val 2564"/>
+            </a:avLst>
+          </a:prstGeom>
+          <a:solidFill xmlns:a="http://schemas.openxmlformats.org/drawingml/2006/main">
+            <a:srgbClr val="F2F2F2"/>
+          </a:solidFill>
+        </p:spPr>
+      </p:sp>
+      <p:sp>
+        <p:nvSpPr>
+          <p:cNvPr id="4" name="Slide-Number-Placeholder-1-4">
+            <a:extLst xmlns:a="http://schemas.openxmlformats.org/drawingml/2006/main">
+              <a:ext uri="{FF2B5EF4-FFF2-40B4-BE49-F238E27FC236}">
+                <a16:creationId xmlns:a16="http://schemas.microsoft.com/office/drawing/2014/main" id="{E9E8DBE8-6D28-41F2-9BD8-37100FA57762}"/>
               </a:ext>
             </a:extLst>
           </p:cNvPr>
@@ -2398,187 +2703,406 @@
           </a:prstGeom>
         </p:spPr>
         <p:txBody>
-          <a:bodyPr xmlns:a="http://schemas.openxmlformats.org/drawingml/2006/main" wrap="square" lIns="0" tIns="0" rIns="0" bIns="0" anchor="b">
+          <a:bodyPr xmlns:a="http://schemas.openxmlformats.org/drawingml/2006/main" lIns="0" tIns="0" rIns="0" bIns="0" anchor="b"/>
+          <a:lstStyle xmlns:a="http://schemas.openxmlformats.org/drawingml/2006/main"/>
+          <a:p xmlns:a="http://schemas.openxmlformats.org/drawingml/2006/main">
+            <a:pPr algn="r">
+              <a:buNone/>
+              <a:defRPr sz="1000">
+                <a:solidFill>
+                  <a:srgbClr val="000000"/>
+                </a:solidFill>
+                <a:latin typeface="Helvetica Neue"/>
+                <a:ea typeface="Helvetica Neue"/>
+                <a:cs typeface="Helvetica Neue"/>
+              </a:defRPr>
+            </a:pPr>
+            <a:r>
+              <a:t>10</a:t>
+            </a:r>
+          </a:p>
+        </p:txBody>
+      </p:sp>
+      <p:sp>
+        <p:nvSpPr>
+          <p:cNvPr id="5" name="Title-2-5">
+            <a:extLst xmlns:a="http://schemas.openxmlformats.org/drawingml/2006/main">
+              <a:ext uri="{FF2B5EF4-FFF2-40B4-BE49-F238E27FC236}">
+                <a16:creationId xmlns:a16="http://schemas.microsoft.com/office/drawing/2014/main" id="{918E5C8A-76FA-4CAC-98DA-5A7A9F695A5D}"/>
+              </a:ext>
+            </a:extLst>
+          </p:cNvPr>
+          <p:cNvSpPr>
+            <a:spLocks xmlns:a="http://schemas.openxmlformats.org/drawingml/2006/main" noGrp="1"/>
+          </p:cNvSpPr>
+          <p:nvPr/>
+        </p:nvSpPr>
+        <p:spPr>
+          <a:xfrm xmlns:a="http://schemas.openxmlformats.org/drawingml/2006/main">
+            <a:off x="393668" y="344043"/>
+            <a:ext cx="11404568" cy="1047464"/>
+          </a:xfrm>
+          <a:prstGeom xmlns:a="http://schemas.openxmlformats.org/drawingml/2006/main" prst="rect">
+            <a:avLst/>
+          </a:prstGeom>
+        </p:spPr>
+        <p:txBody>
+          <a:bodyPr xmlns:a="http://schemas.openxmlformats.org/drawingml/2006/main" lIns="0" tIns="0" rIns="0" bIns="0" anchor="t">
+            <a:normAutofit fontScale="100000"/>
+          </a:bodyPr>
+          <a:lstStyle xmlns:a="http://schemas.openxmlformats.org/drawingml/2006/main"/>
+          <a:p xmlns:a="http://schemas.openxmlformats.org/drawingml/2006/main">
+            <a:pPr algn="l">
+              <a:buNone/>
+              <a:defRPr sz="2900">
+                <a:solidFill>
+                  <a:srgbClr val="000000"/>
+                </a:solidFill>
+                <a:latin typeface="Helvetica Neue"/>
+                <a:ea typeface="Helvetica Neue"/>
+                <a:cs typeface="Helvetica Neue"/>
+              </a:defRPr>
+            </a:pPr>
+            <a:r>
+              <a:t>The refreshed TRAIN panel retained broad cross-sectional support</a:t>
+            </a:r>
+          </a:p>
+        </p:txBody>
+      </p:sp>
+      <p:sp>
+        <p:nvSpPr>
+          <p:cNvPr id="6" name="Content-Placeholder-9-6">
+            <a:extLst xmlns:a="http://schemas.openxmlformats.org/drawingml/2006/main">
+              <a:ext uri="{FF2B5EF4-FFF2-40B4-BE49-F238E27FC236}">
+                <a16:creationId xmlns:a16="http://schemas.microsoft.com/office/drawing/2014/main" id="{6A7CC687-51E6-4229-872C-B6942E8BF18A}"/>
+              </a:ext>
+            </a:extLst>
+          </p:cNvPr>
+          <p:cNvSpPr>
+            <a:spLocks xmlns:a="http://schemas.openxmlformats.org/drawingml/2006/main" noGrp="1"/>
+          </p:cNvSpPr>
+          <p:nvPr/>
+        </p:nvSpPr>
+        <p:spPr>
+          <a:xfrm xmlns:a="http://schemas.openxmlformats.org/drawingml/2006/main">
+            <a:off x="702374" y="4900613"/>
+            <a:ext cx="2949607" cy="819150"/>
+          </a:xfrm>
+          <a:prstGeom xmlns:a="http://schemas.openxmlformats.org/drawingml/2006/main" prst="rect">
+            <a:avLst/>
+          </a:prstGeom>
+        </p:spPr>
+        <p:txBody>
+          <a:bodyPr xmlns:a="http://schemas.openxmlformats.org/drawingml/2006/main" lIns="91440" tIns="45720" rIns="91440" bIns="45720">
+            <a:normAutofit fontScale="100000"/>
+          </a:bodyPr>
+          <a:lstStyle xmlns:a="http://schemas.openxmlformats.org/drawingml/2006/main"/>
+          <a:p xmlns:a="http://schemas.openxmlformats.org/drawingml/2006/main">
+            <a:pPr algn="l">
+              <a:buNone/>
+              <a:defRPr sz="2400">
+                <a:solidFill>
+                  <a:srgbClr val="000000"/>
+                </a:solidFill>
+                <a:latin typeface="Helvetica Neue"/>
+                <a:ea typeface="Helvetica Neue"/>
+                <a:cs typeface="Helvetica Neue"/>
+              </a:defRPr>
+            </a:pPr>
+            <a:r>
+              <a:t>eligible identities</a:t>
+            </a:r>
+          </a:p>
+        </p:txBody>
+      </p:sp>
+      <p:sp>
+        <p:nvSpPr>
+          <p:cNvPr id="7" name="Content-Placeholder-10-7">
+            <a:extLst xmlns:a="http://schemas.openxmlformats.org/drawingml/2006/main">
+              <a:ext uri="{FF2B5EF4-FFF2-40B4-BE49-F238E27FC236}">
+                <a16:creationId xmlns:a16="http://schemas.microsoft.com/office/drawing/2014/main" id="{0F2E6233-6148-44B6-BC9B-AC29EE5593F3}"/>
+              </a:ext>
+            </a:extLst>
+          </p:cNvPr>
+          <p:cNvSpPr>
+            <a:spLocks xmlns:a="http://schemas.openxmlformats.org/drawingml/2006/main" noGrp="1"/>
+          </p:cNvSpPr>
+          <p:nvPr/>
+        </p:nvSpPr>
+        <p:spPr>
+          <a:xfrm xmlns:a="http://schemas.openxmlformats.org/drawingml/2006/main">
+            <a:off x="8541830" y="4900613"/>
+            <a:ext cx="2949607" cy="819150"/>
+          </a:xfrm>
+          <a:prstGeom xmlns:a="http://schemas.openxmlformats.org/drawingml/2006/main" prst="rect">
+            <a:avLst/>
+          </a:prstGeom>
+        </p:spPr>
+        <p:txBody>
+          <a:bodyPr xmlns:a="http://schemas.openxmlformats.org/drawingml/2006/main" lIns="91440" tIns="45720" rIns="91440" bIns="45720">
+            <a:normAutofit fontScale="100000"/>
+          </a:bodyPr>
+          <a:lstStyle xmlns:a="http://schemas.openxmlformats.org/drawingml/2006/main"/>
+          <a:p xmlns:a="http://schemas.openxmlformats.org/drawingml/2006/main">
+            <a:pPr algn="l">
+              <a:buNone/>
+              <a:defRPr sz="2400">
+                <a:solidFill>
+                  <a:srgbClr val="000000"/>
+                </a:solidFill>
+                <a:latin typeface="Helvetica Neue"/>
+                <a:ea typeface="Helvetica Neue"/>
+                <a:cs typeface="Helvetica Neue"/>
+              </a:defRPr>
+            </a:pPr>
+            <a:r>
+              <a:t>assets per quarter</a:t>
+            </a:r>
+          </a:p>
+        </p:txBody>
+      </p:sp>
+      <p:sp>
+        <p:nvSpPr>
+          <p:cNvPr id="8" name="Content-Placeholder-11-8">
+            <a:extLst xmlns:a="http://schemas.openxmlformats.org/drawingml/2006/main">
+              <a:ext uri="{FF2B5EF4-FFF2-40B4-BE49-F238E27FC236}">
+                <a16:creationId xmlns:a16="http://schemas.microsoft.com/office/drawing/2014/main" id="{0AB6F37B-1200-4568-B7D0-7C921DB3798F}"/>
+              </a:ext>
+            </a:extLst>
+          </p:cNvPr>
+          <p:cNvSpPr>
+            <a:spLocks xmlns:a="http://schemas.openxmlformats.org/drawingml/2006/main" noGrp="1"/>
+          </p:cNvSpPr>
+          <p:nvPr/>
+        </p:nvSpPr>
+        <p:spPr>
+          <a:xfrm xmlns:a="http://schemas.openxmlformats.org/drawingml/2006/main">
+            <a:off x="4621244" y="4900613"/>
+            <a:ext cx="2949607" cy="819150"/>
+          </a:xfrm>
+          <a:prstGeom xmlns:a="http://schemas.openxmlformats.org/drawingml/2006/main" prst="rect">
+            <a:avLst/>
+          </a:prstGeom>
+        </p:spPr>
+        <p:txBody>
+          <a:bodyPr xmlns:a="http://schemas.openxmlformats.org/drawingml/2006/main" lIns="91440" tIns="45720" rIns="91440" bIns="45720">
+            <a:normAutofit fontScale="100000"/>
+          </a:bodyPr>
+          <a:lstStyle xmlns:a="http://schemas.openxmlformats.org/drawingml/2006/main"/>
+          <a:p xmlns:a="http://schemas.openxmlformats.org/drawingml/2006/main">
+            <a:pPr algn="l">
+              <a:buNone/>
+              <a:defRPr sz="2400">
+                <a:solidFill>
+                  <a:srgbClr val="000000"/>
+                </a:solidFill>
+                <a:latin typeface="Helvetica Neue"/>
+                <a:ea typeface="Helvetica Neue"/>
+                <a:cs typeface="Helvetica Neue"/>
+              </a:defRPr>
+            </a:pPr>
+            <a:r>
+              <a:t>asset-quarter rows</a:t>
+            </a:r>
+          </a:p>
+        </p:txBody>
+      </p:sp>
+      <p:sp>
+        <p:nvSpPr>
+          <p:cNvPr id="9" name="Content-Placeholder-9-9">
+            <a:extLst xmlns:a="http://schemas.openxmlformats.org/drawingml/2006/main">
+              <a:ext uri="{FF2B5EF4-FFF2-40B4-BE49-F238E27FC236}">
+                <a16:creationId xmlns:a16="http://schemas.microsoft.com/office/drawing/2014/main" id="{51B9BFDF-77E4-4D5B-B66D-B2DAABECA8D4}"/>
+              </a:ext>
+            </a:extLst>
+          </p:cNvPr>
+          <p:cNvSpPr>
+            <a:spLocks xmlns:a="http://schemas.openxmlformats.org/drawingml/2006/main" noGrp="1"/>
+          </p:cNvSpPr>
+          <p:nvPr/>
+        </p:nvSpPr>
+        <p:spPr>
+          <a:xfrm xmlns:a="http://schemas.openxmlformats.org/drawingml/2006/main">
+            <a:off x="702374" y="3429000"/>
+            <a:ext cx="2940082" cy="1359313"/>
+          </a:xfrm>
+          <a:prstGeom xmlns:a="http://schemas.openxmlformats.org/drawingml/2006/main" prst="rect">
+            <a:avLst/>
+          </a:prstGeom>
+        </p:spPr>
+        <p:txBody>
+          <a:bodyPr xmlns:a="http://schemas.openxmlformats.org/drawingml/2006/main" lIns="0" tIns="0" rIns="0" bIns="0" anchor="b">
+            <a:normAutofit fontScale="100000"/>
+          </a:bodyPr>
+          <a:lstStyle xmlns:a="http://schemas.openxmlformats.org/drawingml/2006/main"/>
+          <a:p xmlns:a="http://schemas.openxmlformats.org/drawingml/2006/main">
+            <a:pPr algn="l">
+              <a:buNone/>
+              <a:defRPr sz="2400">
+                <a:solidFill>
+                  <a:srgbClr val="000000"/>
+                </a:solidFill>
+                <a:latin typeface="Helvetica Neue"/>
+                <a:ea typeface="Helvetica Neue"/>
+                <a:cs typeface="Helvetica Neue"/>
+              </a:defRPr>
+            </a:pPr>
+            <a:r>
+              <a:t>114</a:t>
+            </a:r>
+          </a:p>
+        </p:txBody>
+      </p:sp>
+      <p:sp>
+        <p:nvSpPr>
+          <p:cNvPr id="10" name="Content-Placeholder-9-10">
+            <a:extLst xmlns:a="http://schemas.openxmlformats.org/drawingml/2006/main">
+              <a:ext uri="{FF2B5EF4-FFF2-40B4-BE49-F238E27FC236}">
+                <a16:creationId xmlns:a16="http://schemas.microsoft.com/office/drawing/2014/main" id="{7F12B4DA-8032-4549-A667-3A1D90732705}"/>
+              </a:ext>
+            </a:extLst>
+          </p:cNvPr>
+          <p:cNvSpPr>
+            <a:spLocks xmlns:a="http://schemas.openxmlformats.org/drawingml/2006/main" noGrp="1"/>
+          </p:cNvSpPr>
+          <p:nvPr/>
+        </p:nvSpPr>
+        <p:spPr>
+          <a:xfrm xmlns:a="http://schemas.openxmlformats.org/drawingml/2006/main">
+            <a:off x="4612958" y="3429000"/>
+            <a:ext cx="2940082" cy="1359313"/>
+          </a:xfrm>
+          <a:prstGeom xmlns:a="http://schemas.openxmlformats.org/drawingml/2006/main" prst="rect">
+            <a:avLst/>
+          </a:prstGeom>
+        </p:spPr>
+        <p:txBody>
+          <a:bodyPr xmlns:a="http://schemas.openxmlformats.org/drawingml/2006/main" lIns="0" tIns="0" rIns="0" bIns="0" anchor="b">
+            <a:normAutofit fontScale="100000"/>
+          </a:bodyPr>
+          <a:lstStyle xmlns:a="http://schemas.openxmlformats.org/drawingml/2006/main"/>
+          <a:p xmlns:a="http://schemas.openxmlformats.org/drawingml/2006/main">
+            <a:pPr algn="l">
+              <a:buNone/>
+              <a:defRPr sz="2400">
+                <a:solidFill>
+                  <a:srgbClr val="000000"/>
+                </a:solidFill>
+                <a:latin typeface="Helvetica Neue"/>
+                <a:ea typeface="Helvetica Neue"/>
+                <a:cs typeface="Helvetica Neue"/>
+              </a:defRPr>
+            </a:pPr>
+            <a:r>
+              <a:t>1,693</a:t>
+            </a:r>
+          </a:p>
+        </p:txBody>
+      </p:sp>
+      <p:sp>
+        <p:nvSpPr>
+          <p:cNvPr id="11" name="Content-Placeholder-9-11">
+            <a:extLst xmlns:a="http://schemas.openxmlformats.org/drawingml/2006/main">
+              <a:ext uri="{FF2B5EF4-FFF2-40B4-BE49-F238E27FC236}">
+                <a16:creationId xmlns:a16="http://schemas.microsoft.com/office/drawing/2014/main" id="{C19B1259-0AB2-4856-A40D-583403F78C33}"/>
+              </a:ext>
+            </a:extLst>
+          </p:cNvPr>
+          <p:cNvSpPr>
+            <a:spLocks xmlns:a="http://schemas.openxmlformats.org/drawingml/2006/main" noGrp="1"/>
+          </p:cNvSpPr>
+          <p:nvPr/>
+        </p:nvSpPr>
+        <p:spPr>
+          <a:xfrm xmlns:a="http://schemas.openxmlformats.org/drawingml/2006/main">
+            <a:off x="8562404" y="3429000"/>
+            <a:ext cx="2940082" cy="1359313"/>
+          </a:xfrm>
+          <a:prstGeom xmlns:a="http://schemas.openxmlformats.org/drawingml/2006/main" prst="rect">
+            <a:avLst/>
+          </a:prstGeom>
+        </p:spPr>
+        <p:txBody>
+          <a:bodyPr xmlns:a="http://schemas.openxmlformats.org/drawingml/2006/main" lIns="0" tIns="0" rIns="0" bIns="0" anchor="b">
+            <a:normAutofit fontScale="100000"/>
+          </a:bodyPr>
+          <a:lstStyle xmlns:a="http://schemas.openxmlformats.org/drawingml/2006/main"/>
+          <a:p xmlns:a="http://schemas.openxmlformats.org/drawingml/2006/main">
+            <a:pPr algn="l">
+              <a:buNone/>
+              <a:defRPr sz="2400">
+                <a:solidFill>
+                  <a:srgbClr val="000000"/>
+                </a:solidFill>
+                <a:latin typeface="Helvetica Neue"/>
+                <a:ea typeface="Helvetica Neue"/>
+                <a:cs typeface="Helvetica Neue"/>
+              </a:defRPr>
+            </a:pPr>
+            <a:r>
+              <a:t>111–114</a:t>
+            </a:r>
+          </a:p>
+        </p:txBody>
+      </p:sp>
+      <p:sp>
+        <p:nvSpPr>
+          <p:cNvPr id="12" name="Content-Placeholder-15-12">
+            <a:extLst xmlns:a="http://schemas.openxmlformats.org/drawingml/2006/main">
+              <a:ext uri="{FF2B5EF4-FFF2-40B4-BE49-F238E27FC236}">
+                <a16:creationId xmlns:a16="http://schemas.microsoft.com/office/drawing/2014/main" id="{7682C315-7A82-47BB-BF71-C98DC4580AE3}"/>
+              </a:ext>
+            </a:extLst>
+          </p:cNvPr>
+          <p:cNvSpPr>
+            <a:spLocks xmlns:a="http://schemas.openxmlformats.org/drawingml/2006/main" noGrp="1"/>
+          </p:cNvSpPr>
+          <p:nvPr/>
+        </p:nvSpPr>
+        <p:spPr>
+          <a:xfrm xmlns:a="http://schemas.openxmlformats.org/drawingml/2006/main">
+            <a:off x="393668" y="1138333"/>
+            <a:ext cx="11404568" cy="1599438"/>
+          </a:xfrm>
+          <a:prstGeom xmlns:a="http://schemas.openxmlformats.org/drawingml/2006/main" prst="rect">
+            <a:avLst/>
+          </a:prstGeom>
+        </p:spPr>
+        <p:txBody>
+          <a:bodyPr xmlns:a="http://schemas.openxmlformats.org/drawingml/2006/main" lIns="0" tIns="0" rIns="0" bIns="0">
             <a:noAutofit/>
           </a:bodyPr>
           <a:lstStyle xmlns:a="http://schemas.openxmlformats.org/drawingml/2006/main"/>
           <a:p xmlns:a="http://schemas.openxmlformats.org/drawingml/2006/main">
-            <a:pPr algn="r">
-              <a:defRPr sz="1000">
-                <a:solidFill>
-                  <a:srgbClr val="000000"/>
-                </a:solidFill>
-                <a:latin typeface="Helvetica Neue"/>
-                <a:ea typeface="Helvetica Neue"/>
-                <a:cs typeface="Helvetica Neue"/>
-              </a:defRPr>
-            </a:pPr>
-            <a:r>
-              <a:t>10</a:t>
-            </a:r>
-          </a:p>
-        </p:txBody>
-      </p:sp>
-      <p:sp>
-        <p:nvSpPr>
-          <p:cNvPr id="2" name="Google-Shape-533-p58-3">
-            <a:extLst xmlns:a="http://schemas.openxmlformats.org/drawingml/2006/main">
-              <a:ext uri="{FF2B5EF4-FFF2-40B4-BE49-F238E27FC236}">
-                <a16:creationId xmlns:a16="http://schemas.microsoft.com/office/drawing/2014/main" id="{6AD7EF99-6D87-4274-86C6-DDD77824092D}"/>
-              </a:ext>
-            </a:extLst>
-          </p:cNvPr>
-          <p:cNvSpPr>
-            <a:spLocks xmlns:a="http://schemas.openxmlformats.org/drawingml/2006/main" noGrp="1"/>
-          </p:cNvSpPr>
-          <p:nvPr/>
-        </p:nvSpPr>
-        <p:spPr>
-          <a:xfrm xmlns:a="http://schemas.openxmlformats.org/drawingml/2006/main">
-            <a:off x="393668" y="344043"/>
-            <a:ext cx="11404568" cy="1047464"/>
-          </a:xfrm>
-          <a:prstGeom xmlns:a="http://schemas.openxmlformats.org/drawingml/2006/main" prst="rect">
-            <a:avLst/>
-          </a:prstGeom>
-        </p:spPr>
-        <p:txBody>
-          <a:bodyPr xmlns:a="http://schemas.openxmlformats.org/drawingml/2006/main" wrap="square" lIns="0" tIns="0" rIns="0" bIns="0" anchor="t">
-            <a:noAutofit/>
-          </a:bodyPr>
-          <a:lstStyle xmlns:a="http://schemas.openxmlformats.org/drawingml/2006/main"/>
-          <a:p xmlns:a="http://schemas.openxmlformats.org/drawingml/2006/main">
-            <a:pPr algn="l">
-              <a:defRPr sz="2900">
-                <a:solidFill>
-                  <a:srgbClr val="000000"/>
-                </a:solidFill>
-                <a:latin typeface="Helvetica Neue"/>
-                <a:ea typeface="Helvetica Neue"/>
-                <a:cs typeface="Helvetica Neue"/>
-              </a:defRPr>
-            </a:pPr>
-            <a:r>
-              <a:t>Pooled fit did not travel</a:t>
-            </a:r>
-          </a:p>
-        </p:txBody>
-      </p:sp>
-      <p:sp>
-        <p:nvSpPr>
-          <p:cNvPr id="3" name="Picture-3-4-backing">
-            <a:extLst xmlns:a="http://schemas.openxmlformats.org/drawingml/2006/main">
-              <a:ext uri="{FF2B5EF4-FFF2-40B4-BE49-F238E27FC236}">
-                <a16:creationId xmlns:a16="http://schemas.microsoft.com/office/drawing/2014/main" id="{41117806-76B2-4297-BDE1-ED11D119D864}"/>
-              </a:ext>
-            </a:extLst>
-          </p:cNvPr>
-          <p:cNvSpPr>
-            <a:spLocks xmlns:a="http://schemas.openxmlformats.org/drawingml/2006/main" noGrp="1"/>
-          </p:cNvSpPr>
-          <p:nvPr/>
-        </p:nvSpPr>
-        <p:spPr>
-          <a:xfrm xmlns:a="http://schemas.openxmlformats.org/drawingml/2006/main">
-            <a:off x="6269069" y="396431"/>
-            <a:ext cx="5539740" cy="5602034"/>
-          </a:xfrm>
-          <a:prstGeom xmlns:a="http://schemas.openxmlformats.org/drawingml/2006/main" prst="roundRect">
-            <a:avLst>
-              <a:gd name="adj" fmla="val 1376"/>
-            </a:avLst>
-          </a:prstGeom>
-          <a:solidFill xmlns:a="http://schemas.openxmlformats.org/drawingml/2006/main">
-            <a:srgbClr val="EAF5FB"/>
-          </a:solidFill>
-          <a:ln xmlns:a="http://schemas.openxmlformats.org/drawingml/2006/main" w="9525">
-            <a:solidFill>
-              <a:srgbClr val="B8BCC4"/>
-            </a:solidFill>
-            <a:prstDash val="solid"/>
-          </a:ln>
-        </p:spPr>
-      </p:sp>
-      <p:pic>
-        <p:nvPicPr>
-          <p:cNvPr id="9" name="Picture-3-4"/>
-          <p:cNvPicPr>
-            <a:picLocks xmlns:a="http://schemas.openxmlformats.org/drawingml/2006/main" noChangeAspect="1"/>
-          </p:cNvPicPr>
-          <p:nvPr/>
-        </p:nvPicPr>
-        <p:blipFill>
-          <a:blip xmlns:r="http://schemas.openxmlformats.org/officeDocument/2006/relationships" xmlns:a="http://schemas.openxmlformats.org/drawingml/2006/main" r:embed="R6b73c81c42414db1"/>
-          <a:stretch xmlns:a="http://schemas.openxmlformats.org/drawingml/2006/main"/>
-        </p:blipFill>
-        <p:spPr>
-          <a:xfrm xmlns:a="http://schemas.openxmlformats.org/drawingml/2006/main">
-            <a:off x="6269069" y="1448056"/>
-            <a:ext cx="5539740" cy="3498783"/>
-          </a:xfrm>
-          <a:prstGeom xmlns:a="http://schemas.openxmlformats.org/drawingml/2006/main" prst="roundRect">
-            <a:avLst/>
-          </a:prstGeom>
-        </p:spPr>
-      </p:pic>
-      <p:sp>
-        <p:nvSpPr>
-          <p:cNvPr id="5" name="Google-Shape-534-p58-5">
-            <a:extLst xmlns:a="http://schemas.openxmlformats.org/drawingml/2006/main">
-              <a:ext uri="{FF2B5EF4-FFF2-40B4-BE49-F238E27FC236}">
-                <a16:creationId xmlns:a16="http://schemas.microsoft.com/office/drawing/2014/main" id="{5689FA6A-5AF0-4DFC-AD51-0B83F770F4EF}"/>
-              </a:ext>
-            </a:extLst>
-          </p:cNvPr>
-          <p:cNvSpPr>
-            <a:spLocks xmlns:a="http://schemas.openxmlformats.org/drawingml/2006/main" noGrp="1"/>
-          </p:cNvSpPr>
-          <p:nvPr/>
-        </p:nvSpPr>
-        <p:spPr>
-          <a:xfrm xmlns:a="http://schemas.openxmlformats.org/drawingml/2006/main">
-            <a:off x="393668" y="2031968"/>
-            <a:ext cx="5537168" cy="3962400"/>
-          </a:xfrm>
-          <a:prstGeom xmlns:a="http://schemas.openxmlformats.org/drawingml/2006/main" prst="rect">
-            <a:avLst/>
-          </a:prstGeom>
-        </p:spPr>
-        <p:txBody>
-          <a:bodyPr xmlns:a="http://schemas.openxmlformats.org/drawingml/2006/main" wrap="square" lIns="0" tIns="0" rIns="0" bIns="0" anchor="t">
-            <a:noAutofit/>
-          </a:bodyPr>
-          <a:lstStyle xmlns:a="http://schemas.openxmlformats.org/drawingml/2006/main"/>
-          <a:p xmlns:a="http://schemas.openxmlformats.org/drawingml/2006/main">
-            <a:pPr algn="l">
-              <a:defRPr sz="2400">
-                <a:solidFill>
-                  <a:srgbClr val="000000"/>
-                </a:solidFill>
-                <a:latin typeface="Helvetica Neue"/>
-                <a:ea typeface="Helvetica Neue"/>
-                <a:cs typeface="Helvetica Neue"/>
-              </a:defRPr>
-            </a:pPr>
-            <a:r>
-              <a:t>Two views of TRAIN</a:t>
-            </a:r>
-          </a:p>
-          <a:p xmlns:a="http://schemas.openxmlformats.org/drawingml/2006/main">
-            <a:pPr algn="l">
-              <a:defRPr sz="2400">
-                <a:solidFill>
-                  <a:srgbClr val="000000"/>
-                </a:solidFill>
-                <a:latin typeface="Helvetica Neue"/>
-                <a:ea typeface="Helvetica Neue"/>
-                <a:cs typeface="Helvetica Neue"/>
-              </a:defRPr>
-            </a:pPr>
-            <a:r>
-              <a:t>Full fit: +2.98 pp mean Q4 excess.
-Expanding validation: 5 / 9 positive IC quarters.
-The same feature set can look ordered in pooled data while failing chronological transport.</a:t>
+            <a:pPr algn="l">
+              <a:buNone/>
+              <a:defRPr sz="1600">
+                <a:solidFill>
+                  <a:srgbClr val="000000"/>
+                </a:solidFill>
+                <a:latin typeface="Helvetica Neue"/>
+                <a:ea typeface="Helvetica Neue"/>
+                <a:cs typeface="Helvetica Neue"/>
+              </a:defRPr>
+            </a:pPr>
+            <a:r>
+              <a:t>Coverage</a:t>
+            </a:r>
+          </a:p>
+          <a:p xmlns:a="http://schemas.openxmlformats.org/drawingml/2006/main">
+            <a:pPr algn="l">
+              <a:buNone/>
+              <a:defRPr sz="1600">
+                <a:solidFill>
+                  <a:srgbClr val="000000"/>
+                </a:solidFill>
+                <a:latin typeface="Helvetica Neue"/>
+                <a:ea typeface="Helvetica Neue"/>
+                <a:cs typeface="Helvetica Neue"/>
+              </a:defRPr>
+            </a:pPr>
+            <a:r>
+              <a:t>Eight later-history identities lacked the full 2016–2020 range and were excluded without replacement. All 15 causal integrity checks passed.</a:t>
             </a:r>
           </a:p>
         </p:txBody>
@@ -2586,7 +3110,7 @@
     </p:spTree>
     <p:extLst>
       <p:ext uri="{BB962C8B-B14F-4D97-AF65-F5344CB8AC3E}">
-        <p14:creationId xmlns:p14="http://schemas.microsoft.com/office/powerpoint/2010/main" val="1934358435"/>
+        <p14:creationId xmlns:p14="http://schemas.microsoft.com/office/powerpoint/2010/main" val="126134171"/>
       </p:ext>
     </p:extLst>
   </p:cSld>
@@ -2607,505 +3131,213 @@
       </p:grpSpPr>
       <p:sp>
         <p:nvSpPr>
-          <p:cNvPr id="13" name="Rounded-Rectangle-5-1">
-            <a:extLst xmlns:a="http://schemas.openxmlformats.org/drawingml/2006/main">
-              <a:ext uri="{FF2B5EF4-FFF2-40B4-BE49-F238E27FC236}">
-                <a16:creationId xmlns:a16="http://schemas.microsoft.com/office/drawing/2014/main" id="{0D19FCC8-53AA-46DF-A251-D1A745DB604C}"/>
-              </a:ext>
-            </a:extLst>
-          </p:cNvPr>
-          <p:cNvSpPr>
-            <a:spLocks xmlns:a="http://schemas.openxmlformats.org/drawingml/2006/main" noGrp="1"/>
-          </p:cNvSpPr>
-          <p:nvPr/>
-        </p:nvSpPr>
-        <p:spPr>
-          <a:xfrm xmlns:a="http://schemas.openxmlformats.org/drawingml/2006/main">
-            <a:off x="393668" y="3022568"/>
-            <a:ext cx="3568732" cy="2971800"/>
+          <p:cNvPr id="6" name="Google-Shape-532-p58-2">
+            <a:extLst xmlns:a="http://schemas.openxmlformats.org/drawingml/2006/main">
+              <a:ext uri="{FF2B5EF4-FFF2-40B4-BE49-F238E27FC236}">
+                <a16:creationId xmlns:a16="http://schemas.microsoft.com/office/drawing/2014/main" id="{499AC72A-98AF-491E-954F-2743BD1AA086}"/>
+              </a:ext>
+            </a:extLst>
+          </p:cNvPr>
+          <p:cNvSpPr>
+            <a:spLocks xmlns:a="http://schemas.openxmlformats.org/drawingml/2006/main" noGrp="1"/>
+          </p:cNvSpPr>
+          <p:nvPr/>
+        </p:nvSpPr>
+        <p:spPr>
+          <a:xfrm xmlns:a="http://schemas.openxmlformats.org/drawingml/2006/main">
+            <a:off x="11279315" y="6279261"/>
+            <a:ext cx="518922" cy="241268"/>
+          </a:xfrm>
+          <a:prstGeom xmlns:a="http://schemas.openxmlformats.org/drawingml/2006/main" prst="rect">
+            <a:avLst/>
+          </a:prstGeom>
+        </p:spPr>
+        <p:txBody>
+          <a:bodyPr xmlns:a="http://schemas.openxmlformats.org/drawingml/2006/main" wrap="square" lIns="0" tIns="0" rIns="0" bIns="0" anchor="b">
+            <a:noAutofit/>
+          </a:bodyPr>
+          <a:lstStyle xmlns:a="http://schemas.openxmlformats.org/drawingml/2006/main"/>
+          <a:p xmlns:a="http://schemas.openxmlformats.org/drawingml/2006/main">
+            <a:pPr algn="r">
+              <a:buNone/>
+              <a:defRPr sz="1000">
+                <a:solidFill>
+                  <a:srgbClr val="000000"/>
+                </a:solidFill>
+                <a:latin typeface="Helvetica Neue"/>
+                <a:ea typeface="Helvetica Neue"/>
+                <a:cs typeface="Helvetica Neue"/>
+              </a:defRPr>
+            </a:pPr>
+            <a:r>
+              <a:t>11</a:t>
+            </a:r>
+          </a:p>
+        </p:txBody>
+      </p:sp>
+      <p:sp>
+        <p:nvSpPr>
+          <p:cNvPr id="2" name="Google-Shape-533-p58-3">
+            <a:extLst xmlns:a="http://schemas.openxmlformats.org/drawingml/2006/main">
+              <a:ext uri="{FF2B5EF4-FFF2-40B4-BE49-F238E27FC236}">
+                <a16:creationId xmlns:a16="http://schemas.microsoft.com/office/drawing/2014/main" id="{A7427B33-1EDE-40C6-ACB4-A2BD3ABCD507}"/>
+              </a:ext>
+            </a:extLst>
+          </p:cNvPr>
+          <p:cNvSpPr>
+            <a:spLocks xmlns:a="http://schemas.openxmlformats.org/drawingml/2006/main" noGrp="1"/>
+          </p:cNvSpPr>
+          <p:nvPr/>
+        </p:nvSpPr>
+        <p:spPr>
+          <a:xfrm xmlns:a="http://schemas.openxmlformats.org/drawingml/2006/main">
+            <a:off x="393668" y="344043"/>
+            <a:ext cx="11404568" cy="1047464"/>
+          </a:xfrm>
+          <a:prstGeom xmlns:a="http://schemas.openxmlformats.org/drawingml/2006/main" prst="rect">
+            <a:avLst/>
+          </a:prstGeom>
+        </p:spPr>
+        <p:txBody>
+          <a:bodyPr xmlns:a="http://schemas.openxmlformats.org/drawingml/2006/main" wrap="square" lIns="0" tIns="0" rIns="0" bIns="0" anchor="t">
+            <a:noAutofit/>
+          </a:bodyPr>
+          <a:lstStyle xmlns:a="http://schemas.openxmlformats.org/drawingml/2006/main"/>
+          <a:p xmlns:a="http://schemas.openxmlformats.org/drawingml/2006/main">
+            <a:pPr algn="l">
+              <a:buNone/>
+              <a:defRPr sz="2900">
+                <a:solidFill>
+                  <a:srgbClr val="000000"/>
+                </a:solidFill>
+                <a:latin typeface="Helvetica Neue"/>
+                <a:ea typeface="Helvetica Neue"/>
+                <a:cs typeface="Helvetica Neue"/>
+              </a:defRPr>
+            </a:pPr>
+            <a:r>
+              <a:t>Every ridge penalty stayed negative</a:t>
+            </a:r>
+          </a:p>
+        </p:txBody>
+      </p:sp>
+      <p:sp>
+        <p:nvSpPr>
+          <p:cNvPr id="3" name="Picture-3-4-backing">
+            <a:extLst xmlns:a="http://schemas.openxmlformats.org/drawingml/2006/main">
+              <a:ext uri="{FF2B5EF4-FFF2-40B4-BE49-F238E27FC236}">
+                <a16:creationId xmlns:a16="http://schemas.microsoft.com/office/drawing/2014/main" id="{4BE467DC-724A-465C-A53C-C3DCF3F72894}"/>
+              </a:ext>
+            </a:extLst>
+          </p:cNvPr>
+          <p:cNvSpPr>
+            <a:spLocks xmlns:a="http://schemas.openxmlformats.org/drawingml/2006/main" noGrp="1"/>
+          </p:cNvSpPr>
+          <p:nvPr/>
+        </p:nvSpPr>
+        <p:spPr>
+          <a:xfrm xmlns:a="http://schemas.openxmlformats.org/drawingml/2006/main">
+            <a:off x="6269069" y="396431"/>
+            <a:ext cx="5539740" cy="5602034"/>
           </a:xfrm>
           <a:prstGeom xmlns:a="http://schemas.openxmlformats.org/drawingml/2006/main" prst="roundRect">
             <a:avLst>
-              <a:gd name="adj" fmla="val 2564"/>
+              <a:gd name="adj" fmla="val 1376"/>
             </a:avLst>
           </a:prstGeom>
           <a:solidFill xmlns:a="http://schemas.openxmlformats.org/drawingml/2006/main">
-            <a:srgbClr val="F2F2F2"/>
+            <a:srgbClr val="EAF5FB"/>
           </a:solidFill>
-        </p:spPr>
-      </p:sp>
-      <p:sp>
-        <p:nvSpPr>
-          <p:cNvPr id="2" name="Rounded-Rectangle-6-2">
-            <a:extLst xmlns:a="http://schemas.openxmlformats.org/drawingml/2006/main">
-              <a:ext uri="{FF2B5EF4-FFF2-40B4-BE49-F238E27FC236}">
-                <a16:creationId xmlns:a16="http://schemas.microsoft.com/office/drawing/2014/main" id="{CDF609DA-3BCF-42FE-B33F-4D03F413FA8C}"/>
-              </a:ext>
-            </a:extLst>
-          </p:cNvPr>
-          <p:cNvSpPr>
-            <a:spLocks xmlns:a="http://schemas.openxmlformats.org/drawingml/2006/main" noGrp="1"/>
-          </p:cNvSpPr>
-          <p:nvPr/>
-        </p:nvSpPr>
-        <p:spPr>
-          <a:xfrm xmlns:a="http://schemas.openxmlformats.org/drawingml/2006/main">
-            <a:off x="4311682" y="3022568"/>
-            <a:ext cx="3568732" cy="2971800"/>
+          <a:ln xmlns:a="http://schemas.openxmlformats.org/drawingml/2006/main" w="9525">
+            <a:solidFill>
+              <a:srgbClr val="B8BCC4"/>
+            </a:solidFill>
+            <a:prstDash val="solid"/>
+          </a:ln>
+        </p:spPr>
+      </p:sp>
+      <p:pic>
+        <p:nvPicPr>
+          <p:cNvPr id="11" name="Picture-3-4"/>
+          <p:cNvPicPr>
+            <a:picLocks xmlns:a="http://schemas.openxmlformats.org/drawingml/2006/main" noChangeAspect="1"/>
+          </p:cNvPicPr>
+          <p:nvPr/>
+        </p:nvPicPr>
+        <p:blipFill>
+          <a:blip xmlns:r="http://schemas.openxmlformats.org/officeDocument/2006/relationships" xmlns:a="http://schemas.openxmlformats.org/drawingml/2006/main" r:embed="Rb09090bfb3884164"/>
+          <a:stretch xmlns:a="http://schemas.openxmlformats.org/drawingml/2006/main"/>
+        </p:blipFill>
+        <p:spPr>
+          <a:xfrm xmlns:a="http://schemas.openxmlformats.org/drawingml/2006/main">
+            <a:off x="6269069" y="1448056"/>
+            <a:ext cx="5539740" cy="3498783"/>
           </a:xfrm>
           <a:prstGeom xmlns:a="http://schemas.openxmlformats.org/drawingml/2006/main" prst="roundRect">
-            <a:avLst>
-              <a:gd name="adj" fmla="val 2564"/>
-            </a:avLst>
-          </a:prstGeom>
-          <a:solidFill xmlns:a="http://schemas.openxmlformats.org/drawingml/2006/main">
-            <a:srgbClr val="F2F2F2"/>
-          </a:solidFill>
-        </p:spPr>
-      </p:sp>
-      <p:sp>
-        <p:nvSpPr>
-          <p:cNvPr id="3" name="Rounded-Rectangle-7-3">
-            <a:extLst xmlns:a="http://schemas.openxmlformats.org/drawingml/2006/main">
-              <a:ext uri="{FF2B5EF4-FFF2-40B4-BE49-F238E27FC236}">
-                <a16:creationId xmlns:a16="http://schemas.microsoft.com/office/drawing/2014/main" id="{3B0FF1E8-056E-4FBF-BE6B-E556E44E7857}"/>
-              </a:ext>
-            </a:extLst>
-          </p:cNvPr>
-          <p:cNvSpPr>
-            <a:spLocks xmlns:a="http://schemas.openxmlformats.org/drawingml/2006/main" noGrp="1"/>
-          </p:cNvSpPr>
-          <p:nvPr/>
-        </p:nvSpPr>
-        <p:spPr>
-          <a:xfrm xmlns:a="http://schemas.openxmlformats.org/drawingml/2006/main">
-            <a:off x="8232267" y="3022568"/>
-            <a:ext cx="3568732" cy="2971800"/>
-          </a:xfrm>
-          <a:prstGeom xmlns:a="http://schemas.openxmlformats.org/drawingml/2006/main" prst="roundRect">
-            <a:avLst>
-              <a:gd name="adj" fmla="val 2564"/>
-            </a:avLst>
-          </a:prstGeom>
-          <a:solidFill xmlns:a="http://schemas.openxmlformats.org/drawingml/2006/main">
-            <a:srgbClr val="F2F2F2"/>
-          </a:solidFill>
-        </p:spPr>
-      </p:sp>
-      <p:sp>
-        <p:nvSpPr>
-          <p:cNvPr id="4" name="Slide-Number-Placeholder-1-4">
-            <a:extLst xmlns:a="http://schemas.openxmlformats.org/drawingml/2006/main">
-              <a:ext uri="{FF2B5EF4-FFF2-40B4-BE49-F238E27FC236}">
-                <a16:creationId xmlns:a16="http://schemas.microsoft.com/office/drawing/2014/main" id="{02C2768D-B243-464B-AA45-2DD1CDAEF734}"/>
-              </a:ext>
-            </a:extLst>
-          </p:cNvPr>
-          <p:cNvSpPr>
-            <a:spLocks xmlns:a="http://schemas.openxmlformats.org/drawingml/2006/main" noGrp="1"/>
-          </p:cNvSpPr>
-          <p:nvPr/>
-        </p:nvSpPr>
-        <p:spPr>
-          <a:xfrm xmlns:a="http://schemas.openxmlformats.org/drawingml/2006/main">
-            <a:off x="11279315" y="6279261"/>
-            <a:ext cx="518922" cy="241268"/>
-          </a:xfrm>
-          <a:prstGeom xmlns:a="http://schemas.openxmlformats.org/drawingml/2006/main" prst="rect">
-            <a:avLst/>
-          </a:prstGeom>
-        </p:spPr>
-        <p:txBody>
-          <a:bodyPr xmlns:a="http://schemas.openxmlformats.org/drawingml/2006/main" lIns="0" tIns="0" rIns="0" bIns="0" anchor="b"/>
-          <a:lstStyle xmlns:a="http://schemas.openxmlformats.org/drawingml/2006/main"/>
-          <a:p xmlns:a="http://schemas.openxmlformats.org/drawingml/2006/main">
-            <a:pPr algn="r">
-              <a:defRPr sz="1000">
-                <a:solidFill>
-                  <a:srgbClr val="000000"/>
-                </a:solidFill>
-                <a:latin typeface="Helvetica Neue"/>
-                <a:ea typeface="Helvetica Neue"/>
-                <a:cs typeface="Helvetica Neue"/>
-              </a:defRPr>
-            </a:pPr>
-            <a:r>
-              <a:t>11</a:t>
-            </a:r>
-          </a:p>
-        </p:txBody>
-      </p:sp>
-      <p:sp>
-        <p:nvSpPr>
-          <p:cNvPr id="5" name="Title-2-5">
-            <a:extLst xmlns:a="http://schemas.openxmlformats.org/drawingml/2006/main">
-              <a:ext uri="{FF2B5EF4-FFF2-40B4-BE49-F238E27FC236}">
-                <a16:creationId xmlns:a16="http://schemas.microsoft.com/office/drawing/2014/main" id="{07B6AFD2-B610-4DB0-B122-028D124980F3}"/>
-              </a:ext>
-            </a:extLst>
-          </p:cNvPr>
-          <p:cNvSpPr>
-            <a:spLocks xmlns:a="http://schemas.openxmlformats.org/drawingml/2006/main" noGrp="1"/>
-          </p:cNvSpPr>
-          <p:nvPr/>
-        </p:nvSpPr>
-        <p:spPr>
-          <a:xfrm xmlns:a="http://schemas.openxmlformats.org/drawingml/2006/main">
-            <a:off x="393668" y="344043"/>
-            <a:ext cx="11404568" cy="1047464"/>
-          </a:xfrm>
-          <a:prstGeom xmlns:a="http://schemas.openxmlformats.org/drawingml/2006/main" prst="rect">
-            <a:avLst/>
-          </a:prstGeom>
-        </p:spPr>
-        <p:txBody>
-          <a:bodyPr xmlns:a="http://schemas.openxmlformats.org/drawingml/2006/main" lIns="0" tIns="0" rIns="0" bIns="0" anchor="t">
-            <a:normAutofit fontScale="100000"/>
-          </a:bodyPr>
-          <a:lstStyle xmlns:a="http://schemas.openxmlformats.org/drawingml/2006/main"/>
-          <a:p xmlns:a="http://schemas.openxmlformats.org/drawingml/2006/main">
-            <a:pPr algn="l">
-              <a:defRPr sz="2900">
-                <a:solidFill>
-                  <a:srgbClr val="000000"/>
-                </a:solidFill>
-                <a:latin typeface="Helvetica Neue"/>
-                <a:ea typeface="Helvetica Neue"/>
-                <a:cs typeface="Helvetica Neue"/>
-              </a:defRPr>
-            </a:pPr>
-            <a:r>
-              <a:t>Pooled TRAIN looked compelling—and that is why the gate mattered</a:t>
-            </a:r>
-          </a:p>
-        </p:txBody>
-      </p:sp>
-      <p:sp>
-        <p:nvSpPr>
-          <p:cNvPr id="6" name="Content-Placeholder-9-6">
-            <a:extLst xmlns:a="http://schemas.openxmlformats.org/drawingml/2006/main">
-              <a:ext uri="{FF2B5EF4-FFF2-40B4-BE49-F238E27FC236}">
-                <a16:creationId xmlns:a16="http://schemas.microsoft.com/office/drawing/2014/main" id="{461FADD2-3E90-4D86-8A1E-A534BFF4CB0A}"/>
-              </a:ext>
-            </a:extLst>
-          </p:cNvPr>
-          <p:cNvSpPr>
-            <a:spLocks xmlns:a="http://schemas.openxmlformats.org/drawingml/2006/main" noGrp="1"/>
-          </p:cNvSpPr>
-          <p:nvPr/>
-        </p:nvSpPr>
-        <p:spPr>
-          <a:xfrm xmlns:a="http://schemas.openxmlformats.org/drawingml/2006/main">
-            <a:off x="702374" y="4900613"/>
-            <a:ext cx="2949607" cy="819150"/>
-          </a:xfrm>
-          <a:prstGeom xmlns:a="http://schemas.openxmlformats.org/drawingml/2006/main" prst="rect">
-            <a:avLst/>
-          </a:prstGeom>
-        </p:spPr>
-        <p:txBody>
-          <a:bodyPr xmlns:a="http://schemas.openxmlformats.org/drawingml/2006/main" lIns="91440" tIns="45720" rIns="91440" bIns="45720">
-            <a:normAutofit fontScale="100000"/>
-          </a:bodyPr>
-          <a:lstStyle xmlns:a="http://schemas.openxmlformats.org/drawingml/2006/main"/>
-          <a:p xmlns:a="http://schemas.openxmlformats.org/drawingml/2006/main">
-            <a:pPr algn="l">
-              <a:defRPr sz="2400">
-                <a:solidFill>
-                  <a:srgbClr val="000000"/>
-                </a:solidFill>
-                <a:latin typeface="Helvetica Neue"/>
-                <a:ea typeface="Helvetica Neue"/>
-                <a:cs typeface="Helvetica Neue"/>
-              </a:defRPr>
-            </a:pPr>
-            <a:r>
-              <a:t>Q4 excess / quarter</a:t>
-            </a:r>
-          </a:p>
-        </p:txBody>
-      </p:sp>
-      <p:sp>
-        <p:nvSpPr>
-          <p:cNvPr id="7" name="Content-Placeholder-10-7">
-            <a:extLst xmlns:a="http://schemas.openxmlformats.org/drawingml/2006/main">
-              <a:ext uri="{FF2B5EF4-FFF2-40B4-BE49-F238E27FC236}">
-                <a16:creationId xmlns:a16="http://schemas.microsoft.com/office/drawing/2014/main" id="{7ED74C0B-E768-4F8C-A362-E41BD50FF75B}"/>
-              </a:ext>
-            </a:extLst>
-          </p:cNvPr>
-          <p:cNvSpPr>
-            <a:spLocks xmlns:a="http://schemas.openxmlformats.org/drawingml/2006/main" noGrp="1"/>
-          </p:cNvSpPr>
-          <p:nvPr/>
-        </p:nvSpPr>
-        <p:spPr>
-          <a:xfrm xmlns:a="http://schemas.openxmlformats.org/drawingml/2006/main">
-            <a:off x="8541830" y="4900613"/>
-            <a:ext cx="2949607" cy="819150"/>
-          </a:xfrm>
-          <a:prstGeom xmlns:a="http://schemas.openxmlformats.org/drawingml/2006/main" prst="rect">
-            <a:avLst/>
-          </a:prstGeom>
-        </p:spPr>
-        <p:txBody>
-          <a:bodyPr xmlns:a="http://schemas.openxmlformats.org/drawingml/2006/main" lIns="91440" tIns="45720" rIns="91440" bIns="45720">
-            <a:normAutofit fontScale="99479"/>
-          </a:bodyPr>
-          <a:lstStyle xmlns:a="http://schemas.openxmlformats.org/drawingml/2006/main"/>
-          <a:p xmlns:a="http://schemas.openxmlformats.org/drawingml/2006/main">
-            <a:pPr algn="l">
-              <a:defRPr sz="2400">
-                <a:solidFill>
-                  <a:srgbClr val="000000"/>
-                </a:solidFill>
-                <a:latin typeface="Helvetica Neue"/>
-                <a:ea typeface="Helvetica Neue"/>
-                <a:cs typeface="Helvetica Neue"/>
-              </a:defRPr>
-            </a:pPr>
-            <a:r>
-              <a:t>permutation percentile</a:t>
-            </a:r>
-          </a:p>
-        </p:txBody>
-      </p:sp>
-      <p:sp>
-        <p:nvSpPr>
-          <p:cNvPr id="8" name="Content-Placeholder-11-8">
-            <a:extLst xmlns:a="http://schemas.openxmlformats.org/drawingml/2006/main">
-              <a:ext uri="{FF2B5EF4-FFF2-40B4-BE49-F238E27FC236}">
-                <a16:creationId xmlns:a16="http://schemas.microsoft.com/office/drawing/2014/main" id="{25BBE91F-921E-4AAE-8407-F5A52963EDA7}"/>
-              </a:ext>
-            </a:extLst>
-          </p:cNvPr>
-          <p:cNvSpPr>
-            <a:spLocks xmlns:a="http://schemas.openxmlformats.org/drawingml/2006/main" noGrp="1"/>
-          </p:cNvSpPr>
-          <p:nvPr/>
-        </p:nvSpPr>
-        <p:spPr>
-          <a:xfrm xmlns:a="http://schemas.openxmlformats.org/drawingml/2006/main">
-            <a:off x="4621244" y="4900613"/>
-            <a:ext cx="2949607" cy="819150"/>
-          </a:xfrm>
-          <a:prstGeom xmlns:a="http://schemas.openxmlformats.org/drawingml/2006/main" prst="rect">
-            <a:avLst/>
-          </a:prstGeom>
-        </p:spPr>
-        <p:txBody>
-          <a:bodyPr xmlns:a="http://schemas.openxmlformats.org/drawingml/2006/main" lIns="91440" tIns="45720" rIns="91440" bIns="45720">
-            <a:normAutofit fontScale="100000"/>
-          </a:bodyPr>
-          <a:lstStyle xmlns:a="http://schemas.openxmlformats.org/drawingml/2006/main"/>
-          <a:p xmlns:a="http://schemas.openxmlformats.org/drawingml/2006/main">
-            <a:pPr algn="l">
-              <a:defRPr sz="2400">
-                <a:solidFill>
-                  <a:srgbClr val="000000"/>
-                </a:solidFill>
-                <a:latin typeface="Helvetica Neue"/>
-                <a:ea typeface="Helvetica Neue"/>
-                <a:cs typeface="Helvetica Neue"/>
-              </a:defRPr>
-            </a:pPr>
-            <a:r>
-              <a:t>Q4 minus Q1</a:t>
-            </a:r>
-          </a:p>
-        </p:txBody>
-      </p:sp>
-      <p:sp>
-        <p:nvSpPr>
-          <p:cNvPr id="9" name="Content-Placeholder-9-9">
-            <a:extLst xmlns:a="http://schemas.openxmlformats.org/drawingml/2006/main">
-              <a:ext uri="{FF2B5EF4-FFF2-40B4-BE49-F238E27FC236}">
-                <a16:creationId xmlns:a16="http://schemas.microsoft.com/office/drawing/2014/main" id="{F7AE3187-6953-43BA-B70B-253F1B02F139}"/>
-              </a:ext>
-            </a:extLst>
-          </p:cNvPr>
-          <p:cNvSpPr>
-            <a:spLocks xmlns:a="http://schemas.openxmlformats.org/drawingml/2006/main" noGrp="1"/>
-          </p:cNvSpPr>
-          <p:nvPr/>
-        </p:nvSpPr>
-        <p:spPr>
-          <a:xfrm xmlns:a="http://schemas.openxmlformats.org/drawingml/2006/main">
-            <a:off x="702374" y="3429000"/>
-            <a:ext cx="2940082" cy="1359313"/>
-          </a:xfrm>
-          <a:prstGeom xmlns:a="http://schemas.openxmlformats.org/drawingml/2006/main" prst="rect">
-            <a:avLst/>
-          </a:prstGeom>
-        </p:spPr>
-        <p:txBody>
-          <a:bodyPr xmlns:a="http://schemas.openxmlformats.org/drawingml/2006/main" lIns="0" tIns="0" rIns="0" bIns="0" anchor="b">
-            <a:normAutofit fontScale="100000"/>
-          </a:bodyPr>
-          <a:lstStyle xmlns:a="http://schemas.openxmlformats.org/drawingml/2006/main"/>
-          <a:p xmlns:a="http://schemas.openxmlformats.org/drawingml/2006/main">
-            <a:pPr algn="l">
-              <a:defRPr sz="2400">
-                <a:solidFill>
-                  <a:srgbClr val="000000"/>
-                </a:solidFill>
-                <a:latin typeface="Helvetica Neue"/>
-                <a:ea typeface="Helvetica Neue"/>
-                <a:cs typeface="Helvetica Neue"/>
-              </a:defRPr>
-            </a:pPr>
-            <a:r>
-              <a:t>+2.98 pp</a:t>
-            </a:r>
-          </a:p>
-        </p:txBody>
-      </p:sp>
-      <p:sp>
-        <p:nvSpPr>
-          <p:cNvPr id="10" name="Content-Placeholder-9-10">
-            <a:extLst xmlns:a="http://schemas.openxmlformats.org/drawingml/2006/main">
-              <a:ext uri="{FF2B5EF4-FFF2-40B4-BE49-F238E27FC236}">
-                <a16:creationId xmlns:a16="http://schemas.microsoft.com/office/drawing/2014/main" id="{B3E46665-91D9-4BAE-ACAD-2A3BBA05AB41}"/>
-              </a:ext>
-            </a:extLst>
-          </p:cNvPr>
-          <p:cNvSpPr>
-            <a:spLocks xmlns:a="http://schemas.openxmlformats.org/drawingml/2006/main" noGrp="1"/>
-          </p:cNvSpPr>
-          <p:nvPr/>
-        </p:nvSpPr>
-        <p:spPr>
-          <a:xfrm xmlns:a="http://schemas.openxmlformats.org/drawingml/2006/main">
-            <a:off x="4612958" y="3429000"/>
-            <a:ext cx="2940082" cy="1359313"/>
-          </a:xfrm>
-          <a:prstGeom xmlns:a="http://schemas.openxmlformats.org/drawingml/2006/main" prst="rect">
-            <a:avLst/>
-          </a:prstGeom>
-        </p:spPr>
-        <p:txBody>
-          <a:bodyPr xmlns:a="http://schemas.openxmlformats.org/drawingml/2006/main" lIns="0" tIns="0" rIns="0" bIns="0" anchor="b">
-            <a:normAutofit fontScale="100000"/>
-          </a:bodyPr>
-          <a:lstStyle xmlns:a="http://schemas.openxmlformats.org/drawingml/2006/main"/>
-          <a:p xmlns:a="http://schemas.openxmlformats.org/drawingml/2006/main">
-            <a:pPr algn="l">
-              <a:defRPr sz="2400">
-                <a:solidFill>
-                  <a:srgbClr val="000000"/>
-                </a:solidFill>
-                <a:latin typeface="Helvetica Neue"/>
-                <a:ea typeface="Helvetica Neue"/>
-                <a:cs typeface="Helvetica Neue"/>
-              </a:defRPr>
-            </a:pPr>
-            <a:r>
-              <a:t>+3.64 pp</a:t>
-            </a:r>
-          </a:p>
-        </p:txBody>
-      </p:sp>
-      <p:sp>
-        <p:nvSpPr>
-          <p:cNvPr id="11" name="Content-Placeholder-9-11">
-            <a:extLst xmlns:a="http://schemas.openxmlformats.org/drawingml/2006/main">
-              <a:ext uri="{FF2B5EF4-FFF2-40B4-BE49-F238E27FC236}">
-                <a16:creationId xmlns:a16="http://schemas.microsoft.com/office/drawing/2014/main" id="{939D32D0-E3EF-4865-9E90-349932CCE26F}"/>
-              </a:ext>
-            </a:extLst>
-          </p:cNvPr>
-          <p:cNvSpPr>
-            <a:spLocks xmlns:a="http://schemas.openxmlformats.org/drawingml/2006/main" noGrp="1"/>
-          </p:cNvSpPr>
-          <p:nvPr/>
-        </p:nvSpPr>
-        <p:spPr>
-          <a:xfrm xmlns:a="http://schemas.openxmlformats.org/drawingml/2006/main">
-            <a:off x="8562404" y="3429000"/>
-            <a:ext cx="2940082" cy="1359313"/>
-          </a:xfrm>
-          <a:prstGeom xmlns:a="http://schemas.openxmlformats.org/drawingml/2006/main" prst="rect">
-            <a:avLst/>
-          </a:prstGeom>
-        </p:spPr>
-        <p:txBody>
-          <a:bodyPr xmlns:a="http://schemas.openxmlformats.org/drawingml/2006/main" lIns="0" tIns="0" rIns="0" bIns="0" anchor="b">
-            <a:normAutofit fontScale="100000"/>
-          </a:bodyPr>
-          <a:lstStyle xmlns:a="http://schemas.openxmlformats.org/drawingml/2006/main"/>
-          <a:p xmlns:a="http://schemas.openxmlformats.org/drawingml/2006/main">
-            <a:pPr algn="l">
-              <a:defRPr sz="2400">
-                <a:solidFill>
-                  <a:srgbClr val="000000"/>
-                </a:solidFill>
-                <a:latin typeface="Helvetica Neue"/>
-                <a:ea typeface="Helvetica Neue"/>
-                <a:cs typeface="Helvetica Neue"/>
-              </a:defRPr>
-            </a:pPr>
-            <a:r>
-              <a:t>98.8th</a:t>
-            </a:r>
-          </a:p>
-        </p:txBody>
-      </p:sp>
-      <p:sp>
-        <p:nvSpPr>
-          <p:cNvPr id="12" name="Content-Placeholder-15-12">
-            <a:extLst xmlns:a="http://schemas.openxmlformats.org/drawingml/2006/main">
-              <a:ext uri="{FF2B5EF4-FFF2-40B4-BE49-F238E27FC236}">
-                <a16:creationId xmlns:a16="http://schemas.microsoft.com/office/drawing/2014/main" id="{8614FC25-81C0-4E4C-BBFA-63E84B8D84D8}"/>
-              </a:ext>
-            </a:extLst>
-          </p:cNvPr>
-          <p:cNvSpPr>
-            <a:spLocks xmlns:a="http://schemas.openxmlformats.org/drawingml/2006/main" noGrp="1"/>
-          </p:cNvSpPr>
-          <p:nvPr/>
-        </p:nvSpPr>
-        <p:spPr>
-          <a:xfrm xmlns:a="http://schemas.openxmlformats.org/drawingml/2006/main">
-            <a:off x="393668" y="1138333"/>
-            <a:ext cx="11404568" cy="1599438"/>
-          </a:xfrm>
-          <a:prstGeom xmlns:a="http://schemas.openxmlformats.org/drawingml/2006/main" prst="rect">
-            <a:avLst/>
-          </a:prstGeom>
-        </p:spPr>
-        <p:txBody>
-          <a:bodyPr xmlns:a="http://schemas.openxmlformats.org/drawingml/2006/main" lIns="0" tIns="0" rIns="0" bIns="0">
+            <a:avLst/>
+          </a:prstGeom>
+        </p:spPr>
+      </p:pic>
+      <p:sp>
+        <p:nvSpPr>
+          <p:cNvPr id="5" name="Google-Shape-534-p58-5">
+            <a:extLst xmlns:a="http://schemas.openxmlformats.org/drawingml/2006/main">
+              <a:ext uri="{FF2B5EF4-FFF2-40B4-BE49-F238E27FC236}">
+                <a16:creationId xmlns:a16="http://schemas.microsoft.com/office/drawing/2014/main" id="{AAE9434C-7245-4684-82EF-C0CE7057B84A}"/>
+              </a:ext>
+            </a:extLst>
+          </p:cNvPr>
+          <p:cNvSpPr>
+            <a:spLocks xmlns:a="http://schemas.openxmlformats.org/drawingml/2006/main" noGrp="1"/>
+          </p:cNvSpPr>
+          <p:nvPr/>
+        </p:nvSpPr>
+        <p:spPr>
+          <a:xfrm xmlns:a="http://schemas.openxmlformats.org/drawingml/2006/main">
+            <a:off x="393668" y="2031968"/>
+            <a:ext cx="5537168" cy="3962400"/>
+          </a:xfrm>
+          <a:prstGeom xmlns:a="http://schemas.openxmlformats.org/drawingml/2006/main" prst="rect">
+            <a:avLst/>
+          </a:prstGeom>
+        </p:spPr>
+        <p:txBody>
+          <a:bodyPr xmlns:a="http://schemas.openxmlformats.org/drawingml/2006/main" wrap="square" lIns="0" tIns="0" rIns="0" bIns="0" anchor="t">
             <a:noAutofit/>
           </a:bodyPr>
           <a:lstStyle xmlns:a="http://schemas.openxmlformats.org/drawingml/2006/main"/>
           <a:p xmlns:a="http://schemas.openxmlformats.org/drawingml/2006/main">
             <a:pPr algn="l">
-              <a:defRPr sz="1600">
-                <a:solidFill>
-                  <a:srgbClr val="000000"/>
-                </a:solidFill>
-                <a:latin typeface="Helvetica Neue"/>
-                <a:ea typeface="Helvetica Neue"/>
-                <a:cs typeface="Helvetica Neue"/>
-              </a:defRPr>
-            </a:pPr>
-            <a:r>
-              <a:t>Full-sample association</a:t>
-            </a:r>
-          </a:p>
-          <a:p xmlns:a="http://schemas.openxmlformats.org/drawingml/2006/main">
-            <a:pPr algn="l">
-              <a:defRPr sz="1600">
-                <a:solidFill>
-                  <a:srgbClr val="000000"/>
-                </a:solidFill>
-                <a:latin typeface="Helvetica Neue"/>
-                <a:ea typeface="Helvetica Neue"/>
-                <a:cs typeface="Helvetica Neue"/>
-              </a:defRPr>
-            </a:pPr>
-            <a:r>
-              <a:t>After fitting all 15 TRAIN quarters, the top score quartile separated strongly. Those same rows helped estimate the coefficients, so this is descriptive fit, not forward evidence.</a:t>
+              <a:buNone/>
+              <a:defRPr sz="2400">
+                <a:solidFill>
+                  <a:srgbClr val="000000"/>
+                </a:solidFill>
+                <a:latin typeface="Helvetica Neue"/>
+                <a:ea typeface="Helvetica Neue"/>
+                <a:cs typeface="Helvetica Neue"/>
+              </a:defRPr>
+            </a:pPr>
+            <a:r>
+              <a:t>Selected: λ = 100</a:t>
+            </a:r>
+          </a:p>
+          <a:p xmlns:a="http://schemas.openxmlformats.org/drawingml/2006/main">
+            <a:pPr algn="l">
+              <a:buNone/>
+              <a:defRPr sz="2400">
+                <a:solidFill>
+                  <a:srgbClr val="000000"/>
+                </a:solidFill>
+                <a:latin typeface="Helvetica Neue"/>
+                <a:ea typeface="Helvetica Neue"/>
+                <a:cs typeface="Helvetica Neue"/>
+              </a:defRPr>
+            </a:pPr>
+            <a:r>
+              <a:t>The one-standard-error rule preferred the strongest shrinkage.
+Mean forward rank IC still ended at −0.0176.
+Regularization reduced variance; it could not create temporal stability.</a:t>
             </a:r>
           </a:p>
         </p:txBody>
@@ -3113,7 +3345,7 @@
     </p:spTree>
     <p:extLst>
       <p:ext uri="{BB962C8B-B14F-4D97-AF65-F5344CB8AC3E}">
-        <p14:creationId xmlns:p14="http://schemas.microsoft.com/office/powerpoint/2010/main" val="302494351"/>
+        <p14:creationId xmlns:p14="http://schemas.microsoft.com/office/powerpoint/2010/main" val="648134586"/>
       </p:ext>
     </p:extLst>
   </p:cSld>
@@ -3137,7 +3369,7 @@
           <p:cNvPr id="6" name="Google-Shape-532-p58-2">
             <a:extLst xmlns:a="http://schemas.openxmlformats.org/drawingml/2006/main">
               <a:ext uri="{FF2B5EF4-FFF2-40B4-BE49-F238E27FC236}">
-                <a16:creationId xmlns:a16="http://schemas.microsoft.com/office/drawing/2014/main" id="{A90E47CE-7A88-4A4A-B0FD-EA7A943823D4}"/>
+                <a16:creationId xmlns:a16="http://schemas.microsoft.com/office/drawing/2014/main" id="{2932BA42-F0B8-4FC4-99CA-302C40439087}"/>
               </a:ext>
             </a:extLst>
           </p:cNvPr>
@@ -3162,6 +3394,7 @@
           <a:lstStyle xmlns:a="http://schemas.openxmlformats.org/drawingml/2006/main"/>
           <a:p xmlns:a="http://schemas.openxmlformats.org/drawingml/2006/main">
             <a:pPr algn="r">
+              <a:buNone/>
               <a:defRPr sz="1000">
                 <a:solidFill>
                   <a:srgbClr val="000000"/>
@@ -3182,7 +3415,7 @@
           <p:cNvPr id="2" name="Google-Shape-533-p58-3">
             <a:extLst xmlns:a="http://schemas.openxmlformats.org/drawingml/2006/main">
               <a:ext uri="{FF2B5EF4-FFF2-40B4-BE49-F238E27FC236}">
-                <a16:creationId xmlns:a16="http://schemas.microsoft.com/office/drawing/2014/main" id="{C8459ABB-C903-4143-9E3A-A3143EA670AF}"/>
+                <a16:creationId xmlns:a16="http://schemas.microsoft.com/office/drawing/2014/main" id="{6AD7EF99-6D87-4274-86C6-DDD77824092D}"/>
               </a:ext>
             </a:extLst>
           </p:cNvPr>
@@ -3207,6 +3440,7 @@
           <a:lstStyle xmlns:a="http://schemas.openxmlformats.org/drawingml/2006/main"/>
           <a:p xmlns:a="http://schemas.openxmlformats.org/drawingml/2006/main">
             <a:pPr algn="l">
+              <a:buNone/>
               <a:defRPr sz="2900">
                 <a:solidFill>
                   <a:srgbClr val="000000"/>
@@ -3217,7 +3451,7 @@
               </a:defRPr>
             </a:pPr>
             <a:r>
-              <a:t>One failed gate kept OOS sealed</a:t>
+              <a:t>Pooled fit did not travel</a:t>
             </a:r>
           </a:p>
         </p:txBody>
@@ -3227,7 +3461,7 @@
           <p:cNvPr id="3" name="Picture-3-4-backing">
             <a:extLst xmlns:a="http://schemas.openxmlformats.org/drawingml/2006/main">
               <a:ext uri="{FF2B5EF4-FFF2-40B4-BE49-F238E27FC236}">
-                <a16:creationId xmlns:a16="http://schemas.microsoft.com/office/drawing/2014/main" id="{CC68C4C5-7574-4ABC-BF6E-D72562F3FB28}"/>
+                <a16:creationId xmlns:a16="http://schemas.microsoft.com/office/drawing/2014/main" id="{41117806-76B2-4297-BDE1-ED11D119D864}"/>
               </a:ext>
             </a:extLst>
           </p:cNvPr>
@@ -3259,14 +3493,14 @@
       </p:sp>
       <p:pic>
         <p:nvPicPr>
-          <p:cNvPr id="9" name="Picture-3-4"/>
+          <p:cNvPr id="11" name="Picture-3-4"/>
           <p:cNvPicPr>
             <a:picLocks xmlns:a="http://schemas.openxmlformats.org/drawingml/2006/main" noChangeAspect="1"/>
           </p:cNvPicPr>
           <p:nvPr/>
         </p:nvPicPr>
         <p:blipFill>
-          <a:blip xmlns:r="http://schemas.openxmlformats.org/officeDocument/2006/relationships" xmlns:a="http://schemas.openxmlformats.org/drawingml/2006/main" r:embed="Rf681c99ca2a04063"/>
+          <a:blip xmlns:r="http://schemas.openxmlformats.org/officeDocument/2006/relationships" xmlns:a="http://schemas.openxmlformats.org/drawingml/2006/main" r:embed="Re0f618cfac5349a0"/>
           <a:stretch xmlns:a="http://schemas.openxmlformats.org/drawingml/2006/main"/>
         </p:blipFill>
         <p:spPr>
@@ -3284,7 +3518,7 @@
           <p:cNvPr id="5" name="Google-Shape-534-p58-5">
             <a:extLst xmlns:a="http://schemas.openxmlformats.org/drawingml/2006/main">
               <a:ext uri="{FF2B5EF4-FFF2-40B4-BE49-F238E27FC236}">
-                <a16:creationId xmlns:a16="http://schemas.microsoft.com/office/drawing/2014/main" id="{C554B745-CC5E-4B39-9F8D-CF3E1C5534E4}"/>
+                <a16:creationId xmlns:a16="http://schemas.microsoft.com/office/drawing/2014/main" id="{5689FA6A-5AF0-4DFC-AD51-0B83F770F4EF}"/>
               </a:ext>
             </a:extLst>
           </p:cNvPr>
@@ -3309,6 +3543,7 @@
           <a:lstStyle xmlns:a="http://schemas.openxmlformats.org/drawingml/2006/main"/>
           <a:p xmlns:a="http://schemas.openxmlformats.org/drawingml/2006/main">
             <a:pPr algn="l">
+              <a:buNone/>
               <a:defRPr sz="2400">
                 <a:solidFill>
                   <a:srgbClr val="000000"/>
@@ -3319,11 +3554,12 @@
               </a:defRPr>
             </a:pPr>
             <a:r>
-              <a:t>6 / 7 passed</a:t>
-            </a:r>
-          </a:p>
-          <a:p xmlns:a="http://schemas.openxmlformats.org/drawingml/2006/main">
-            <a:pPr algn="l">
+              <a:t>Two views of TRAIN</a:t>
+            </a:r>
+          </a:p>
+          <a:p xmlns:a="http://schemas.openxmlformats.org/drawingml/2006/main">
+            <a:pPr algn="l">
+              <a:buNone/>
               <a:defRPr sz="2400">
                 <a:solidFill>
                   <a:srgbClr val="000000"/>
@@ -3334,9 +3570,9 @@
               </a:defRPr>
             </a:pPr>
             <a:r>
-              <a:t>Integrity, support, pooled separation, permutation, and sector breadth all passed.
-G3 failed: −0.0176 mean forward IC and 55.6% positive quarters.
-A conjunction is not a vote.</a:t>
+              <a:t>Full fit: +2.98 pp mean Q4 excess.
+Expanding validation: 5 / 9 positive IC quarters.
+The same feature set can look ordered in pooled data while failing chronological transport.</a:t>
             </a:r>
           </a:p>
         </p:txBody>
@@ -3344,7 +3580,7 @@
     </p:spTree>
     <p:extLst>
       <p:ext uri="{BB962C8B-B14F-4D97-AF65-F5344CB8AC3E}">
-        <p14:creationId xmlns:p14="http://schemas.microsoft.com/office/powerpoint/2010/main" val="160952017"/>
+        <p14:creationId xmlns:p14="http://schemas.microsoft.com/office/powerpoint/2010/main" val="1934358435"/>
       </p:ext>
     </p:extLst>
   </p:cSld>
@@ -3365,255 +3601,515 @@
       </p:grpSpPr>
       <p:sp>
         <p:nvSpPr>
-          <p:cNvPr id="5" name="Google-Shape-534-p58-1">
-            <a:extLst xmlns:a="http://schemas.openxmlformats.org/drawingml/2006/main">
-              <a:ext uri="{FF2B5EF4-FFF2-40B4-BE49-F238E27FC236}">
-                <a16:creationId xmlns:a16="http://schemas.microsoft.com/office/drawing/2014/main" id="{CCE1A990-C9A5-450B-96E1-3B793E8D9B04}"/>
-              </a:ext>
-            </a:extLst>
-          </p:cNvPr>
-          <p:cNvSpPr>
-            <a:spLocks xmlns:a="http://schemas.openxmlformats.org/drawingml/2006/main" noGrp="1"/>
-          </p:cNvSpPr>
-          <p:nvPr/>
-        </p:nvSpPr>
-        <p:spPr>
-          <a:xfrm xmlns:a="http://schemas.openxmlformats.org/drawingml/2006/main">
-            <a:off x="393668" y="1838801"/>
-            <a:ext cx="5533168" cy="4155567"/>
-          </a:xfrm>
-          <a:prstGeom xmlns:a="http://schemas.openxmlformats.org/drawingml/2006/main" prst="rect">
-            <a:avLst/>
-          </a:prstGeom>
-        </p:spPr>
-        <p:txBody>
-          <a:bodyPr xmlns:a="http://schemas.openxmlformats.org/drawingml/2006/main" wrap="square" lIns="0" tIns="0" rIns="0" bIns="0" anchor="t">
+          <p:cNvPr id="13" name="Rounded-Rectangle-5-1">
+            <a:extLst xmlns:a="http://schemas.openxmlformats.org/drawingml/2006/main">
+              <a:ext uri="{FF2B5EF4-FFF2-40B4-BE49-F238E27FC236}">
+                <a16:creationId xmlns:a16="http://schemas.microsoft.com/office/drawing/2014/main" id="{0D19FCC8-53AA-46DF-A251-D1A745DB604C}"/>
+              </a:ext>
+            </a:extLst>
+          </p:cNvPr>
+          <p:cNvSpPr>
+            <a:spLocks xmlns:a="http://schemas.openxmlformats.org/drawingml/2006/main" noGrp="1"/>
+          </p:cNvSpPr>
+          <p:nvPr/>
+        </p:nvSpPr>
+        <p:spPr>
+          <a:xfrm xmlns:a="http://schemas.openxmlformats.org/drawingml/2006/main">
+            <a:off x="393668" y="3022568"/>
+            <a:ext cx="3568732" cy="2971800"/>
+          </a:xfrm>
+          <a:prstGeom xmlns:a="http://schemas.openxmlformats.org/drawingml/2006/main" prst="roundRect">
+            <a:avLst>
+              <a:gd name="adj" fmla="val 2564"/>
+            </a:avLst>
+          </a:prstGeom>
+          <a:solidFill xmlns:a="http://schemas.openxmlformats.org/drawingml/2006/main">
+            <a:srgbClr val="F2F2F2"/>
+          </a:solidFill>
+        </p:spPr>
+      </p:sp>
+      <p:sp>
+        <p:nvSpPr>
+          <p:cNvPr id="2" name="Rounded-Rectangle-6-2">
+            <a:extLst xmlns:a="http://schemas.openxmlformats.org/drawingml/2006/main">
+              <a:ext uri="{FF2B5EF4-FFF2-40B4-BE49-F238E27FC236}">
+                <a16:creationId xmlns:a16="http://schemas.microsoft.com/office/drawing/2014/main" id="{CDF609DA-3BCF-42FE-B33F-4D03F413FA8C}"/>
+              </a:ext>
+            </a:extLst>
+          </p:cNvPr>
+          <p:cNvSpPr>
+            <a:spLocks xmlns:a="http://schemas.openxmlformats.org/drawingml/2006/main" noGrp="1"/>
+          </p:cNvSpPr>
+          <p:nvPr/>
+        </p:nvSpPr>
+        <p:spPr>
+          <a:xfrm xmlns:a="http://schemas.openxmlformats.org/drawingml/2006/main">
+            <a:off x="4311682" y="3022568"/>
+            <a:ext cx="3568732" cy="2971800"/>
+          </a:xfrm>
+          <a:prstGeom xmlns:a="http://schemas.openxmlformats.org/drawingml/2006/main" prst="roundRect">
+            <a:avLst>
+              <a:gd name="adj" fmla="val 2564"/>
+            </a:avLst>
+          </a:prstGeom>
+          <a:solidFill xmlns:a="http://schemas.openxmlformats.org/drawingml/2006/main">
+            <a:srgbClr val="F2F2F2"/>
+          </a:solidFill>
+        </p:spPr>
+      </p:sp>
+      <p:sp>
+        <p:nvSpPr>
+          <p:cNvPr id="3" name="Rounded-Rectangle-7-3">
+            <a:extLst xmlns:a="http://schemas.openxmlformats.org/drawingml/2006/main">
+              <a:ext uri="{FF2B5EF4-FFF2-40B4-BE49-F238E27FC236}">
+                <a16:creationId xmlns:a16="http://schemas.microsoft.com/office/drawing/2014/main" id="{3B0FF1E8-056E-4FBF-BE6B-E556E44E7857}"/>
+              </a:ext>
+            </a:extLst>
+          </p:cNvPr>
+          <p:cNvSpPr>
+            <a:spLocks xmlns:a="http://schemas.openxmlformats.org/drawingml/2006/main" noGrp="1"/>
+          </p:cNvSpPr>
+          <p:nvPr/>
+        </p:nvSpPr>
+        <p:spPr>
+          <a:xfrm xmlns:a="http://schemas.openxmlformats.org/drawingml/2006/main">
+            <a:off x="8232267" y="3022568"/>
+            <a:ext cx="3568732" cy="2971800"/>
+          </a:xfrm>
+          <a:prstGeom xmlns:a="http://schemas.openxmlformats.org/drawingml/2006/main" prst="roundRect">
+            <a:avLst>
+              <a:gd name="adj" fmla="val 2564"/>
+            </a:avLst>
+          </a:prstGeom>
+          <a:solidFill xmlns:a="http://schemas.openxmlformats.org/drawingml/2006/main">
+            <a:srgbClr val="F2F2F2"/>
+          </a:solidFill>
+        </p:spPr>
+      </p:sp>
+      <p:sp>
+        <p:nvSpPr>
+          <p:cNvPr id="4" name="Slide-Number-Placeholder-1-4">
+            <a:extLst xmlns:a="http://schemas.openxmlformats.org/drawingml/2006/main">
+              <a:ext uri="{FF2B5EF4-FFF2-40B4-BE49-F238E27FC236}">
+                <a16:creationId xmlns:a16="http://schemas.microsoft.com/office/drawing/2014/main" id="{02C2768D-B243-464B-AA45-2DD1CDAEF734}"/>
+              </a:ext>
+            </a:extLst>
+          </p:cNvPr>
+          <p:cNvSpPr>
+            <a:spLocks xmlns:a="http://schemas.openxmlformats.org/drawingml/2006/main" noGrp="1"/>
+          </p:cNvSpPr>
+          <p:nvPr/>
+        </p:nvSpPr>
+        <p:spPr>
+          <a:xfrm xmlns:a="http://schemas.openxmlformats.org/drawingml/2006/main">
+            <a:off x="11279315" y="6279261"/>
+            <a:ext cx="518922" cy="241268"/>
+          </a:xfrm>
+          <a:prstGeom xmlns:a="http://schemas.openxmlformats.org/drawingml/2006/main" prst="rect">
+            <a:avLst/>
+          </a:prstGeom>
+        </p:spPr>
+        <p:txBody>
+          <a:bodyPr xmlns:a="http://schemas.openxmlformats.org/drawingml/2006/main" lIns="0" tIns="0" rIns="0" bIns="0" anchor="b"/>
+          <a:lstStyle xmlns:a="http://schemas.openxmlformats.org/drawingml/2006/main"/>
+          <a:p xmlns:a="http://schemas.openxmlformats.org/drawingml/2006/main">
+            <a:pPr algn="r">
+              <a:buNone/>
+              <a:defRPr sz="1000">
+                <a:solidFill>
+                  <a:srgbClr val="000000"/>
+                </a:solidFill>
+                <a:latin typeface="Helvetica Neue"/>
+                <a:ea typeface="Helvetica Neue"/>
+                <a:cs typeface="Helvetica Neue"/>
+              </a:defRPr>
+            </a:pPr>
+            <a:r>
+              <a:t>13</a:t>
+            </a:r>
+          </a:p>
+        </p:txBody>
+      </p:sp>
+      <p:sp>
+        <p:nvSpPr>
+          <p:cNvPr id="5" name="Title-2-5">
+            <a:extLst xmlns:a="http://schemas.openxmlformats.org/drawingml/2006/main">
+              <a:ext uri="{FF2B5EF4-FFF2-40B4-BE49-F238E27FC236}">
+                <a16:creationId xmlns:a16="http://schemas.microsoft.com/office/drawing/2014/main" id="{07B6AFD2-B610-4DB0-B122-028D124980F3}"/>
+              </a:ext>
+            </a:extLst>
+          </p:cNvPr>
+          <p:cNvSpPr>
+            <a:spLocks xmlns:a="http://schemas.openxmlformats.org/drawingml/2006/main" noGrp="1"/>
+          </p:cNvSpPr>
+          <p:nvPr/>
+        </p:nvSpPr>
+        <p:spPr>
+          <a:xfrm xmlns:a="http://schemas.openxmlformats.org/drawingml/2006/main">
+            <a:off x="393668" y="344043"/>
+            <a:ext cx="11404568" cy="1047464"/>
+          </a:xfrm>
+          <a:prstGeom xmlns:a="http://schemas.openxmlformats.org/drawingml/2006/main" prst="rect">
+            <a:avLst/>
+          </a:prstGeom>
+        </p:spPr>
+        <p:txBody>
+          <a:bodyPr xmlns:a="http://schemas.openxmlformats.org/drawingml/2006/main" lIns="0" tIns="0" rIns="0" bIns="0" anchor="t">
+            <a:normAutofit fontScale="100000"/>
+          </a:bodyPr>
+          <a:lstStyle xmlns:a="http://schemas.openxmlformats.org/drawingml/2006/main"/>
+          <a:p xmlns:a="http://schemas.openxmlformats.org/drawingml/2006/main">
+            <a:pPr algn="l">
+              <a:buNone/>
+              <a:defRPr sz="2900">
+                <a:solidFill>
+                  <a:srgbClr val="000000"/>
+                </a:solidFill>
+                <a:latin typeface="Helvetica Neue"/>
+                <a:ea typeface="Helvetica Neue"/>
+                <a:cs typeface="Helvetica Neue"/>
+              </a:defRPr>
+            </a:pPr>
+            <a:r>
+              <a:t>Pooled TRAIN looked compelling—and that is why the gate mattered</a:t>
+            </a:r>
+          </a:p>
+        </p:txBody>
+      </p:sp>
+      <p:sp>
+        <p:nvSpPr>
+          <p:cNvPr id="6" name="Content-Placeholder-9-6">
+            <a:extLst xmlns:a="http://schemas.openxmlformats.org/drawingml/2006/main">
+              <a:ext uri="{FF2B5EF4-FFF2-40B4-BE49-F238E27FC236}">
+                <a16:creationId xmlns:a16="http://schemas.microsoft.com/office/drawing/2014/main" id="{461FADD2-3E90-4D86-8A1E-A534BFF4CB0A}"/>
+              </a:ext>
+            </a:extLst>
+          </p:cNvPr>
+          <p:cNvSpPr>
+            <a:spLocks xmlns:a="http://schemas.openxmlformats.org/drawingml/2006/main" noGrp="1"/>
+          </p:cNvSpPr>
+          <p:nvPr/>
+        </p:nvSpPr>
+        <p:spPr>
+          <a:xfrm xmlns:a="http://schemas.openxmlformats.org/drawingml/2006/main">
+            <a:off x="702374" y="4900613"/>
+            <a:ext cx="2949607" cy="819150"/>
+          </a:xfrm>
+          <a:prstGeom xmlns:a="http://schemas.openxmlformats.org/drawingml/2006/main" prst="rect">
+            <a:avLst/>
+          </a:prstGeom>
+        </p:spPr>
+        <p:txBody>
+          <a:bodyPr xmlns:a="http://schemas.openxmlformats.org/drawingml/2006/main" lIns="91440" tIns="45720" rIns="91440" bIns="45720">
+            <a:normAutofit fontScale="100000"/>
+          </a:bodyPr>
+          <a:lstStyle xmlns:a="http://schemas.openxmlformats.org/drawingml/2006/main"/>
+          <a:p xmlns:a="http://schemas.openxmlformats.org/drawingml/2006/main">
+            <a:pPr algn="l">
+              <a:buNone/>
+              <a:defRPr sz="2400">
+                <a:solidFill>
+                  <a:srgbClr val="000000"/>
+                </a:solidFill>
+                <a:latin typeface="Helvetica Neue"/>
+                <a:ea typeface="Helvetica Neue"/>
+                <a:cs typeface="Helvetica Neue"/>
+              </a:defRPr>
+            </a:pPr>
+            <a:r>
+              <a:t>Q4 excess / quarter</a:t>
+            </a:r>
+          </a:p>
+        </p:txBody>
+      </p:sp>
+      <p:sp>
+        <p:nvSpPr>
+          <p:cNvPr id="7" name="Content-Placeholder-10-7">
+            <a:extLst xmlns:a="http://schemas.openxmlformats.org/drawingml/2006/main">
+              <a:ext uri="{FF2B5EF4-FFF2-40B4-BE49-F238E27FC236}">
+                <a16:creationId xmlns:a16="http://schemas.microsoft.com/office/drawing/2014/main" id="{7ED74C0B-E768-4F8C-A362-E41BD50FF75B}"/>
+              </a:ext>
+            </a:extLst>
+          </p:cNvPr>
+          <p:cNvSpPr>
+            <a:spLocks xmlns:a="http://schemas.openxmlformats.org/drawingml/2006/main" noGrp="1"/>
+          </p:cNvSpPr>
+          <p:nvPr/>
+        </p:nvSpPr>
+        <p:spPr>
+          <a:xfrm xmlns:a="http://schemas.openxmlformats.org/drawingml/2006/main">
+            <a:off x="8541830" y="4900613"/>
+            <a:ext cx="2949607" cy="819150"/>
+          </a:xfrm>
+          <a:prstGeom xmlns:a="http://schemas.openxmlformats.org/drawingml/2006/main" prst="rect">
+            <a:avLst/>
+          </a:prstGeom>
+        </p:spPr>
+        <p:txBody>
+          <a:bodyPr xmlns:a="http://schemas.openxmlformats.org/drawingml/2006/main" lIns="91440" tIns="45720" rIns="91440" bIns="45720">
+            <a:normAutofit fontScale="99479"/>
+          </a:bodyPr>
+          <a:lstStyle xmlns:a="http://schemas.openxmlformats.org/drawingml/2006/main"/>
+          <a:p xmlns:a="http://schemas.openxmlformats.org/drawingml/2006/main">
+            <a:pPr algn="l">
+              <a:buNone/>
+              <a:defRPr sz="2400">
+                <a:solidFill>
+                  <a:srgbClr val="000000"/>
+                </a:solidFill>
+                <a:latin typeface="Helvetica Neue"/>
+                <a:ea typeface="Helvetica Neue"/>
+                <a:cs typeface="Helvetica Neue"/>
+              </a:defRPr>
+            </a:pPr>
+            <a:r>
+              <a:t>permutation percentile</a:t>
+            </a:r>
+          </a:p>
+        </p:txBody>
+      </p:sp>
+      <p:sp>
+        <p:nvSpPr>
+          <p:cNvPr id="8" name="Content-Placeholder-11-8">
+            <a:extLst xmlns:a="http://schemas.openxmlformats.org/drawingml/2006/main">
+              <a:ext uri="{FF2B5EF4-FFF2-40B4-BE49-F238E27FC236}">
+                <a16:creationId xmlns:a16="http://schemas.microsoft.com/office/drawing/2014/main" id="{25BBE91F-921E-4AAE-8407-F5A52963EDA7}"/>
+              </a:ext>
+            </a:extLst>
+          </p:cNvPr>
+          <p:cNvSpPr>
+            <a:spLocks xmlns:a="http://schemas.openxmlformats.org/drawingml/2006/main" noGrp="1"/>
+          </p:cNvSpPr>
+          <p:nvPr/>
+        </p:nvSpPr>
+        <p:spPr>
+          <a:xfrm xmlns:a="http://schemas.openxmlformats.org/drawingml/2006/main">
+            <a:off x="4621244" y="4900613"/>
+            <a:ext cx="2949607" cy="819150"/>
+          </a:xfrm>
+          <a:prstGeom xmlns:a="http://schemas.openxmlformats.org/drawingml/2006/main" prst="rect">
+            <a:avLst/>
+          </a:prstGeom>
+        </p:spPr>
+        <p:txBody>
+          <a:bodyPr xmlns:a="http://schemas.openxmlformats.org/drawingml/2006/main" lIns="91440" tIns="45720" rIns="91440" bIns="45720">
+            <a:normAutofit fontScale="100000"/>
+          </a:bodyPr>
+          <a:lstStyle xmlns:a="http://schemas.openxmlformats.org/drawingml/2006/main"/>
+          <a:p xmlns:a="http://schemas.openxmlformats.org/drawingml/2006/main">
+            <a:pPr algn="l">
+              <a:buNone/>
+              <a:defRPr sz="2400">
+                <a:solidFill>
+                  <a:srgbClr val="000000"/>
+                </a:solidFill>
+                <a:latin typeface="Helvetica Neue"/>
+                <a:ea typeface="Helvetica Neue"/>
+                <a:cs typeface="Helvetica Neue"/>
+              </a:defRPr>
+            </a:pPr>
+            <a:r>
+              <a:t>Q4 minus Q1</a:t>
+            </a:r>
+          </a:p>
+        </p:txBody>
+      </p:sp>
+      <p:sp>
+        <p:nvSpPr>
+          <p:cNvPr id="9" name="Content-Placeholder-9-9">
+            <a:extLst xmlns:a="http://schemas.openxmlformats.org/drawingml/2006/main">
+              <a:ext uri="{FF2B5EF4-FFF2-40B4-BE49-F238E27FC236}">
+                <a16:creationId xmlns:a16="http://schemas.microsoft.com/office/drawing/2014/main" id="{F7AE3187-6953-43BA-B70B-253F1B02F139}"/>
+              </a:ext>
+            </a:extLst>
+          </p:cNvPr>
+          <p:cNvSpPr>
+            <a:spLocks xmlns:a="http://schemas.openxmlformats.org/drawingml/2006/main" noGrp="1"/>
+          </p:cNvSpPr>
+          <p:nvPr/>
+        </p:nvSpPr>
+        <p:spPr>
+          <a:xfrm xmlns:a="http://schemas.openxmlformats.org/drawingml/2006/main">
+            <a:off x="702374" y="3429000"/>
+            <a:ext cx="2940082" cy="1359313"/>
+          </a:xfrm>
+          <a:prstGeom xmlns:a="http://schemas.openxmlformats.org/drawingml/2006/main" prst="rect">
+            <a:avLst/>
+          </a:prstGeom>
+        </p:spPr>
+        <p:txBody>
+          <a:bodyPr xmlns:a="http://schemas.openxmlformats.org/drawingml/2006/main" lIns="0" tIns="0" rIns="0" bIns="0" anchor="b">
+            <a:normAutofit fontScale="100000"/>
+          </a:bodyPr>
+          <a:lstStyle xmlns:a="http://schemas.openxmlformats.org/drawingml/2006/main"/>
+          <a:p xmlns:a="http://schemas.openxmlformats.org/drawingml/2006/main">
+            <a:pPr algn="l">
+              <a:buNone/>
+              <a:defRPr sz="2400">
+                <a:solidFill>
+                  <a:srgbClr val="000000"/>
+                </a:solidFill>
+                <a:latin typeface="Helvetica Neue"/>
+                <a:ea typeface="Helvetica Neue"/>
+                <a:cs typeface="Helvetica Neue"/>
+              </a:defRPr>
+            </a:pPr>
+            <a:r>
+              <a:t>+2.98 pp</a:t>
+            </a:r>
+          </a:p>
+        </p:txBody>
+      </p:sp>
+      <p:sp>
+        <p:nvSpPr>
+          <p:cNvPr id="10" name="Content-Placeholder-9-10">
+            <a:extLst xmlns:a="http://schemas.openxmlformats.org/drawingml/2006/main">
+              <a:ext uri="{FF2B5EF4-FFF2-40B4-BE49-F238E27FC236}">
+                <a16:creationId xmlns:a16="http://schemas.microsoft.com/office/drawing/2014/main" id="{B3E46665-91D9-4BAE-ACAD-2A3BBA05AB41}"/>
+              </a:ext>
+            </a:extLst>
+          </p:cNvPr>
+          <p:cNvSpPr>
+            <a:spLocks xmlns:a="http://schemas.openxmlformats.org/drawingml/2006/main" noGrp="1"/>
+          </p:cNvSpPr>
+          <p:nvPr/>
+        </p:nvSpPr>
+        <p:spPr>
+          <a:xfrm xmlns:a="http://schemas.openxmlformats.org/drawingml/2006/main">
+            <a:off x="4612958" y="3429000"/>
+            <a:ext cx="2940082" cy="1359313"/>
+          </a:xfrm>
+          <a:prstGeom xmlns:a="http://schemas.openxmlformats.org/drawingml/2006/main" prst="rect">
+            <a:avLst/>
+          </a:prstGeom>
+        </p:spPr>
+        <p:txBody>
+          <a:bodyPr xmlns:a="http://schemas.openxmlformats.org/drawingml/2006/main" lIns="0" tIns="0" rIns="0" bIns="0" anchor="b">
+            <a:normAutofit fontScale="100000"/>
+          </a:bodyPr>
+          <a:lstStyle xmlns:a="http://schemas.openxmlformats.org/drawingml/2006/main"/>
+          <a:p xmlns:a="http://schemas.openxmlformats.org/drawingml/2006/main">
+            <a:pPr algn="l">
+              <a:buNone/>
+              <a:defRPr sz="2400">
+                <a:solidFill>
+                  <a:srgbClr val="000000"/>
+                </a:solidFill>
+                <a:latin typeface="Helvetica Neue"/>
+                <a:ea typeface="Helvetica Neue"/>
+                <a:cs typeface="Helvetica Neue"/>
+              </a:defRPr>
+            </a:pPr>
+            <a:r>
+              <a:t>+3.64 pp</a:t>
+            </a:r>
+          </a:p>
+        </p:txBody>
+      </p:sp>
+      <p:sp>
+        <p:nvSpPr>
+          <p:cNvPr id="11" name="Content-Placeholder-9-11">
+            <a:extLst xmlns:a="http://schemas.openxmlformats.org/drawingml/2006/main">
+              <a:ext uri="{FF2B5EF4-FFF2-40B4-BE49-F238E27FC236}">
+                <a16:creationId xmlns:a16="http://schemas.microsoft.com/office/drawing/2014/main" id="{939D32D0-E3EF-4865-9E90-349932CCE26F}"/>
+              </a:ext>
+            </a:extLst>
+          </p:cNvPr>
+          <p:cNvSpPr>
+            <a:spLocks xmlns:a="http://schemas.openxmlformats.org/drawingml/2006/main" noGrp="1"/>
+          </p:cNvSpPr>
+          <p:nvPr/>
+        </p:nvSpPr>
+        <p:spPr>
+          <a:xfrm xmlns:a="http://schemas.openxmlformats.org/drawingml/2006/main">
+            <a:off x="8562404" y="3429000"/>
+            <a:ext cx="2940082" cy="1359313"/>
+          </a:xfrm>
+          <a:prstGeom xmlns:a="http://schemas.openxmlformats.org/drawingml/2006/main" prst="rect">
+            <a:avLst/>
+          </a:prstGeom>
+        </p:spPr>
+        <p:txBody>
+          <a:bodyPr xmlns:a="http://schemas.openxmlformats.org/drawingml/2006/main" lIns="0" tIns="0" rIns="0" bIns="0" anchor="b">
+            <a:normAutofit fontScale="100000"/>
+          </a:bodyPr>
+          <a:lstStyle xmlns:a="http://schemas.openxmlformats.org/drawingml/2006/main"/>
+          <a:p xmlns:a="http://schemas.openxmlformats.org/drawingml/2006/main">
+            <a:pPr algn="l">
+              <a:buNone/>
+              <a:defRPr sz="2400">
+                <a:solidFill>
+                  <a:srgbClr val="000000"/>
+                </a:solidFill>
+                <a:latin typeface="Helvetica Neue"/>
+                <a:ea typeface="Helvetica Neue"/>
+                <a:cs typeface="Helvetica Neue"/>
+              </a:defRPr>
+            </a:pPr>
+            <a:r>
+              <a:t>98.8th</a:t>
+            </a:r>
+          </a:p>
+        </p:txBody>
+      </p:sp>
+      <p:sp>
+        <p:nvSpPr>
+          <p:cNvPr id="12" name="Content-Placeholder-15-12">
+            <a:extLst xmlns:a="http://schemas.openxmlformats.org/drawingml/2006/main">
+              <a:ext uri="{FF2B5EF4-FFF2-40B4-BE49-F238E27FC236}">
+                <a16:creationId xmlns:a16="http://schemas.microsoft.com/office/drawing/2014/main" id="{8614FC25-81C0-4E4C-BBFA-63E84B8D84D8}"/>
+              </a:ext>
+            </a:extLst>
+          </p:cNvPr>
+          <p:cNvSpPr>
+            <a:spLocks xmlns:a="http://schemas.openxmlformats.org/drawingml/2006/main" noGrp="1"/>
+          </p:cNvSpPr>
+          <p:nvPr/>
+        </p:nvSpPr>
+        <p:spPr>
+          <a:xfrm xmlns:a="http://schemas.openxmlformats.org/drawingml/2006/main">
+            <a:off x="393668" y="1138333"/>
+            <a:ext cx="11404568" cy="1599438"/>
+          </a:xfrm>
+          <a:prstGeom xmlns:a="http://schemas.openxmlformats.org/drawingml/2006/main" prst="rect">
+            <a:avLst/>
+          </a:prstGeom>
+        </p:spPr>
+        <p:txBody>
+          <a:bodyPr xmlns:a="http://schemas.openxmlformats.org/drawingml/2006/main" lIns="0" tIns="0" rIns="0" bIns="0">
             <a:noAutofit/>
           </a:bodyPr>
           <a:lstStyle xmlns:a="http://schemas.openxmlformats.org/drawingml/2006/main"/>
           <a:p xmlns:a="http://schemas.openxmlformats.org/drawingml/2006/main">
             <a:pPr algn="l">
-              <a:defRPr sz="2400">
-                <a:solidFill>
-                  <a:srgbClr val="000000"/>
-                </a:solidFill>
-                <a:latin typeface="Helvetica Neue"/>
-                <a:ea typeface="Helvetica Neue"/>
-                <a:cs typeface="Helvetica Neue"/>
-              </a:defRPr>
-            </a:pPr>
-            <a:r>
-              <a:t>What caught our eye</a:t>
-            </a:r>
-          </a:p>
-          <a:p xmlns:a="http://schemas.openxmlformats.org/drawingml/2006/main">
-            <a:pPr algn="l">
-              <a:defRPr sz="2400">
-                <a:solidFill>
-                  <a:srgbClr val="000000"/>
-                </a:solidFill>
-                <a:latin typeface="Helvetica Neue"/>
-                <a:ea typeface="Helvetica Neue"/>
-                <a:cs typeface="Helvetica Neue"/>
-              </a:defRPr>
-            </a:pPr>
-            <a:r>
-              <a:t>The predeclared, non-learned composite averaged +0.041 rank IC across all 15 TRAIN quarters.</a:t>
-            </a:r>
-          </a:p>
-          <a:p xmlns:a="http://schemas.openxmlformats.org/drawingml/2006/main">
-            <a:pPr algn="l">
-              <a:defRPr sz="2400">
-                <a:solidFill>
-                  <a:srgbClr val="000000"/>
-                </a:solidFill>
-                <a:latin typeface="Helvetica Neue"/>
-                <a:ea typeface="Helvetica Neue"/>
-                <a:cs typeface="Helvetica Neue"/>
-              </a:defRPr>
-            </a:pPr>
-            <a:r>
-              <a:t>It was positive in 9 / 15 quarters and its top quartile beat the universe by +1.74 pp on average.</a:t>
-            </a:r>
-          </a:p>
-          <a:p xmlns:a="http://schemas.openxmlformats.org/drawingml/2006/main">
-            <a:pPr algn="l">
-              <a:defRPr sz="2400">
-                <a:solidFill>
-                  <a:srgbClr val="000000"/>
-                </a:solidFill>
-                <a:latin typeface="Helvetica Neue"/>
-                <a:ea typeface="Helvetica Neue"/>
-                <a:cs typeface="Helvetica Neue"/>
-              </a:defRPr>
-            </a:pPr>
-            <a:r>
-              <a:t>That is more stable-looking than the fitted ridge replay.</a:t>
-            </a:r>
-          </a:p>
-        </p:txBody>
-      </p:sp>
-      <p:sp>
-        <p:nvSpPr>
-          <p:cNvPr id="2" name="Google-Shape-532-p58-3">
-            <a:extLst xmlns:a="http://schemas.openxmlformats.org/drawingml/2006/main">
-              <a:ext uri="{FF2B5EF4-FFF2-40B4-BE49-F238E27FC236}">
-                <a16:creationId xmlns:a16="http://schemas.microsoft.com/office/drawing/2014/main" id="{4A76C4B8-F6CC-408D-AABB-9B40E65F498F}"/>
-              </a:ext>
-            </a:extLst>
-          </p:cNvPr>
-          <p:cNvSpPr>
-            <a:spLocks xmlns:a="http://schemas.openxmlformats.org/drawingml/2006/main" noGrp="1"/>
-          </p:cNvSpPr>
-          <p:nvPr/>
-        </p:nvSpPr>
-        <p:spPr>
-          <a:xfrm xmlns:a="http://schemas.openxmlformats.org/drawingml/2006/main">
-            <a:off x="11279315" y="6279261"/>
-            <a:ext cx="518922" cy="241268"/>
-          </a:xfrm>
-          <a:prstGeom xmlns:a="http://schemas.openxmlformats.org/drawingml/2006/main" prst="rect">
-            <a:avLst/>
-          </a:prstGeom>
-        </p:spPr>
-        <p:txBody>
-          <a:bodyPr xmlns:a="http://schemas.openxmlformats.org/drawingml/2006/main" wrap="square" lIns="0" tIns="0" rIns="0" bIns="0" anchor="b">
-            <a:noAutofit/>
-          </a:bodyPr>
-          <a:lstStyle xmlns:a="http://schemas.openxmlformats.org/drawingml/2006/main"/>
-          <a:p xmlns:a="http://schemas.openxmlformats.org/drawingml/2006/main">
-            <a:pPr algn="r">
-              <a:defRPr sz="1000">
-                <a:solidFill>
-                  <a:srgbClr val="000000"/>
-                </a:solidFill>
-                <a:latin typeface="Helvetica Neue"/>
-                <a:ea typeface="Helvetica Neue"/>
-                <a:cs typeface="Helvetica Neue"/>
-              </a:defRPr>
-            </a:pPr>
-            <a:r>
-              <a:t>13</a:t>
-            </a:r>
-          </a:p>
-        </p:txBody>
-      </p:sp>
-      <p:sp>
-        <p:nvSpPr>
-          <p:cNvPr id="3" name="Google-Shape-533-p58-4">
-            <a:extLst xmlns:a="http://schemas.openxmlformats.org/drawingml/2006/main">
-              <a:ext uri="{FF2B5EF4-FFF2-40B4-BE49-F238E27FC236}">
-                <a16:creationId xmlns:a16="http://schemas.microsoft.com/office/drawing/2014/main" id="{78E516F2-4357-424D-B869-C53D8FA1E91B}"/>
-              </a:ext>
-            </a:extLst>
-          </p:cNvPr>
-          <p:cNvSpPr>
-            <a:spLocks xmlns:a="http://schemas.openxmlformats.org/drawingml/2006/main" noGrp="1"/>
-          </p:cNvSpPr>
-          <p:nvPr/>
-        </p:nvSpPr>
-        <p:spPr>
-          <a:xfrm xmlns:a="http://schemas.openxmlformats.org/drawingml/2006/main">
-            <a:off x="393668" y="344043"/>
-            <a:ext cx="11404568" cy="1047464"/>
-          </a:xfrm>
-          <a:prstGeom xmlns:a="http://schemas.openxmlformats.org/drawingml/2006/main" prst="rect">
-            <a:avLst/>
-          </a:prstGeom>
-        </p:spPr>
-        <p:txBody>
-          <a:bodyPr xmlns:a="http://schemas.openxmlformats.org/drawingml/2006/main" wrap="square" lIns="0" tIns="0" rIns="0" bIns="0" anchor="t">
-            <a:noAutofit/>
-          </a:bodyPr>
-          <a:lstStyle xmlns:a="http://schemas.openxmlformats.org/drawingml/2006/main"/>
-          <a:p xmlns:a="http://schemas.openxmlformats.org/drawingml/2006/main">
-            <a:pPr algn="l">
-              <a:defRPr sz="2900">
-                <a:solidFill>
-                  <a:srgbClr val="000000"/>
-                </a:solidFill>
-                <a:latin typeface="Helvetica Neue"/>
-                <a:ea typeface="Helvetica Neue"/>
-                <a:cs typeface="Helvetica Neue"/>
-              </a:defRPr>
-            </a:pPr>
-            <a:r>
-              <a:t>The fixed-sign composite is interesting—but it is a new question</a:t>
-            </a:r>
-          </a:p>
-        </p:txBody>
-      </p:sp>
-      <p:sp>
-        <p:nvSpPr>
-          <p:cNvPr id="4" name="Google-Shape-534-p58-5">
-            <a:extLst xmlns:a="http://schemas.openxmlformats.org/drawingml/2006/main">
-              <a:ext uri="{FF2B5EF4-FFF2-40B4-BE49-F238E27FC236}">
-                <a16:creationId xmlns:a16="http://schemas.microsoft.com/office/drawing/2014/main" id="{0CA356D5-52A2-45A4-906D-E01B8621C5AD}"/>
-              </a:ext>
-            </a:extLst>
-          </p:cNvPr>
-          <p:cNvSpPr>
-            <a:spLocks xmlns:a="http://schemas.openxmlformats.org/drawingml/2006/main" noGrp="1"/>
-          </p:cNvSpPr>
-          <p:nvPr/>
-        </p:nvSpPr>
-        <p:spPr>
-          <a:xfrm xmlns:a="http://schemas.openxmlformats.org/drawingml/2006/main">
-            <a:off x="6265069" y="2192655"/>
-            <a:ext cx="5537168" cy="3801713"/>
-          </a:xfrm>
-          <a:prstGeom xmlns:a="http://schemas.openxmlformats.org/drawingml/2006/main" prst="rect">
-            <a:avLst/>
-          </a:prstGeom>
-        </p:spPr>
-        <p:txBody>
-          <a:bodyPr xmlns:a="http://schemas.openxmlformats.org/drawingml/2006/main" wrap="square" lIns="0" tIns="0" rIns="0" bIns="0" anchor="t">
-            <a:noAutofit/>
-          </a:bodyPr>
-          <a:lstStyle xmlns:a="http://schemas.openxmlformats.org/drawingml/2006/main"/>
-          <a:p xmlns:a="http://schemas.openxmlformats.org/drawingml/2006/main">
-            <a:pPr algn="l">
-              <a:defRPr sz="2400">
-                <a:solidFill>
-                  <a:srgbClr val="000000"/>
-                </a:solidFill>
-                <a:latin typeface="Helvetica Neue"/>
-                <a:ea typeface="Helvetica Neue"/>
-                <a:cs typeface="Helvetica Neue"/>
-              </a:defRPr>
-            </a:pPr>
-            <a:r>
-              <a:t>Why we still stop</a:t>
-            </a:r>
-          </a:p>
-          <a:p xmlns:a="http://schemas.openxmlformats.org/drawingml/2006/main">
-            <a:pPr algn="l">
-              <a:defRPr sz="2400">
-                <a:solidFill>
-                  <a:srgbClr val="000000"/>
-                </a:solidFill>
-                <a:latin typeface="Helvetica Neue"/>
-                <a:ea typeface="Helvetica Neue"/>
-                <a:cs typeface="Helvetica Neue"/>
-              </a:defRPr>
-            </a:pPr>
-            <a:r>
-              <a:t>The composite was declared as a diagnostic comparator, not the nomination policy. It was not given its own expanding selection gate.</a:t>
-            </a:r>
-          </a:p>
-          <a:p xmlns:a="http://schemas.openxmlformats.org/drawingml/2006/main">
-            <a:pPr algn="l">
-              <a:defRPr sz="2400">
-                <a:solidFill>
-                  <a:srgbClr val="000000"/>
-                </a:solidFill>
-                <a:latin typeface="Helvetica Neue"/>
-                <a:ea typeface="Helvetica Neue"/>
-                <a:cs typeface="Helvetica Neue"/>
-              </a:defRPr>
-            </a:pPr>
-            <a:r>
-              <a:t>Testing it later requires a new identifier, frozen contract, and evidence-boundary decision before any 2021+ query.</a:t>
+              <a:buNone/>
+              <a:defRPr sz="1600">
+                <a:solidFill>
+                  <a:srgbClr val="000000"/>
+                </a:solidFill>
+                <a:latin typeface="Helvetica Neue"/>
+                <a:ea typeface="Helvetica Neue"/>
+                <a:cs typeface="Helvetica Neue"/>
+              </a:defRPr>
+            </a:pPr>
+            <a:r>
+              <a:t>Full-sample association</a:t>
+            </a:r>
+          </a:p>
+          <a:p xmlns:a="http://schemas.openxmlformats.org/drawingml/2006/main">
+            <a:pPr algn="l">
+              <a:buNone/>
+              <a:defRPr sz="1600">
+                <a:solidFill>
+                  <a:srgbClr val="000000"/>
+                </a:solidFill>
+                <a:latin typeface="Helvetica Neue"/>
+                <a:ea typeface="Helvetica Neue"/>
+                <a:cs typeface="Helvetica Neue"/>
+              </a:defRPr>
+            </a:pPr>
+            <a:r>
+              <a:t>After fitting all 15 TRAIN quarters, the top score quartile separated strongly. Those same rows helped estimate the coefficients, so this is descriptive fit, not forward evidence.</a:t>
             </a:r>
           </a:p>
         </p:txBody>
@@ -3621,7 +4117,7 @@
     </p:spTree>
     <p:extLst>
       <p:ext uri="{BB962C8B-B14F-4D97-AF65-F5344CB8AC3E}">
-        <p14:creationId xmlns:p14="http://schemas.microsoft.com/office/powerpoint/2010/main" val="679223911"/>
+        <p14:creationId xmlns:p14="http://schemas.microsoft.com/office/powerpoint/2010/main" val="302494351"/>
       </p:ext>
     </p:extLst>
   </p:cSld>
@@ -3642,6 +4138,527 @@
       </p:grpSpPr>
       <p:sp>
         <p:nvSpPr>
+          <p:cNvPr id="6" name="Google-Shape-532-p58-2">
+            <a:extLst xmlns:a="http://schemas.openxmlformats.org/drawingml/2006/main">
+              <a:ext uri="{FF2B5EF4-FFF2-40B4-BE49-F238E27FC236}">
+                <a16:creationId xmlns:a16="http://schemas.microsoft.com/office/drawing/2014/main" id="{A90E47CE-7A88-4A4A-B0FD-EA7A943823D4}"/>
+              </a:ext>
+            </a:extLst>
+          </p:cNvPr>
+          <p:cNvSpPr>
+            <a:spLocks xmlns:a="http://schemas.openxmlformats.org/drawingml/2006/main" noGrp="1"/>
+          </p:cNvSpPr>
+          <p:nvPr/>
+        </p:nvSpPr>
+        <p:spPr>
+          <a:xfrm xmlns:a="http://schemas.openxmlformats.org/drawingml/2006/main">
+            <a:off x="11279315" y="6279261"/>
+            <a:ext cx="518922" cy="241268"/>
+          </a:xfrm>
+          <a:prstGeom xmlns:a="http://schemas.openxmlformats.org/drawingml/2006/main" prst="rect">
+            <a:avLst/>
+          </a:prstGeom>
+        </p:spPr>
+        <p:txBody>
+          <a:bodyPr xmlns:a="http://schemas.openxmlformats.org/drawingml/2006/main" wrap="square" lIns="0" tIns="0" rIns="0" bIns="0" anchor="b">
+            <a:noAutofit/>
+          </a:bodyPr>
+          <a:lstStyle xmlns:a="http://schemas.openxmlformats.org/drawingml/2006/main"/>
+          <a:p xmlns:a="http://schemas.openxmlformats.org/drawingml/2006/main">
+            <a:pPr algn="r">
+              <a:buNone/>
+              <a:defRPr sz="1000">
+                <a:solidFill>
+                  <a:srgbClr val="000000"/>
+                </a:solidFill>
+                <a:latin typeface="Helvetica Neue"/>
+                <a:ea typeface="Helvetica Neue"/>
+                <a:cs typeface="Helvetica Neue"/>
+              </a:defRPr>
+            </a:pPr>
+            <a:r>
+              <a:t>14</a:t>
+            </a:r>
+          </a:p>
+        </p:txBody>
+      </p:sp>
+      <p:sp>
+        <p:nvSpPr>
+          <p:cNvPr id="2" name="Google-Shape-533-p58-3">
+            <a:extLst xmlns:a="http://schemas.openxmlformats.org/drawingml/2006/main">
+              <a:ext uri="{FF2B5EF4-FFF2-40B4-BE49-F238E27FC236}">
+                <a16:creationId xmlns:a16="http://schemas.microsoft.com/office/drawing/2014/main" id="{C8459ABB-C903-4143-9E3A-A3143EA670AF}"/>
+              </a:ext>
+            </a:extLst>
+          </p:cNvPr>
+          <p:cNvSpPr>
+            <a:spLocks xmlns:a="http://schemas.openxmlformats.org/drawingml/2006/main" noGrp="1"/>
+          </p:cNvSpPr>
+          <p:nvPr/>
+        </p:nvSpPr>
+        <p:spPr>
+          <a:xfrm xmlns:a="http://schemas.openxmlformats.org/drawingml/2006/main">
+            <a:off x="393668" y="344043"/>
+            <a:ext cx="11404568" cy="1047464"/>
+          </a:xfrm>
+          <a:prstGeom xmlns:a="http://schemas.openxmlformats.org/drawingml/2006/main" prst="rect">
+            <a:avLst/>
+          </a:prstGeom>
+        </p:spPr>
+        <p:txBody>
+          <a:bodyPr xmlns:a="http://schemas.openxmlformats.org/drawingml/2006/main" wrap="square" lIns="0" tIns="0" rIns="0" bIns="0" anchor="t">
+            <a:noAutofit/>
+          </a:bodyPr>
+          <a:lstStyle xmlns:a="http://schemas.openxmlformats.org/drawingml/2006/main"/>
+          <a:p xmlns:a="http://schemas.openxmlformats.org/drawingml/2006/main">
+            <a:pPr algn="l">
+              <a:buNone/>
+              <a:defRPr sz="2900">
+                <a:solidFill>
+                  <a:srgbClr val="000000"/>
+                </a:solidFill>
+                <a:latin typeface="Helvetica Neue"/>
+                <a:ea typeface="Helvetica Neue"/>
+                <a:cs typeface="Helvetica Neue"/>
+              </a:defRPr>
+            </a:pPr>
+            <a:r>
+              <a:t>One failed gate kept OOS sealed</a:t>
+            </a:r>
+          </a:p>
+        </p:txBody>
+      </p:sp>
+      <p:sp>
+        <p:nvSpPr>
+          <p:cNvPr id="3" name="Picture-3-4-backing">
+            <a:extLst xmlns:a="http://schemas.openxmlformats.org/drawingml/2006/main">
+              <a:ext uri="{FF2B5EF4-FFF2-40B4-BE49-F238E27FC236}">
+                <a16:creationId xmlns:a16="http://schemas.microsoft.com/office/drawing/2014/main" id="{CC68C4C5-7574-4ABC-BF6E-D72562F3FB28}"/>
+              </a:ext>
+            </a:extLst>
+          </p:cNvPr>
+          <p:cNvSpPr>
+            <a:spLocks xmlns:a="http://schemas.openxmlformats.org/drawingml/2006/main" noGrp="1"/>
+          </p:cNvSpPr>
+          <p:nvPr/>
+        </p:nvSpPr>
+        <p:spPr>
+          <a:xfrm xmlns:a="http://schemas.openxmlformats.org/drawingml/2006/main">
+            <a:off x="6269069" y="396431"/>
+            <a:ext cx="5539740" cy="5602034"/>
+          </a:xfrm>
+          <a:prstGeom xmlns:a="http://schemas.openxmlformats.org/drawingml/2006/main" prst="roundRect">
+            <a:avLst>
+              <a:gd name="adj" fmla="val 1376"/>
+            </a:avLst>
+          </a:prstGeom>
+          <a:solidFill xmlns:a="http://schemas.openxmlformats.org/drawingml/2006/main">
+            <a:srgbClr val="EAF5FB"/>
+          </a:solidFill>
+          <a:ln xmlns:a="http://schemas.openxmlformats.org/drawingml/2006/main" w="9525">
+            <a:solidFill>
+              <a:srgbClr val="B8BCC4"/>
+            </a:solidFill>
+            <a:prstDash val="solid"/>
+          </a:ln>
+        </p:spPr>
+      </p:sp>
+      <p:pic>
+        <p:nvPicPr>
+          <p:cNvPr id="11" name="Picture-3-4"/>
+          <p:cNvPicPr>
+            <a:picLocks xmlns:a="http://schemas.openxmlformats.org/drawingml/2006/main" noChangeAspect="1"/>
+          </p:cNvPicPr>
+          <p:nvPr/>
+        </p:nvPicPr>
+        <p:blipFill>
+          <a:blip xmlns:r="http://schemas.openxmlformats.org/officeDocument/2006/relationships" xmlns:a="http://schemas.openxmlformats.org/drawingml/2006/main" r:embed="R02074961db0d4e57"/>
+          <a:stretch xmlns:a="http://schemas.openxmlformats.org/drawingml/2006/main"/>
+        </p:blipFill>
+        <p:spPr>
+          <a:xfrm xmlns:a="http://schemas.openxmlformats.org/drawingml/2006/main">
+            <a:off x="6269069" y="1448056"/>
+            <a:ext cx="5539740" cy="3498783"/>
+          </a:xfrm>
+          <a:prstGeom xmlns:a="http://schemas.openxmlformats.org/drawingml/2006/main" prst="roundRect">
+            <a:avLst/>
+          </a:prstGeom>
+        </p:spPr>
+      </p:pic>
+      <p:sp>
+        <p:nvSpPr>
+          <p:cNvPr id="5" name="Google-Shape-534-p58-5">
+            <a:extLst xmlns:a="http://schemas.openxmlformats.org/drawingml/2006/main">
+              <a:ext uri="{FF2B5EF4-FFF2-40B4-BE49-F238E27FC236}">
+                <a16:creationId xmlns:a16="http://schemas.microsoft.com/office/drawing/2014/main" id="{C554B745-CC5E-4B39-9F8D-CF3E1C5534E4}"/>
+              </a:ext>
+            </a:extLst>
+          </p:cNvPr>
+          <p:cNvSpPr>
+            <a:spLocks xmlns:a="http://schemas.openxmlformats.org/drawingml/2006/main" noGrp="1"/>
+          </p:cNvSpPr>
+          <p:nvPr/>
+        </p:nvSpPr>
+        <p:spPr>
+          <a:xfrm xmlns:a="http://schemas.openxmlformats.org/drawingml/2006/main">
+            <a:off x="393668" y="2031968"/>
+            <a:ext cx="5537168" cy="3962400"/>
+          </a:xfrm>
+          <a:prstGeom xmlns:a="http://schemas.openxmlformats.org/drawingml/2006/main" prst="rect">
+            <a:avLst/>
+          </a:prstGeom>
+        </p:spPr>
+        <p:txBody>
+          <a:bodyPr xmlns:a="http://schemas.openxmlformats.org/drawingml/2006/main" wrap="square" lIns="0" tIns="0" rIns="0" bIns="0" anchor="t">
+            <a:noAutofit/>
+          </a:bodyPr>
+          <a:lstStyle xmlns:a="http://schemas.openxmlformats.org/drawingml/2006/main"/>
+          <a:p xmlns:a="http://schemas.openxmlformats.org/drawingml/2006/main">
+            <a:pPr algn="l">
+              <a:buNone/>
+              <a:defRPr sz="2400">
+                <a:solidFill>
+                  <a:srgbClr val="000000"/>
+                </a:solidFill>
+                <a:latin typeface="Helvetica Neue"/>
+                <a:ea typeface="Helvetica Neue"/>
+                <a:cs typeface="Helvetica Neue"/>
+              </a:defRPr>
+            </a:pPr>
+            <a:r>
+              <a:t>6 / 7 passed</a:t>
+            </a:r>
+          </a:p>
+          <a:p xmlns:a="http://schemas.openxmlformats.org/drawingml/2006/main">
+            <a:pPr algn="l">
+              <a:buNone/>
+              <a:defRPr sz="2400">
+                <a:solidFill>
+                  <a:srgbClr val="000000"/>
+                </a:solidFill>
+                <a:latin typeface="Helvetica Neue"/>
+                <a:ea typeface="Helvetica Neue"/>
+                <a:cs typeface="Helvetica Neue"/>
+              </a:defRPr>
+            </a:pPr>
+            <a:r>
+              <a:t>Integrity, support, pooled separation, permutation, and sector breadth all passed.
+G3 failed: −0.0176 mean forward IC and 55.6% positive quarters.
+A conjunction is not a vote.</a:t>
+            </a:r>
+          </a:p>
+        </p:txBody>
+      </p:sp>
+    </p:spTree>
+    <p:extLst>
+      <p:ext uri="{BB962C8B-B14F-4D97-AF65-F5344CB8AC3E}">
+        <p14:creationId xmlns:p14="http://schemas.microsoft.com/office/powerpoint/2010/main" val="160952017"/>
+      </p:ext>
+    </p:extLst>
+  </p:cSld>
+</p:sld>
+</file>
+
+<file path=ppt/slides/slide15.xml><?xml version="1.0" encoding="utf-8"?>
+<p:sld xmlns:p="http://schemas.openxmlformats.org/presentationml/2006/main">
+  <p:cSld>
+    <p:spTree>
+      <p:nvGrpSpPr>
+        <p:cNvPr id="1" name=""/>
+        <p:cNvGrpSpPr/>
+        <p:nvPr/>
+      </p:nvGrpSpPr>
+      <p:grpSpPr>
+        <a:xfrm xmlns:a="http://schemas.openxmlformats.org/drawingml/2006/main"/>
+      </p:grpSpPr>
+      <p:sp>
+        <p:nvSpPr>
+          <p:cNvPr id="5" name="Google-Shape-534-p58-1">
+            <a:extLst xmlns:a="http://schemas.openxmlformats.org/drawingml/2006/main">
+              <a:ext uri="{FF2B5EF4-FFF2-40B4-BE49-F238E27FC236}">
+                <a16:creationId xmlns:a16="http://schemas.microsoft.com/office/drawing/2014/main" id="{CCE1A990-C9A5-450B-96E1-3B793E8D9B04}"/>
+              </a:ext>
+            </a:extLst>
+          </p:cNvPr>
+          <p:cNvSpPr>
+            <a:spLocks xmlns:a="http://schemas.openxmlformats.org/drawingml/2006/main" noGrp="1"/>
+          </p:cNvSpPr>
+          <p:nvPr/>
+        </p:nvSpPr>
+        <p:spPr>
+          <a:xfrm xmlns:a="http://schemas.openxmlformats.org/drawingml/2006/main">
+            <a:off x="393668" y="1838801"/>
+            <a:ext cx="5533168" cy="4155567"/>
+          </a:xfrm>
+          <a:prstGeom xmlns:a="http://schemas.openxmlformats.org/drawingml/2006/main" prst="rect">
+            <a:avLst/>
+          </a:prstGeom>
+        </p:spPr>
+        <p:txBody>
+          <a:bodyPr xmlns:a="http://schemas.openxmlformats.org/drawingml/2006/main" wrap="square" lIns="0" tIns="0" rIns="0" bIns="0" anchor="t">
+            <a:noAutofit/>
+          </a:bodyPr>
+          <a:lstStyle xmlns:a="http://schemas.openxmlformats.org/drawingml/2006/main"/>
+          <a:p xmlns:a="http://schemas.openxmlformats.org/drawingml/2006/main">
+            <a:pPr algn="l">
+              <a:buNone/>
+              <a:defRPr sz="2400">
+                <a:solidFill>
+                  <a:srgbClr val="000000"/>
+                </a:solidFill>
+                <a:latin typeface="Helvetica Neue"/>
+                <a:ea typeface="Helvetica Neue"/>
+                <a:cs typeface="Helvetica Neue"/>
+              </a:defRPr>
+            </a:pPr>
+            <a:r>
+              <a:t>What caught our eye</a:t>
+            </a:r>
+          </a:p>
+          <a:p xmlns:a="http://schemas.openxmlformats.org/drawingml/2006/main">
+            <a:pPr algn="l">
+              <a:buNone/>
+              <a:defRPr sz="2400">
+                <a:solidFill>
+                  <a:srgbClr val="000000"/>
+                </a:solidFill>
+                <a:latin typeface="Helvetica Neue"/>
+                <a:ea typeface="Helvetica Neue"/>
+                <a:cs typeface="Helvetica Neue"/>
+              </a:defRPr>
+            </a:pPr>
+            <a:r>
+              <a:t>The predeclared, non-learned composite averaged +0.041 rank IC across all 15 TRAIN quarters.</a:t>
+            </a:r>
+          </a:p>
+          <a:p xmlns:a="http://schemas.openxmlformats.org/drawingml/2006/main">
+            <a:pPr algn="l">
+              <a:buNone/>
+              <a:defRPr sz="2400">
+                <a:solidFill>
+                  <a:srgbClr val="000000"/>
+                </a:solidFill>
+                <a:latin typeface="Helvetica Neue"/>
+                <a:ea typeface="Helvetica Neue"/>
+                <a:cs typeface="Helvetica Neue"/>
+              </a:defRPr>
+            </a:pPr>
+            <a:r>
+              <a:t>It was positive in 9 / 15 quarters and its top quartile beat the universe by +1.74 pp on average.</a:t>
+            </a:r>
+          </a:p>
+          <a:p xmlns:a="http://schemas.openxmlformats.org/drawingml/2006/main">
+            <a:pPr algn="l">
+              <a:buNone/>
+              <a:defRPr sz="2400">
+                <a:solidFill>
+                  <a:srgbClr val="000000"/>
+                </a:solidFill>
+                <a:latin typeface="Helvetica Neue"/>
+                <a:ea typeface="Helvetica Neue"/>
+                <a:cs typeface="Helvetica Neue"/>
+              </a:defRPr>
+            </a:pPr>
+            <a:r>
+              <a:t>That is more stable-looking than the fitted ridge replay.</a:t>
+            </a:r>
+          </a:p>
+        </p:txBody>
+      </p:sp>
+      <p:sp>
+        <p:nvSpPr>
+          <p:cNvPr id="2" name="Google-Shape-532-p58-3">
+            <a:extLst xmlns:a="http://schemas.openxmlformats.org/drawingml/2006/main">
+              <a:ext uri="{FF2B5EF4-FFF2-40B4-BE49-F238E27FC236}">
+                <a16:creationId xmlns:a16="http://schemas.microsoft.com/office/drawing/2014/main" id="{4A76C4B8-F6CC-408D-AABB-9B40E65F498F}"/>
+              </a:ext>
+            </a:extLst>
+          </p:cNvPr>
+          <p:cNvSpPr>
+            <a:spLocks xmlns:a="http://schemas.openxmlformats.org/drawingml/2006/main" noGrp="1"/>
+          </p:cNvSpPr>
+          <p:nvPr/>
+        </p:nvSpPr>
+        <p:spPr>
+          <a:xfrm xmlns:a="http://schemas.openxmlformats.org/drawingml/2006/main">
+            <a:off x="11279315" y="6279261"/>
+            <a:ext cx="518922" cy="241268"/>
+          </a:xfrm>
+          <a:prstGeom xmlns:a="http://schemas.openxmlformats.org/drawingml/2006/main" prst="rect">
+            <a:avLst/>
+          </a:prstGeom>
+        </p:spPr>
+        <p:txBody>
+          <a:bodyPr xmlns:a="http://schemas.openxmlformats.org/drawingml/2006/main" wrap="square" lIns="0" tIns="0" rIns="0" bIns="0" anchor="b">
+            <a:noAutofit/>
+          </a:bodyPr>
+          <a:lstStyle xmlns:a="http://schemas.openxmlformats.org/drawingml/2006/main"/>
+          <a:p xmlns:a="http://schemas.openxmlformats.org/drawingml/2006/main">
+            <a:pPr algn="r">
+              <a:buNone/>
+              <a:defRPr sz="1000">
+                <a:solidFill>
+                  <a:srgbClr val="000000"/>
+                </a:solidFill>
+                <a:latin typeface="Helvetica Neue"/>
+                <a:ea typeface="Helvetica Neue"/>
+                <a:cs typeface="Helvetica Neue"/>
+              </a:defRPr>
+            </a:pPr>
+            <a:r>
+              <a:t>15</a:t>
+            </a:r>
+          </a:p>
+        </p:txBody>
+      </p:sp>
+      <p:sp>
+        <p:nvSpPr>
+          <p:cNvPr id="3" name="Google-Shape-533-p58-4">
+            <a:extLst xmlns:a="http://schemas.openxmlformats.org/drawingml/2006/main">
+              <a:ext uri="{FF2B5EF4-FFF2-40B4-BE49-F238E27FC236}">
+                <a16:creationId xmlns:a16="http://schemas.microsoft.com/office/drawing/2014/main" id="{78E516F2-4357-424D-B869-C53D8FA1E91B}"/>
+              </a:ext>
+            </a:extLst>
+          </p:cNvPr>
+          <p:cNvSpPr>
+            <a:spLocks xmlns:a="http://schemas.openxmlformats.org/drawingml/2006/main" noGrp="1"/>
+          </p:cNvSpPr>
+          <p:nvPr/>
+        </p:nvSpPr>
+        <p:spPr>
+          <a:xfrm xmlns:a="http://schemas.openxmlformats.org/drawingml/2006/main">
+            <a:off x="393668" y="344043"/>
+            <a:ext cx="11404568" cy="1047464"/>
+          </a:xfrm>
+          <a:prstGeom xmlns:a="http://schemas.openxmlformats.org/drawingml/2006/main" prst="rect">
+            <a:avLst/>
+          </a:prstGeom>
+        </p:spPr>
+        <p:txBody>
+          <a:bodyPr xmlns:a="http://schemas.openxmlformats.org/drawingml/2006/main" wrap="square" lIns="0" tIns="0" rIns="0" bIns="0" anchor="t">
+            <a:noAutofit/>
+          </a:bodyPr>
+          <a:lstStyle xmlns:a="http://schemas.openxmlformats.org/drawingml/2006/main"/>
+          <a:p xmlns:a="http://schemas.openxmlformats.org/drawingml/2006/main">
+            <a:pPr algn="l">
+              <a:buNone/>
+              <a:defRPr sz="2900">
+                <a:solidFill>
+                  <a:srgbClr val="000000"/>
+                </a:solidFill>
+                <a:latin typeface="Helvetica Neue"/>
+                <a:ea typeface="Helvetica Neue"/>
+                <a:cs typeface="Helvetica Neue"/>
+              </a:defRPr>
+            </a:pPr>
+            <a:r>
+              <a:t>The fixed-sign composite is interesting—but it is a new question</a:t>
+            </a:r>
+          </a:p>
+        </p:txBody>
+      </p:sp>
+      <p:sp>
+        <p:nvSpPr>
+          <p:cNvPr id="4" name="Google-Shape-534-p58-5">
+            <a:extLst xmlns:a="http://schemas.openxmlformats.org/drawingml/2006/main">
+              <a:ext uri="{FF2B5EF4-FFF2-40B4-BE49-F238E27FC236}">
+                <a16:creationId xmlns:a16="http://schemas.microsoft.com/office/drawing/2014/main" id="{0CA356D5-52A2-45A4-906D-E01B8621C5AD}"/>
+              </a:ext>
+            </a:extLst>
+          </p:cNvPr>
+          <p:cNvSpPr>
+            <a:spLocks xmlns:a="http://schemas.openxmlformats.org/drawingml/2006/main" noGrp="1"/>
+          </p:cNvSpPr>
+          <p:nvPr/>
+        </p:nvSpPr>
+        <p:spPr>
+          <a:xfrm xmlns:a="http://schemas.openxmlformats.org/drawingml/2006/main">
+            <a:off x="6265069" y="2192655"/>
+            <a:ext cx="5537168" cy="3801713"/>
+          </a:xfrm>
+          <a:prstGeom xmlns:a="http://schemas.openxmlformats.org/drawingml/2006/main" prst="rect">
+            <a:avLst/>
+          </a:prstGeom>
+        </p:spPr>
+        <p:txBody>
+          <a:bodyPr xmlns:a="http://schemas.openxmlformats.org/drawingml/2006/main" wrap="square" lIns="0" tIns="0" rIns="0" bIns="0" anchor="t">
+            <a:noAutofit/>
+          </a:bodyPr>
+          <a:lstStyle xmlns:a="http://schemas.openxmlformats.org/drawingml/2006/main"/>
+          <a:p xmlns:a="http://schemas.openxmlformats.org/drawingml/2006/main">
+            <a:pPr algn="l">
+              <a:buNone/>
+              <a:defRPr sz="2400">
+                <a:solidFill>
+                  <a:srgbClr val="000000"/>
+                </a:solidFill>
+                <a:latin typeface="Helvetica Neue"/>
+                <a:ea typeface="Helvetica Neue"/>
+                <a:cs typeface="Helvetica Neue"/>
+              </a:defRPr>
+            </a:pPr>
+            <a:r>
+              <a:t>Why we still stop</a:t>
+            </a:r>
+          </a:p>
+          <a:p xmlns:a="http://schemas.openxmlformats.org/drawingml/2006/main">
+            <a:pPr algn="l">
+              <a:buNone/>
+              <a:defRPr sz="2400">
+                <a:solidFill>
+                  <a:srgbClr val="000000"/>
+                </a:solidFill>
+                <a:latin typeface="Helvetica Neue"/>
+                <a:ea typeface="Helvetica Neue"/>
+                <a:cs typeface="Helvetica Neue"/>
+              </a:defRPr>
+            </a:pPr>
+            <a:r>
+              <a:t>The composite was declared as a diagnostic comparator, not the nomination policy. It was not given its own expanding selection gate.</a:t>
+            </a:r>
+          </a:p>
+          <a:p xmlns:a="http://schemas.openxmlformats.org/drawingml/2006/main">
+            <a:pPr algn="l">
+              <a:buNone/>
+              <a:defRPr sz="2400">
+                <a:solidFill>
+                  <a:srgbClr val="000000"/>
+                </a:solidFill>
+                <a:latin typeface="Helvetica Neue"/>
+                <a:ea typeface="Helvetica Neue"/>
+                <a:cs typeface="Helvetica Neue"/>
+              </a:defRPr>
+            </a:pPr>
+            <a:r>
+              <a:t>Testing it later requires a new identifier, frozen contract, and evidence-boundary decision before any 2021+ query.</a:t>
+            </a:r>
+          </a:p>
+        </p:txBody>
+      </p:sp>
+    </p:spTree>
+    <p:extLst>
+      <p:ext uri="{BB962C8B-B14F-4D97-AF65-F5344CB8AC3E}">
+        <p14:creationId xmlns:p14="http://schemas.microsoft.com/office/powerpoint/2010/main" val="679223911"/>
+      </p:ext>
+    </p:extLst>
+  </p:cSld>
+</p:sld>
+</file>
+
+<file path=ppt/slides/slide16.xml><?xml version="1.0" encoding="utf-8"?>
+<p:sld xmlns:p="http://schemas.openxmlformats.org/presentationml/2006/main">
+  <p:cSld>
+    <p:spTree>
+      <p:nvGrpSpPr>
+        <p:cNvPr id="1" name=""/>
+        <p:cNvGrpSpPr/>
+        <p:nvPr/>
+      </p:nvGrpSpPr>
+      <p:grpSpPr>
+        <a:xfrm xmlns:a="http://schemas.openxmlformats.org/drawingml/2006/main"/>
+      </p:grpSpPr>
+      <p:sp>
+        <p:nvSpPr>
           <p:cNvPr id="4" name="Title-3-1">
             <a:extLst xmlns:a="http://schemas.openxmlformats.org/drawingml/2006/main">
               <a:ext uri="{FF2B5EF4-FFF2-40B4-BE49-F238E27FC236}">
@@ -3670,6 +4687,7 @@
           <a:lstStyle xmlns:a="http://schemas.openxmlformats.org/drawingml/2006/main"/>
           <a:p xmlns:a="http://schemas.openxmlformats.org/drawingml/2006/main">
             <a:pPr algn="l">
+              <a:buNone/>
               <a:defRPr sz="6000">
                 <a:solidFill>
                   <a:srgbClr val="000000"/>
@@ -3715,6 +4733,7 @@
           <a:lstStyle xmlns:a="http://schemas.openxmlformats.org/drawingml/2006/main"/>
           <a:p xmlns:a="http://schemas.openxmlformats.org/drawingml/2006/main">
             <a:pPr algn="l">
+              <a:buNone/>
               <a:defRPr sz="2400">
                 <a:solidFill>
                   <a:srgbClr val="000000"/>
@@ -3730,6 +4749,7 @@
           </a:p>
           <a:p xmlns:a="http://schemas.openxmlformats.org/drawingml/2006/main">
             <a:pPr algn="l">
+              <a:buNone/>
               <a:defRPr sz="2400">
                 <a:solidFill>
                   <a:srgbClr val="000000"/>
@@ -3745,6 +4765,7 @@
           </a:p>
           <a:p xmlns:a="http://schemas.openxmlformats.org/drawingml/2006/main">
             <a:pPr algn="l">
+              <a:buNone/>
               <a:defRPr sz="2400">
                 <a:solidFill>
                   <a:srgbClr val="000000"/>
@@ -3790,6 +4811,7 @@
           <a:lstStyle xmlns:a="http://schemas.openxmlformats.org/drawingml/2006/main"/>
           <a:p xmlns:a="http://schemas.openxmlformats.org/drawingml/2006/main">
             <a:pPr algn="l">
+              <a:buNone/>
               <a:defRPr sz="2400">
                 <a:solidFill>
                   <a:srgbClr val="000000"/>
@@ -3857,6 +4879,7 @@
           <a:lstStyle xmlns:a="http://schemas.openxmlformats.org/drawingml/2006/main"/>
           <a:p xmlns:a="http://schemas.openxmlformats.org/drawingml/2006/main">
             <a:pPr algn="r">
+              <a:buNone/>
               <a:defRPr sz="1000">
                 <a:solidFill>
                   <a:srgbClr val="000000"/>
@@ -3902,6 +4925,7 @@
           <a:lstStyle xmlns:a="http://schemas.openxmlformats.org/drawingml/2006/main"/>
           <a:p xmlns:a="http://schemas.openxmlformats.org/drawingml/2006/main">
             <a:pPr algn="l">
+              <a:buNone/>
               <a:defRPr sz="2900">
                 <a:solidFill>
                   <a:srgbClr val="000000"/>
@@ -3947,6 +4971,7 @@
           <a:lstStyle xmlns:a="http://schemas.openxmlformats.org/drawingml/2006/main"/>
           <a:p xmlns:a="http://schemas.openxmlformats.org/drawingml/2006/main">
             <a:pPr algn="l">
+              <a:buNone/>
               <a:defRPr sz="2400">
                 <a:solidFill>
                   <a:srgbClr val="000000"/>
@@ -3962,6 +4987,7 @@
           </a:p>
           <a:p xmlns:a="http://schemas.openxmlformats.org/drawingml/2006/main">
             <a:pPr algn="l">
+              <a:buNone/>
               <a:defRPr sz="2400">
                 <a:solidFill>
                   <a:srgbClr val="000000"/>
@@ -4007,6 +5033,7 @@
           <a:lstStyle xmlns:a="http://schemas.openxmlformats.org/drawingml/2006/main"/>
           <a:p xmlns:a="http://schemas.openxmlformats.org/drawingml/2006/main">
             <a:pPr algn="l">
+              <a:buNone/>
               <a:defRPr sz="2400">
                 <a:solidFill>
                   <a:srgbClr val="000000"/>
@@ -4022,6 +5049,7 @@
           </a:p>
           <a:p xmlns:a="http://schemas.openxmlformats.org/drawingml/2006/main">
             <a:pPr algn="l">
+              <a:buNone/>
               <a:defRPr sz="2400">
                 <a:solidFill>
                   <a:srgbClr val="000000"/>
@@ -4061,10 +5089,10 @@
       </p:grpSpPr>
       <p:sp>
         <p:nvSpPr>
-          <p:cNvPr id="13" name="Slide-Number-Placeholder-3-2">
-            <a:extLst xmlns:a="http://schemas.openxmlformats.org/drawingml/2006/main">
-              <a:ext uri="{FF2B5EF4-FFF2-40B4-BE49-F238E27FC236}">
-                <a16:creationId xmlns:a16="http://schemas.microsoft.com/office/drawing/2014/main" id="{D54D3255-66D6-4A8C-98C8-699D8C150CF8}"/>
+          <p:cNvPr id="5" name="Google-Shape-532-p58-2">
+            <a:extLst xmlns:a="http://schemas.openxmlformats.org/drawingml/2006/main">
+              <a:ext uri="{FF2B5EF4-FFF2-40B4-BE49-F238E27FC236}">
+                <a16:creationId xmlns:a16="http://schemas.microsoft.com/office/drawing/2014/main" id="{39D7E226-8653-4211-B710-C120D8235D3E}"/>
               </a:ext>
             </a:extLst>
           </p:cNvPr>
@@ -4083,10 +5111,13 @@
           </a:prstGeom>
         </p:spPr>
         <p:txBody>
-          <a:bodyPr xmlns:a="http://schemas.openxmlformats.org/drawingml/2006/main" lIns="0" tIns="0" rIns="0" bIns="0" anchor="b"/>
+          <a:bodyPr xmlns:a="http://schemas.openxmlformats.org/drawingml/2006/main" wrap="square" lIns="0" tIns="0" rIns="0" bIns="0" anchor="b">
+            <a:noAutofit/>
+          </a:bodyPr>
           <a:lstStyle xmlns:a="http://schemas.openxmlformats.org/drawingml/2006/main"/>
           <a:p xmlns:a="http://schemas.openxmlformats.org/drawingml/2006/main">
             <a:pPr algn="r">
+              <a:buNone/>
               <a:defRPr sz="1000">
                 <a:solidFill>
                   <a:srgbClr val="000000"/>
@@ -4104,10 +5135,10 @@
       </p:sp>
       <p:sp>
         <p:nvSpPr>
-          <p:cNvPr id="2" name="Title-10-3">
-            <a:extLst xmlns:a="http://schemas.openxmlformats.org/drawingml/2006/main">
-              <a:ext uri="{FF2B5EF4-FFF2-40B4-BE49-F238E27FC236}">
-                <a16:creationId xmlns:a16="http://schemas.microsoft.com/office/drawing/2014/main" id="{F5FA72C1-6972-494D-9400-5BAD16F3F2C2}"/>
+          <p:cNvPr id="2" name="Google-Shape-533-p58-3">
+            <a:extLst xmlns:a="http://schemas.openxmlformats.org/drawingml/2006/main">
+              <a:ext uri="{FF2B5EF4-FFF2-40B4-BE49-F238E27FC236}">
+                <a16:creationId xmlns:a16="http://schemas.microsoft.com/office/drawing/2014/main" id="{10E51D1C-18DB-4515-9914-87773A022615}"/>
               </a:ext>
             </a:extLst>
           </p:cNvPr>
@@ -4126,295 +5157,153 @@
           </a:prstGeom>
         </p:spPr>
         <p:txBody>
-          <a:bodyPr xmlns:a="http://schemas.openxmlformats.org/drawingml/2006/main" lIns="0" tIns="0" rIns="0" bIns="0" anchor="t">
+          <a:bodyPr xmlns:a="http://schemas.openxmlformats.org/drawingml/2006/main" wrap="square" lIns="0" tIns="0" rIns="0" bIns="0" anchor="t">
+            <a:noAutofit/>
+          </a:bodyPr>
+          <a:lstStyle xmlns:a="http://schemas.openxmlformats.org/drawingml/2006/main"/>
+          <a:p xmlns:a="http://schemas.openxmlformats.org/drawingml/2006/main">
+            <a:pPr algn="l">
+              <a:buNone/>
+              <a:defRPr sz="2900">
+                <a:solidFill>
+                  <a:srgbClr val="000000"/>
+                </a:solidFill>
+                <a:latin typeface="Helvetica Neue"/>
+                <a:ea typeface="Helvetica Neue"/>
+                <a:cs typeface="Helvetica Neue"/>
+              </a:defRPr>
+            </a:pPr>
+            <a:r>
+              <a:t>Ridge turns six clues into one restrained score</a:t>
+            </a:r>
+          </a:p>
+        </p:txBody>
+      </p:sp>
+      <p:sp>
+        <p:nvSpPr>
+          <p:cNvPr id="3" name="Google-Shape-534-p58-4">
+            <a:extLst xmlns:a="http://schemas.openxmlformats.org/drawingml/2006/main">
+              <a:ext uri="{FF2B5EF4-FFF2-40B4-BE49-F238E27FC236}">
+                <a16:creationId xmlns:a16="http://schemas.microsoft.com/office/drawing/2014/main" id="{6AF50458-FB0C-4B5E-B372-0AA6DD93D95A}"/>
+              </a:ext>
+            </a:extLst>
+          </p:cNvPr>
+          <p:cNvSpPr>
+            <a:spLocks xmlns:a="http://schemas.openxmlformats.org/drawingml/2006/main" noGrp="1"/>
+          </p:cNvSpPr>
+          <p:nvPr/>
+        </p:nvSpPr>
+        <p:spPr>
+          <a:xfrm xmlns:a="http://schemas.openxmlformats.org/drawingml/2006/main">
+            <a:off x="393668" y="2031968"/>
+            <a:ext cx="5537168" cy="3534823"/>
+          </a:xfrm>
+          <a:prstGeom xmlns:a="http://schemas.openxmlformats.org/drawingml/2006/main" prst="rect">
+            <a:avLst/>
+          </a:prstGeom>
+        </p:spPr>
+        <p:txBody>
+          <a:bodyPr xmlns:a="http://schemas.openxmlformats.org/drawingml/2006/main" wrap="square" lIns="0" tIns="0" rIns="0" bIns="0" anchor="t">
+            <a:noAutofit/>
+          </a:bodyPr>
+          <a:lstStyle xmlns:a="http://schemas.openxmlformats.org/drawingml/2006/main"/>
+          <a:p xmlns:a="http://schemas.openxmlformats.org/drawingml/2006/main">
+            <a:pPr algn="l">
+              <a:buNone/>
+              <a:defRPr sz="2400">
+                <a:solidFill>
+                  <a:srgbClr val="000000"/>
+                </a:solidFill>
+                <a:latin typeface="Helvetica Neue"/>
+                <a:ea typeface="Helvetica Neue"/>
+                <a:cs typeface="Helvetica Neue"/>
+              </a:defRPr>
+            </a:pPr>
+            <a:r>
+              <a:t>Think of it as a scoring rule</a:t>
+            </a:r>
+          </a:p>
+          <a:p xmlns:a="http://schemas.openxmlformats.org/drawingml/2006/main">
+            <a:pPr algn="l">
+              <a:buNone/>
+              <a:defRPr sz="2400">
+                <a:solidFill>
+                  <a:srgbClr val="000000"/>
+                </a:solidFill>
+                <a:latin typeface="Helvetica Neue"/>
+                <a:ea typeface="Helvetica Neue"/>
+                <a:cs typeface="Helvetica Neue"/>
+              </a:defRPr>
+            </a:pPr>
+            <a:r>
+              <a:t>Each feature receives a weight. Add the six weighted clues to produce one stock score.</a:t>
+            </a:r>
+          </a:p>
+          <a:p xmlns:a="http://schemas.openxmlformats.org/drawingml/2006/main">
+            <a:pPr algn="l">
+              <a:buNone/>
+              <a:defRPr sz="2400">
+                <a:solidFill>
+                  <a:srgbClr val="000000"/>
+                </a:solidFill>
+                <a:latin typeface="Helvetica Neue"/>
+                <a:ea typeface="Helvetica Neue"/>
+                <a:cs typeface="Helvetica Neue"/>
+              </a:defRPr>
+            </a:pPr>
+            <a:r>
+              <a:t/>
+            </a:r>
+          </a:p>
+          <a:p xmlns:a="http://schemas.openxmlformats.org/drawingml/2006/main">
+            <a:pPr algn="l">
+              <a:buNone/>
+              <a:defRPr sz="2400">
+                <a:solidFill>
+                  <a:srgbClr val="000000"/>
+                </a:solidFill>
+                <a:latin typeface="Helvetica Neue"/>
+                <a:ea typeface="Helvetica Neue"/>
+                <a:cs typeface="Helvetica Neue"/>
+              </a:defRPr>
+            </a:pPr>
+            <a:r>
+              <a:t>A higher score means “more likely to beat peers next quarter”—not a guaranteed return.</a:t>
+            </a:r>
+          </a:p>
+        </p:txBody>
+      </p:sp>
+      <p:sp>
+        <p:nvSpPr>
+          <p:cNvPr id="4" name="Content-Placeholder-3-5">
+            <a:extLst xmlns:a="http://schemas.openxmlformats.org/drawingml/2006/main">
+              <a:ext uri="{FF2B5EF4-FFF2-40B4-BE49-F238E27FC236}">
+                <a16:creationId xmlns:a16="http://schemas.microsoft.com/office/drawing/2014/main" id="{75EC59B8-FA48-4458-B661-E61F404C7832}"/>
+              </a:ext>
+            </a:extLst>
+          </p:cNvPr>
+          <p:cNvSpPr>
+            <a:spLocks xmlns:a="http://schemas.openxmlformats.org/drawingml/2006/main" noGrp="1"/>
+          </p:cNvSpPr>
+          <p:nvPr/>
+        </p:nvSpPr>
+        <p:spPr>
+          <a:xfrm xmlns:a="http://schemas.openxmlformats.org/drawingml/2006/main">
+            <a:off x="6256592" y="2031968"/>
+            <a:ext cx="5537168" cy="3534823"/>
+          </a:xfrm>
+          <a:prstGeom xmlns:a="http://schemas.openxmlformats.org/drawingml/2006/main" prst="rect">
+            <a:avLst/>
+          </a:prstGeom>
+        </p:spPr>
+        <p:txBody>
+          <a:bodyPr xmlns:a="http://schemas.openxmlformats.org/drawingml/2006/main" lIns="0" tIns="0" rIns="0" bIns="0">
             <a:normAutofit fontScale="100000"/>
           </a:bodyPr>
           <a:lstStyle xmlns:a="http://schemas.openxmlformats.org/drawingml/2006/main"/>
           <a:p xmlns:a="http://schemas.openxmlformats.org/drawingml/2006/main">
             <a:pPr algn="l">
-              <a:defRPr sz="2900">
-                <a:solidFill>
-                  <a:srgbClr val="000000"/>
-                </a:solidFill>
-                <a:latin typeface="Helvetica Neue"/>
-                <a:ea typeface="Helvetica Neue"/>
-                <a:cs typeface="Helvetica Neue"/>
-              </a:defRPr>
-            </a:pPr>
-            <a:r>
-              <a:t>The evidence boundary was frozen before any outcome was visible</a:t>
-            </a:r>
-          </a:p>
-        </p:txBody>
-      </p:sp>
-      <p:cxnSp>
-        <p:nvCxnSpPr>
-          <p:cNvPr id="15" name="Google-Shape-2259-p159-4"/>
-          <p:cNvCxnSpPr/>
-          <p:nvPr/>
-        </p:nvCxnSpPr>
-        <p:spPr>
-          <a:xfrm xmlns:a="http://schemas.openxmlformats.org/drawingml/2006/main">
-            <a:off x="337757" y="3373755"/>
-            <a:ext cx="12245435" cy="286"/>
-          </a:xfrm>
-          <a:prstGeom xmlns:a="http://schemas.openxmlformats.org/drawingml/2006/main" prst="straightConnector1">
-            <a:avLst/>
-          </a:prstGeom>
-          <a:ln xmlns:a="http://schemas.openxmlformats.org/drawingml/2006/main" w="9525">
-            <a:solidFill>
-              <a:srgbClr val="000000"/>
-            </a:solidFill>
-            <a:prstDash val="solid"/>
-          </a:ln>
-        </p:spPr>
-      </p:cxnSp>
-      <p:sp>
-        <p:nvSpPr>
-          <p:cNvPr id="4" name="Google-Shape-2260-p159-5">
-            <a:extLst xmlns:a="http://schemas.openxmlformats.org/drawingml/2006/main">
-              <a:ext uri="{FF2B5EF4-FFF2-40B4-BE49-F238E27FC236}">
-                <a16:creationId xmlns:a16="http://schemas.microsoft.com/office/drawing/2014/main" id="{F36AEC3B-C048-4552-91A7-A041A570BFEF}"/>
-              </a:ext>
-            </a:extLst>
-          </p:cNvPr>
-          <p:cNvSpPr>
-            <a:spLocks xmlns:a="http://schemas.openxmlformats.org/drawingml/2006/main" noGrp="1"/>
-          </p:cNvSpPr>
-          <p:nvPr/>
-        </p:nvSpPr>
-        <p:spPr>
-          <a:xfrm xmlns:a="http://schemas.openxmlformats.org/drawingml/2006/main">
-            <a:off x="337757" y="3320225"/>
-            <a:ext cx="107061" cy="107061"/>
-          </a:xfrm>
-          <a:prstGeom xmlns:a="http://schemas.openxmlformats.org/drawingml/2006/main" prst="ellipse">
-            <a:avLst/>
-          </a:prstGeom>
-          <a:solidFill xmlns:a="http://schemas.openxmlformats.org/drawingml/2006/main">
-            <a:srgbClr val="000000"/>
-          </a:solidFill>
-        </p:spPr>
-      </p:sp>
-      <p:sp>
-        <p:nvSpPr>
-          <p:cNvPr id="5" name="Google-Shape-2261-p159-6">
-            <a:extLst xmlns:a="http://schemas.openxmlformats.org/drawingml/2006/main">
-              <a:ext uri="{FF2B5EF4-FFF2-40B4-BE49-F238E27FC236}">
-                <a16:creationId xmlns:a16="http://schemas.microsoft.com/office/drawing/2014/main" id="{E096155C-85AC-4590-8B0B-D6D47593683E}"/>
-              </a:ext>
-            </a:extLst>
-          </p:cNvPr>
-          <p:cNvSpPr>
-            <a:spLocks xmlns:a="http://schemas.openxmlformats.org/drawingml/2006/main" noGrp="1"/>
-          </p:cNvSpPr>
-          <p:nvPr/>
-        </p:nvSpPr>
-        <p:spPr>
-          <a:xfrm xmlns:a="http://schemas.openxmlformats.org/drawingml/2006/main">
-            <a:off x="4251770" y="3320225"/>
-            <a:ext cx="107061" cy="107061"/>
-          </a:xfrm>
-          <a:prstGeom xmlns:a="http://schemas.openxmlformats.org/drawingml/2006/main" prst="ellipse">
-            <a:avLst/>
-          </a:prstGeom>
-          <a:solidFill xmlns:a="http://schemas.openxmlformats.org/drawingml/2006/main">
-            <a:srgbClr val="000000"/>
-          </a:solidFill>
-        </p:spPr>
-      </p:sp>
-      <p:sp>
-        <p:nvSpPr>
-          <p:cNvPr id="6" name="Google-Shape-2262-p159-7">
-            <a:extLst xmlns:a="http://schemas.openxmlformats.org/drawingml/2006/main">
-              <a:ext uri="{FF2B5EF4-FFF2-40B4-BE49-F238E27FC236}">
-                <a16:creationId xmlns:a16="http://schemas.microsoft.com/office/drawing/2014/main" id="{F02E53A1-4C89-4571-90AA-56F740ADF6E7}"/>
-              </a:ext>
-            </a:extLst>
-          </p:cNvPr>
-          <p:cNvSpPr>
-            <a:spLocks xmlns:a="http://schemas.openxmlformats.org/drawingml/2006/main" noGrp="1"/>
-          </p:cNvSpPr>
-          <p:nvPr/>
-        </p:nvSpPr>
-        <p:spPr>
-          <a:xfrm xmlns:a="http://schemas.openxmlformats.org/drawingml/2006/main">
-            <a:off x="8176070" y="3320225"/>
-            <a:ext cx="107061" cy="107061"/>
-          </a:xfrm>
-          <a:prstGeom xmlns:a="http://schemas.openxmlformats.org/drawingml/2006/main" prst="ellipse">
-            <a:avLst/>
-          </a:prstGeom>
-          <a:solidFill xmlns:a="http://schemas.openxmlformats.org/drawingml/2006/main">
-            <a:srgbClr val="000000"/>
-          </a:solidFill>
-        </p:spPr>
-      </p:sp>
-      <p:sp>
-        <p:nvSpPr>
-          <p:cNvPr id="7" name="Content-Placeholder-15-8">
-            <a:extLst xmlns:a="http://schemas.openxmlformats.org/drawingml/2006/main">
-              <a:ext uri="{FF2B5EF4-FFF2-40B4-BE49-F238E27FC236}">
-                <a16:creationId xmlns:a16="http://schemas.microsoft.com/office/drawing/2014/main" id="{F6E4560C-3B10-4C4F-B9BD-48BF6E493D89}"/>
-              </a:ext>
-            </a:extLst>
-          </p:cNvPr>
-          <p:cNvSpPr>
-            <a:spLocks xmlns:a="http://schemas.openxmlformats.org/drawingml/2006/main" noGrp="1"/>
-          </p:cNvSpPr>
-          <p:nvPr/>
-        </p:nvSpPr>
-        <p:spPr>
-          <a:xfrm xmlns:a="http://schemas.openxmlformats.org/drawingml/2006/main">
-            <a:off x="393668" y="2843308"/>
-            <a:ext cx="1612868" cy="262414"/>
-          </a:xfrm>
-          <a:prstGeom xmlns:a="http://schemas.openxmlformats.org/drawingml/2006/main" prst="rect">
-            <a:avLst/>
-          </a:prstGeom>
-        </p:spPr>
-        <p:txBody>
-          <a:bodyPr xmlns:a="http://schemas.openxmlformats.org/drawingml/2006/main" lIns="0" tIns="0" rIns="0" bIns="0">
-            <a:noAutofit/>
-          </a:bodyPr>
-          <a:lstStyle xmlns:a="http://schemas.openxmlformats.org/drawingml/2006/main"/>
-          <a:p xmlns:a="http://schemas.openxmlformats.org/drawingml/2006/main">
-            <a:pPr algn="l">
-              <a:defRPr sz="1600">
-                <a:solidFill>
-                  <a:srgbClr val="000000"/>
-                </a:solidFill>
-                <a:latin typeface="Helvetica Neue"/>
-                <a:ea typeface="Helvetica Neue"/>
-                <a:cs typeface="Helvetica Neue"/>
-              </a:defRPr>
-            </a:pPr>
-            <a:r>
-              <a:t>2016</a:t>
-            </a:r>
-          </a:p>
-        </p:txBody>
-      </p:sp>
-      <p:sp>
-        <p:nvSpPr>
-          <p:cNvPr id="8" name="Content-Placeholder-15-9">
-            <a:extLst xmlns:a="http://schemas.openxmlformats.org/drawingml/2006/main">
-              <a:ext uri="{FF2B5EF4-FFF2-40B4-BE49-F238E27FC236}">
-                <a16:creationId xmlns:a16="http://schemas.microsoft.com/office/drawing/2014/main" id="{2ADC04CF-61C0-4848-BB8F-5D05357F2368}"/>
-              </a:ext>
-            </a:extLst>
-          </p:cNvPr>
-          <p:cNvSpPr>
-            <a:spLocks xmlns:a="http://schemas.openxmlformats.org/drawingml/2006/main" noGrp="1"/>
-          </p:cNvSpPr>
-          <p:nvPr/>
-        </p:nvSpPr>
-        <p:spPr>
-          <a:xfrm xmlns:a="http://schemas.openxmlformats.org/drawingml/2006/main">
-            <a:off x="4294156" y="2843308"/>
-            <a:ext cx="1612868" cy="262414"/>
-          </a:xfrm>
-          <a:prstGeom xmlns:a="http://schemas.openxmlformats.org/drawingml/2006/main" prst="rect">
-            <a:avLst/>
-          </a:prstGeom>
-        </p:spPr>
-        <p:txBody>
-          <a:bodyPr xmlns:a="http://schemas.openxmlformats.org/drawingml/2006/main" lIns="0" tIns="0" rIns="0" bIns="0">
-            <a:noAutofit/>
-          </a:bodyPr>
-          <a:lstStyle xmlns:a="http://schemas.openxmlformats.org/drawingml/2006/main"/>
-          <a:p xmlns:a="http://schemas.openxmlformats.org/drawingml/2006/main">
-            <a:pPr algn="l">
-              <a:defRPr sz="1600">
-                <a:solidFill>
-                  <a:srgbClr val="000000"/>
-                </a:solidFill>
-                <a:latin typeface="Helvetica Neue"/>
-                <a:ea typeface="Helvetica Neue"/>
-                <a:cs typeface="Helvetica Neue"/>
-              </a:defRPr>
-            </a:pPr>
-            <a:r>
-              <a:t>2017–2020</a:t>
-            </a:r>
-          </a:p>
-        </p:txBody>
-      </p:sp>
-      <p:sp>
-        <p:nvSpPr>
-          <p:cNvPr id="9" name="Content-Placeholder-15-10">
-            <a:extLst xmlns:a="http://schemas.openxmlformats.org/drawingml/2006/main">
-              <a:ext uri="{FF2B5EF4-FFF2-40B4-BE49-F238E27FC236}">
-                <a16:creationId xmlns:a16="http://schemas.microsoft.com/office/drawing/2014/main" id="{F8CE2CCE-AACF-4A2B-B7C6-9FB377056D75}"/>
-              </a:ext>
-            </a:extLst>
-          </p:cNvPr>
-          <p:cNvSpPr>
-            <a:spLocks xmlns:a="http://schemas.openxmlformats.org/drawingml/2006/main" noGrp="1"/>
-          </p:cNvSpPr>
-          <p:nvPr/>
-        </p:nvSpPr>
-        <p:spPr>
-          <a:xfrm xmlns:a="http://schemas.openxmlformats.org/drawingml/2006/main">
-            <a:off x="8223218" y="2843308"/>
-            <a:ext cx="1612868" cy="262414"/>
-          </a:xfrm>
-          <a:prstGeom xmlns:a="http://schemas.openxmlformats.org/drawingml/2006/main" prst="rect">
-            <a:avLst/>
-          </a:prstGeom>
-        </p:spPr>
-        <p:txBody>
-          <a:bodyPr xmlns:a="http://schemas.openxmlformats.org/drawingml/2006/main" lIns="0" tIns="0" rIns="0" bIns="0">
-            <a:noAutofit/>
-          </a:bodyPr>
-          <a:lstStyle xmlns:a="http://schemas.openxmlformats.org/drawingml/2006/main"/>
-          <a:p xmlns:a="http://schemas.openxmlformats.org/drawingml/2006/main">
-            <a:pPr algn="l">
-              <a:defRPr sz="1600">
-                <a:solidFill>
-                  <a:srgbClr val="000000"/>
-                </a:solidFill>
-                <a:latin typeface="Helvetica Neue"/>
-                <a:ea typeface="Helvetica Neue"/>
-                <a:cs typeface="Helvetica Neue"/>
-              </a:defRPr>
-            </a:pPr>
-            <a:r>
-              <a:t>2021–2023</a:t>
-            </a:r>
-          </a:p>
-        </p:txBody>
-      </p:sp>
-      <p:sp>
-        <p:nvSpPr>
-          <p:cNvPr id="10" name="Text-Placeholder-16-11">
-            <a:extLst xmlns:a="http://schemas.openxmlformats.org/drawingml/2006/main">
-              <a:ext uri="{FF2B5EF4-FFF2-40B4-BE49-F238E27FC236}">
-                <a16:creationId xmlns:a16="http://schemas.microsoft.com/office/drawing/2014/main" id="{E44534A2-8A5F-47C9-ADCE-8992BBC582D2}"/>
-              </a:ext>
-            </a:extLst>
-          </p:cNvPr>
-          <p:cNvSpPr>
-            <a:spLocks xmlns:a="http://schemas.openxmlformats.org/drawingml/2006/main" noGrp="1"/>
-          </p:cNvSpPr>
-          <p:nvPr/>
-        </p:nvSpPr>
-        <p:spPr>
-          <a:xfrm xmlns:a="http://schemas.openxmlformats.org/drawingml/2006/main">
-            <a:off x="4317111" y="3822668"/>
-            <a:ext cx="3156109" cy="1586294"/>
-          </a:xfrm>
-          <a:prstGeom xmlns:a="http://schemas.openxmlformats.org/drawingml/2006/main" prst="rect">
-            <a:avLst/>
-          </a:prstGeom>
-        </p:spPr>
-        <p:txBody>
-          <a:bodyPr xmlns:a="http://schemas.openxmlformats.org/drawingml/2006/main" lIns="0" tIns="0" rIns="0" bIns="0">
-            <a:noAutofit/>
-          </a:bodyPr>
-          <a:lstStyle xmlns:a="http://schemas.openxmlformats.org/drawingml/2006/main"/>
-          <a:p xmlns:a="http://schemas.openxmlformats.org/drawingml/2006/main">
-            <a:pPr algn="l">
+              <a:buNone/>
               <a:defRPr sz="2400">
                 <a:solidFill>
                   <a:srgbClr val="000000"/>
@@ -4425,11 +5314,12 @@
               </a:defRPr>
             </a:pPr>
             <a:r>
-              <a:t>TRAIN</a:t>
-            </a:r>
-          </a:p>
-          <a:p xmlns:a="http://schemas.openxmlformats.org/drawingml/2006/main">
-            <a:pPr algn="l">
+              <a:t>Why ‘Ridge’ matters</a:t>
+            </a:r>
+          </a:p>
+          <a:p xmlns:a="http://schemas.openxmlformats.org/drawingml/2006/main">
+            <a:pPr algn="l">
+              <a:buNone/>
               <a:defRPr sz="2400">
                 <a:solidFill>
                   <a:srgbClr val="000000"/>
@@ -4440,41 +5330,12 @@
               </a:defRPr>
             </a:pPr>
             <a:r>
-              <a:t>15 signal quarters. Fit, validate, gate, then freeze.</a:t>
-            </a:r>
-          </a:p>
-        </p:txBody>
-      </p:sp>
-      <p:sp>
-        <p:nvSpPr>
-          <p:cNvPr id="11" name="Text-Placeholder-16-12">
-            <a:extLst xmlns:a="http://schemas.openxmlformats.org/drawingml/2006/main">
-              <a:ext uri="{FF2B5EF4-FFF2-40B4-BE49-F238E27FC236}">
-                <a16:creationId xmlns:a16="http://schemas.microsoft.com/office/drawing/2014/main" id="{9BF4969B-D3F7-4F6C-A6C3-33A82084DBE5}"/>
-              </a:ext>
-            </a:extLst>
-          </p:cNvPr>
-          <p:cNvSpPr>
-            <a:spLocks xmlns:a="http://schemas.openxmlformats.org/drawingml/2006/main" noGrp="1"/>
-          </p:cNvSpPr>
-          <p:nvPr/>
-        </p:nvSpPr>
-        <p:spPr>
-          <a:xfrm xmlns:a="http://schemas.openxmlformats.org/drawingml/2006/main">
-            <a:off x="399859" y="3822668"/>
-            <a:ext cx="3156109" cy="1586294"/>
-          </a:xfrm>
-          <a:prstGeom xmlns:a="http://schemas.openxmlformats.org/drawingml/2006/main" prst="rect">
-            <a:avLst/>
-          </a:prstGeom>
-        </p:spPr>
-        <p:txBody>
-          <a:bodyPr xmlns:a="http://schemas.openxmlformats.org/drawingml/2006/main" lIns="0" tIns="0" rIns="0" bIns="0">
-            <a:noAutofit/>
-          </a:bodyPr>
-          <a:lstStyle xmlns:a="http://schemas.openxmlformats.org/drawingml/2006/main"/>
-          <a:p xmlns:a="http://schemas.openxmlformats.org/drawingml/2006/main">
-            <a:pPr algn="l">
+              <a:t>Ordinary regression can chase noisy relationships. Ridge charges a penalty for large weights:</a:t>
+            </a:r>
+          </a:p>
+          <a:p xmlns:a="http://schemas.openxmlformats.org/drawingml/2006/main">
+            <a:pPr algn="l">
+              <a:buNone/>
               <a:defRPr sz="2400">
                 <a:solidFill>
                   <a:srgbClr val="000000"/>
@@ -4485,11 +5346,12 @@
               </a:defRPr>
             </a:pPr>
             <a:r>
-              <a:t>Warm-up</a:t>
-            </a:r>
-          </a:p>
-          <a:p xmlns:a="http://schemas.openxmlformats.org/drawingml/2006/main">
-            <a:pPr algn="l">
+              <a:t/>
+            </a:r>
+          </a:p>
+          <a:p xmlns:a="http://schemas.openxmlformats.org/drawingml/2006/main">
+            <a:pPr algn="l">
+              <a:buNone/>
               <a:defRPr sz="2400">
                 <a:solidFill>
                   <a:srgbClr val="000000"/>
@@ -4500,41 +5362,12 @@
               </a:defRPr>
             </a:pPr>
             <a:r>
-              <a:t>Indicators only. No target or selection authority.</a:t>
-            </a:r>
-          </a:p>
-        </p:txBody>
-      </p:sp>
-      <p:sp>
-        <p:nvSpPr>
-          <p:cNvPr id="12" name="Text-Placeholder-16-13">
-            <a:extLst xmlns:a="http://schemas.openxmlformats.org/drawingml/2006/main">
-              <a:ext uri="{FF2B5EF4-FFF2-40B4-BE49-F238E27FC236}">
-                <a16:creationId xmlns:a16="http://schemas.microsoft.com/office/drawing/2014/main" id="{F60300E2-3A3C-414E-8BD2-9F38F9B8042C}"/>
-              </a:ext>
-            </a:extLst>
-          </p:cNvPr>
-          <p:cNvSpPr>
-            <a:spLocks xmlns:a="http://schemas.openxmlformats.org/drawingml/2006/main" noGrp="1"/>
-          </p:cNvSpPr>
-          <p:nvPr/>
-        </p:nvSpPr>
-        <p:spPr>
-          <a:xfrm xmlns:a="http://schemas.openxmlformats.org/drawingml/2006/main">
-            <a:off x="8177879" y="3822668"/>
-            <a:ext cx="3156109" cy="1586294"/>
-          </a:xfrm>
-          <a:prstGeom xmlns:a="http://schemas.openxmlformats.org/drawingml/2006/main" prst="rect">
-            <a:avLst/>
-          </a:prstGeom>
-        </p:spPr>
-        <p:txBody>
-          <a:bodyPr xmlns:a="http://schemas.openxmlformats.org/drawingml/2006/main" lIns="0" tIns="0" rIns="0" bIns="0">
-            <a:noAutofit/>
-          </a:bodyPr>
-          <a:lstStyle xmlns:a="http://schemas.openxmlformats.org/drawingml/2006/main"/>
-          <a:p xmlns:a="http://schemas.openxmlformats.org/drawingml/2006/main">
-            <a:pPr algn="l">
+              <a:t>error + λ × Σ weight²</a:t>
+            </a:r>
+          </a:p>
+          <a:p xmlns:a="http://schemas.openxmlformats.org/drawingml/2006/main">
+            <a:pPr algn="l">
+              <a:buNone/>
               <a:defRPr sz="2400">
                 <a:solidFill>
                   <a:srgbClr val="000000"/>
@@ -4545,11 +5378,12 @@
               </a:defRPr>
             </a:pPr>
             <a:r>
-              <a:t>OOS lock</a:t>
-            </a:r>
-          </a:p>
-          <a:p xmlns:a="http://schemas.openxmlformats.org/drawingml/2006/main">
-            <a:pPr algn="l">
+              <a:t/>
+            </a:r>
+          </a:p>
+          <a:p xmlns:a="http://schemas.openxmlformats.org/drawingml/2006/main">
+            <a:pPr algn="l">
+              <a:buNone/>
               <a:defRPr sz="2400">
                 <a:solidFill>
                   <a:srgbClr val="000000"/>
@@ -4560,7 +5394,7 @@
               </a:defRPr>
             </a:pPr>
             <a:r>
-              <a:t>Accessible only if every TRAIN gate passes.</a:t>
+              <a:t>Larger λ means more restraint.</a:t>
             </a:r>
           </a:p>
         </p:txBody>
@@ -4568,7 +5402,7 @@
     </p:spTree>
     <p:extLst>
       <p:ext uri="{BB962C8B-B14F-4D97-AF65-F5344CB8AC3E}">
-        <p14:creationId xmlns:p14="http://schemas.microsoft.com/office/powerpoint/2010/main" val="779058837"/>
+        <p14:creationId xmlns:p14="http://schemas.microsoft.com/office/powerpoint/2010/main" val="920191251"/>
       </p:ext>
     </p:extLst>
   </p:cSld>
@@ -4589,10 +5423,10 @@
       </p:grpSpPr>
       <p:sp>
         <p:nvSpPr>
-          <p:cNvPr id="6" name="Google-Shape-532-p58-2">
-            <a:extLst xmlns:a="http://schemas.openxmlformats.org/drawingml/2006/main">
-              <a:ext uri="{FF2B5EF4-FFF2-40B4-BE49-F238E27FC236}">
-                <a16:creationId xmlns:a16="http://schemas.microsoft.com/office/drawing/2014/main" id="{7F04A8CB-F2A8-4B45-BDB8-034023C7D5AB}"/>
+          <p:cNvPr id="13" name="Slide-Number-Placeholder-3-2">
+            <a:extLst xmlns:a="http://schemas.openxmlformats.org/drawingml/2006/main">
+              <a:ext uri="{FF2B5EF4-FFF2-40B4-BE49-F238E27FC236}">
+                <a16:creationId xmlns:a16="http://schemas.microsoft.com/office/drawing/2014/main" id="{D54D3255-66D6-4A8C-98C8-699D8C150CF8}"/>
               </a:ext>
             </a:extLst>
           </p:cNvPr>
@@ -4611,102 +5445,344 @@
           </a:prstGeom>
         </p:spPr>
         <p:txBody>
-          <a:bodyPr xmlns:a="http://schemas.openxmlformats.org/drawingml/2006/main" wrap="square" lIns="0" tIns="0" rIns="0" bIns="0" anchor="b">
+          <a:bodyPr xmlns:a="http://schemas.openxmlformats.org/drawingml/2006/main" lIns="0" tIns="0" rIns="0" bIns="0" anchor="b"/>
+          <a:lstStyle xmlns:a="http://schemas.openxmlformats.org/drawingml/2006/main"/>
+          <a:p xmlns:a="http://schemas.openxmlformats.org/drawingml/2006/main">
+            <a:pPr algn="r">
+              <a:buNone/>
+              <a:defRPr sz="1000">
+                <a:solidFill>
+                  <a:srgbClr val="000000"/>
+                </a:solidFill>
+                <a:latin typeface="Helvetica Neue"/>
+                <a:ea typeface="Helvetica Neue"/>
+                <a:cs typeface="Helvetica Neue"/>
+              </a:defRPr>
+            </a:pPr>
+            <a:r>
+              <a:t>4</a:t>
+            </a:r>
+          </a:p>
+        </p:txBody>
+      </p:sp>
+      <p:sp>
+        <p:nvSpPr>
+          <p:cNvPr id="2" name="Title-10-3">
+            <a:extLst xmlns:a="http://schemas.openxmlformats.org/drawingml/2006/main">
+              <a:ext uri="{FF2B5EF4-FFF2-40B4-BE49-F238E27FC236}">
+                <a16:creationId xmlns:a16="http://schemas.microsoft.com/office/drawing/2014/main" id="{F5FA72C1-6972-494D-9400-5BAD16F3F2C2}"/>
+              </a:ext>
+            </a:extLst>
+          </p:cNvPr>
+          <p:cNvSpPr>
+            <a:spLocks xmlns:a="http://schemas.openxmlformats.org/drawingml/2006/main" noGrp="1"/>
+          </p:cNvSpPr>
+          <p:nvPr/>
+        </p:nvSpPr>
+        <p:spPr>
+          <a:xfrm xmlns:a="http://schemas.openxmlformats.org/drawingml/2006/main">
+            <a:off x="393668" y="344043"/>
+            <a:ext cx="11404568" cy="1047464"/>
+          </a:xfrm>
+          <a:prstGeom xmlns:a="http://schemas.openxmlformats.org/drawingml/2006/main" prst="rect">
+            <a:avLst/>
+          </a:prstGeom>
+        </p:spPr>
+        <p:txBody>
+          <a:bodyPr xmlns:a="http://schemas.openxmlformats.org/drawingml/2006/main" lIns="0" tIns="0" rIns="0" bIns="0" anchor="t">
+            <a:normAutofit fontScale="100000"/>
+          </a:bodyPr>
+          <a:lstStyle xmlns:a="http://schemas.openxmlformats.org/drawingml/2006/main"/>
+          <a:p xmlns:a="http://schemas.openxmlformats.org/drawingml/2006/main">
+            <a:pPr algn="l">
+              <a:buNone/>
+              <a:defRPr sz="2900">
+                <a:solidFill>
+                  <a:srgbClr val="000000"/>
+                </a:solidFill>
+                <a:latin typeface="Helvetica Neue"/>
+                <a:ea typeface="Helvetica Neue"/>
+                <a:cs typeface="Helvetica Neue"/>
+              </a:defRPr>
+            </a:pPr>
+            <a:r>
+              <a:t>Three evidence layers ask progressively harder questions</a:t>
+            </a:r>
+          </a:p>
+        </p:txBody>
+      </p:sp>
+      <p:cxnSp>
+        <p:nvCxnSpPr>
+          <p:cNvPr id="21" name="Google-Shape-2259-p159-4"/>
+          <p:cNvCxnSpPr/>
+          <p:nvPr/>
+        </p:nvCxnSpPr>
+        <p:spPr>
+          <a:xfrm xmlns:a="http://schemas.openxmlformats.org/drawingml/2006/main">
+            <a:off x="337757" y="3373755"/>
+            <a:ext cx="12245435" cy="286"/>
+          </a:xfrm>
+          <a:prstGeom xmlns:a="http://schemas.openxmlformats.org/drawingml/2006/main" prst="straightConnector1">
+            <a:avLst/>
+          </a:prstGeom>
+          <a:ln xmlns:a="http://schemas.openxmlformats.org/drawingml/2006/main" w="9525">
+            <a:solidFill>
+              <a:srgbClr val="000000"/>
+            </a:solidFill>
+            <a:prstDash val="solid"/>
+          </a:ln>
+        </p:spPr>
+      </p:cxnSp>
+      <p:sp>
+        <p:nvSpPr>
+          <p:cNvPr id="4" name="Google-Shape-2260-p159-5">
+            <a:extLst xmlns:a="http://schemas.openxmlformats.org/drawingml/2006/main">
+              <a:ext uri="{FF2B5EF4-FFF2-40B4-BE49-F238E27FC236}">
+                <a16:creationId xmlns:a16="http://schemas.microsoft.com/office/drawing/2014/main" id="{F36AEC3B-C048-4552-91A7-A041A570BFEF}"/>
+              </a:ext>
+            </a:extLst>
+          </p:cNvPr>
+          <p:cNvSpPr>
+            <a:spLocks xmlns:a="http://schemas.openxmlformats.org/drawingml/2006/main" noGrp="1"/>
+          </p:cNvSpPr>
+          <p:nvPr/>
+        </p:nvSpPr>
+        <p:spPr>
+          <a:xfrm xmlns:a="http://schemas.openxmlformats.org/drawingml/2006/main">
+            <a:off x="337757" y="3320225"/>
+            <a:ext cx="107061" cy="107061"/>
+          </a:xfrm>
+          <a:prstGeom xmlns:a="http://schemas.openxmlformats.org/drawingml/2006/main" prst="ellipse">
+            <a:avLst/>
+          </a:prstGeom>
+          <a:solidFill xmlns:a="http://schemas.openxmlformats.org/drawingml/2006/main">
+            <a:srgbClr val="000000"/>
+          </a:solidFill>
+        </p:spPr>
+      </p:sp>
+      <p:sp>
+        <p:nvSpPr>
+          <p:cNvPr id="5" name="Google-Shape-2261-p159-6">
+            <a:extLst xmlns:a="http://schemas.openxmlformats.org/drawingml/2006/main">
+              <a:ext uri="{FF2B5EF4-FFF2-40B4-BE49-F238E27FC236}">
+                <a16:creationId xmlns:a16="http://schemas.microsoft.com/office/drawing/2014/main" id="{E096155C-85AC-4590-8B0B-D6D47593683E}"/>
+              </a:ext>
+            </a:extLst>
+          </p:cNvPr>
+          <p:cNvSpPr>
+            <a:spLocks xmlns:a="http://schemas.openxmlformats.org/drawingml/2006/main" noGrp="1"/>
+          </p:cNvSpPr>
+          <p:nvPr/>
+        </p:nvSpPr>
+        <p:spPr>
+          <a:xfrm xmlns:a="http://schemas.openxmlformats.org/drawingml/2006/main">
+            <a:off x="4251770" y="3320225"/>
+            <a:ext cx="107061" cy="107061"/>
+          </a:xfrm>
+          <a:prstGeom xmlns:a="http://schemas.openxmlformats.org/drawingml/2006/main" prst="ellipse">
+            <a:avLst/>
+          </a:prstGeom>
+          <a:solidFill xmlns:a="http://schemas.openxmlformats.org/drawingml/2006/main">
+            <a:srgbClr val="000000"/>
+          </a:solidFill>
+        </p:spPr>
+      </p:sp>
+      <p:sp>
+        <p:nvSpPr>
+          <p:cNvPr id="6" name="Google-Shape-2262-p159-7">
+            <a:extLst xmlns:a="http://schemas.openxmlformats.org/drawingml/2006/main">
+              <a:ext uri="{FF2B5EF4-FFF2-40B4-BE49-F238E27FC236}">
+                <a16:creationId xmlns:a16="http://schemas.microsoft.com/office/drawing/2014/main" id="{F02E53A1-4C89-4571-90AA-56F740ADF6E7}"/>
+              </a:ext>
+            </a:extLst>
+          </p:cNvPr>
+          <p:cNvSpPr>
+            <a:spLocks xmlns:a="http://schemas.openxmlformats.org/drawingml/2006/main" noGrp="1"/>
+          </p:cNvSpPr>
+          <p:nvPr/>
+        </p:nvSpPr>
+        <p:spPr>
+          <a:xfrm xmlns:a="http://schemas.openxmlformats.org/drawingml/2006/main">
+            <a:off x="8176070" y="3320225"/>
+            <a:ext cx="107061" cy="107061"/>
+          </a:xfrm>
+          <a:prstGeom xmlns:a="http://schemas.openxmlformats.org/drawingml/2006/main" prst="ellipse">
+            <a:avLst/>
+          </a:prstGeom>
+          <a:solidFill xmlns:a="http://schemas.openxmlformats.org/drawingml/2006/main">
+            <a:srgbClr val="000000"/>
+          </a:solidFill>
+        </p:spPr>
+      </p:sp>
+      <p:sp>
+        <p:nvSpPr>
+          <p:cNvPr id="7" name="Content-Placeholder-15-8">
+            <a:extLst xmlns:a="http://schemas.openxmlformats.org/drawingml/2006/main">
+              <a:ext uri="{FF2B5EF4-FFF2-40B4-BE49-F238E27FC236}">
+                <a16:creationId xmlns:a16="http://schemas.microsoft.com/office/drawing/2014/main" id="{F6E4560C-3B10-4C4F-B9BD-48BF6E493D89}"/>
+              </a:ext>
+            </a:extLst>
+          </p:cNvPr>
+          <p:cNvSpPr>
+            <a:spLocks xmlns:a="http://schemas.openxmlformats.org/drawingml/2006/main" noGrp="1"/>
+          </p:cNvSpPr>
+          <p:nvPr/>
+        </p:nvSpPr>
+        <p:spPr>
+          <a:xfrm xmlns:a="http://schemas.openxmlformats.org/drawingml/2006/main">
+            <a:off x="393668" y="2843308"/>
+            <a:ext cx="1612868" cy="262414"/>
+          </a:xfrm>
+          <a:prstGeom xmlns:a="http://schemas.openxmlformats.org/drawingml/2006/main" prst="rect">
+            <a:avLst/>
+          </a:prstGeom>
+        </p:spPr>
+        <p:txBody>
+          <a:bodyPr xmlns:a="http://schemas.openxmlformats.org/drawingml/2006/main" lIns="0" tIns="0" rIns="0" bIns="0">
             <a:noAutofit/>
           </a:bodyPr>
           <a:lstStyle xmlns:a="http://schemas.openxmlformats.org/drawingml/2006/main"/>
           <a:p xmlns:a="http://schemas.openxmlformats.org/drawingml/2006/main">
-            <a:pPr algn="r">
-              <a:defRPr sz="1000">
-                <a:solidFill>
-                  <a:srgbClr val="000000"/>
-                </a:solidFill>
-                <a:latin typeface="Helvetica Neue"/>
-                <a:ea typeface="Helvetica Neue"/>
-                <a:cs typeface="Helvetica Neue"/>
-              </a:defRPr>
-            </a:pPr>
-            <a:r>
-              <a:t>4</a:t>
-            </a:r>
-          </a:p>
-        </p:txBody>
-      </p:sp>
-      <p:sp>
-        <p:nvSpPr>
-          <p:cNvPr id="2" name="Google-Shape-533-p58-3">
-            <a:extLst xmlns:a="http://schemas.openxmlformats.org/drawingml/2006/main">
-              <a:ext uri="{FF2B5EF4-FFF2-40B4-BE49-F238E27FC236}">
-                <a16:creationId xmlns:a16="http://schemas.microsoft.com/office/drawing/2014/main" id="{A5B2509C-704C-4AA9-9EAB-0C2399D5E2E3}"/>
-              </a:ext>
-            </a:extLst>
-          </p:cNvPr>
-          <p:cNvSpPr>
-            <a:spLocks xmlns:a="http://schemas.openxmlformats.org/drawingml/2006/main" noGrp="1"/>
-          </p:cNvSpPr>
-          <p:nvPr/>
-        </p:nvSpPr>
-        <p:spPr>
-          <a:xfrm xmlns:a="http://schemas.openxmlformats.org/drawingml/2006/main">
-            <a:off x="393668" y="344043"/>
-            <a:ext cx="11404568" cy="1047464"/>
-          </a:xfrm>
-          <a:prstGeom xmlns:a="http://schemas.openxmlformats.org/drawingml/2006/main" prst="rect">
-            <a:avLst/>
-          </a:prstGeom>
-        </p:spPr>
-        <p:txBody>
-          <a:bodyPr xmlns:a="http://schemas.openxmlformats.org/drawingml/2006/main" wrap="square" lIns="0" tIns="0" rIns="0" bIns="0" anchor="t">
+            <a:pPr algn="l">
+              <a:buNone/>
+              <a:defRPr sz="1600">
+                <a:solidFill>
+                  <a:srgbClr val="000000"/>
+                </a:solidFill>
+                <a:latin typeface="Helvetica Neue"/>
+                <a:ea typeface="Helvetica Neue"/>
+                <a:cs typeface="Helvetica Neue"/>
+              </a:defRPr>
+            </a:pPr>
+            <a:r>
+              <a:t>Pooled TRAIN</a:t>
+            </a:r>
+          </a:p>
+        </p:txBody>
+      </p:sp>
+      <p:sp>
+        <p:nvSpPr>
+          <p:cNvPr id="8" name="Content-Placeholder-15-9">
+            <a:extLst xmlns:a="http://schemas.openxmlformats.org/drawingml/2006/main">
+              <a:ext uri="{FF2B5EF4-FFF2-40B4-BE49-F238E27FC236}">
+                <a16:creationId xmlns:a16="http://schemas.microsoft.com/office/drawing/2014/main" id="{2ADC04CF-61C0-4848-BB8F-5D05357F2368}"/>
+              </a:ext>
+            </a:extLst>
+          </p:cNvPr>
+          <p:cNvSpPr>
+            <a:spLocks xmlns:a="http://schemas.openxmlformats.org/drawingml/2006/main" noGrp="1"/>
+          </p:cNvSpPr>
+          <p:nvPr/>
+        </p:nvSpPr>
+        <p:spPr>
+          <a:xfrm xmlns:a="http://schemas.openxmlformats.org/drawingml/2006/main">
+            <a:off x="4294156" y="2843308"/>
+            <a:ext cx="1612868" cy="262414"/>
+          </a:xfrm>
+          <a:prstGeom xmlns:a="http://schemas.openxmlformats.org/drawingml/2006/main" prst="rect">
+            <a:avLst/>
+          </a:prstGeom>
+        </p:spPr>
+        <p:txBody>
+          <a:bodyPr xmlns:a="http://schemas.openxmlformats.org/drawingml/2006/main" lIns="0" tIns="0" rIns="0" bIns="0">
             <a:noAutofit/>
           </a:bodyPr>
           <a:lstStyle xmlns:a="http://schemas.openxmlformats.org/drawingml/2006/main"/>
           <a:p xmlns:a="http://schemas.openxmlformats.org/drawingml/2006/main">
             <a:pPr algn="l">
-              <a:defRPr sz="2900">
-                <a:solidFill>
-                  <a:srgbClr val="000000"/>
-                </a:solidFill>
-                <a:latin typeface="Helvetica Neue"/>
-                <a:ea typeface="Helvetica Neue"/>
-                <a:cs typeface="Helvetica Neue"/>
-              </a:defRPr>
-            </a:pPr>
-            <a:r>
-              <a:t>Three features capture persistent trend</a:t>
-            </a:r>
-          </a:p>
-        </p:txBody>
-      </p:sp>
-      <p:sp>
-        <p:nvSpPr>
-          <p:cNvPr id="3" name="Google-Shape-534-p58-4">
-            <a:extLst xmlns:a="http://schemas.openxmlformats.org/drawingml/2006/main">
-              <a:ext uri="{FF2B5EF4-FFF2-40B4-BE49-F238E27FC236}">
-                <a16:creationId xmlns:a16="http://schemas.microsoft.com/office/drawing/2014/main" id="{BD53BBDF-7F30-43A1-B92A-F0849D33B88D}"/>
-              </a:ext>
-            </a:extLst>
-          </p:cNvPr>
-          <p:cNvSpPr>
-            <a:spLocks xmlns:a="http://schemas.openxmlformats.org/drawingml/2006/main" noGrp="1"/>
-          </p:cNvSpPr>
-          <p:nvPr/>
-        </p:nvSpPr>
-        <p:spPr>
-          <a:xfrm xmlns:a="http://schemas.openxmlformats.org/drawingml/2006/main">
-            <a:off x="393668" y="3365468"/>
-            <a:ext cx="3568732" cy="2628900"/>
-          </a:xfrm>
-          <a:prstGeom xmlns:a="http://schemas.openxmlformats.org/drawingml/2006/main" prst="rect">
-            <a:avLst/>
-          </a:prstGeom>
-        </p:spPr>
-        <p:txBody>
-          <a:bodyPr xmlns:a="http://schemas.openxmlformats.org/drawingml/2006/main" wrap="square" lIns="0" tIns="0" rIns="0" bIns="0" anchor="t">
+              <a:buNone/>
+              <a:defRPr sz="1600">
+                <a:solidFill>
+                  <a:srgbClr val="000000"/>
+                </a:solidFill>
+                <a:latin typeface="Helvetica Neue"/>
+                <a:ea typeface="Helvetica Neue"/>
+                <a:cs typeface="Helvetica Neue"/>
+              </a:defRPr>
+            </a:pPr>
+            <a:r>
+              <a:t>Forward folds</a:t>
+            </a:r>
+          </a:p>
+        </p:txBody>
+      </p:sp>
+      <p:sp>
+        <p:nvSpPr>
+          <p:cNvPr id="9" name="Content-Placeholder-15-10">
+            <a:extLst xmlns:a="http://schemas.openxmlformats.org/drawingml/2006/main">
+              <a:ext uri="{FF2B5EF4-FFF2-40B4-BE49-F238E27FC236}">
+                <a16:creationId xmlns:a16="http://schemas.microsoft.com/office/drawing/2014/main" id="{F8CE2CCE-AACF-4A2B-B7C6-9FB377056D75}"/>
+              </a:ext>
+            </a:extLst>
+          </p:cNvPr>
+          <p:cNvSpPr>
+            <a:spLocks xmlns:a="http://schemas.openxmlformats.org/drawingml/2006/main" noGrp="1"/>
+          </p:cNvSpPr>
+          <p:nvPr/>
+        </p:nvSpPr>
+        <p:spPr>
+          <a:xfrm xmlns:a="http://schemas.openxmlformats.org/drawingml/2006/main">
+            <a:off x="8223218" y="2843308"/>
+            <a:ext cx="1612868" cy="262414"/>
+          </a:xfrm>
+          <a:prstGeom xmlns:a="http://schemas.openxmlformats.org/drawingml/2006/main" prst="rect">
+            <a:avLst/>
+          </a:prstGeom>
+        </p:spPr>
+        <p:txBody>
+          <a:bodyPr xmlns:a="http://schemas.openxmlformats.org/drawingml/2006/main" lIns="0" tIns="0" rIns="0" bIns="0">
             <a:noAutofit/>
           </a:bodyPr>
           <a:lstStyle xmlns:a="http://schemas.openxmlformats.org/drawingml/2006/main"/>
           <a:p xmlns:a="http://schemas.openxmlformats.org/drawingml/2006/main">
             <a:pPr algn="l">
+              <a:buNone/>
+              <a:defRPr sz="1600">
+                <a:solidFill>
+                  <a:srgbClr val="000000"/>
+                </a:solidFill>
+                <a:latin typeface="Helvetica Neue"/>
+                <a:ea typeface="Helvetica Neue"/>
+                <a:cs typeface="Helvetica Neue"/>
+              </a:defRPr>
+            </a:pPr>
+            <a:r>
+              <a:t>OOS lock</a:t>
+            </a:r>
+          </a:p>
+        </p:txBody>
+      </p:sp>
+      <p:sp>
+        <p:nvSpPr>
+          <p:cNvPr id="10" name="Text-Placeholder-16-11">
+            <a:extLst xmlns:a="http://schemas.openxmlformats.org/drawingml/2006/main">
+              <a:ext uri="{FF2B5EF4-FFF2-40B4-BE49-F238E27FC236}">
+                <a16:creationId xmlns:a16="http://schemas.microsoft.com/office/drawing/2014/main" id="{E44534A2-8A5F-47C9-ADCE-8992BBC582D2}"/>
+              </a:ext>
+            </a:extLst>
+          </p:cNvPr>
+          <p:cNvSpPr>
+            <a:spLocks xmlns:a="http://schemas.openxmlformats.org/drawingml/2006/main" noGrp="1"/>
+          </p:cNvSpPr>
+          <p:nvPr/>
+        </p:nvSpPr>
+        <p:spPr>
+          <a:xfrm xmlns:a="http://schemas.openxmlformats.org/drawingml/2006/main">
+            <a:off x="4317111" y="3822668"/>
+            <a:ext cx="3156109" cy="1586294"/>
+          </a:xfrm>
+          <a:prstGeom xmlns:a="http://schemas.openxmlformats.org/drawingml/2006/main" prst="rect">
+            <a:avLst/>
+          </a:prstGeom>
+        </p:spPr>
+        <p:txBody>
+          <a:bodyPr xmlns:a="http://schemas.openxmlformats.org/drawingml/2006/main" lIns="0" tIns="0" rIns="0" bIns="0">
+            <a:noAutofit/>
+          </a:bodyPr>
+          <a:lstStyle xmlns:a="http://schemas.openxmlformats.org/drawingml/2006/main"/>
+          <a:p xmlns:a="http://schemas.openxmlformats.org/drawingml/2006/main">
+            <a:pPr algn="l">
+              <a:buNone/>
               <a:defRPr sz="2400">
                 <a:solidFill>
                   <a:srgbClr val="000000"/>
@@ -4717,11 +5793,42 @@
               </a:defRPr>
             </a:pPr>
             <a:r>
-              <a:t>12–1 momentum</a:t>
-            </a:r>
-          </a:p>
-          <a:p xmlns:a="http://schemas.openxmlformats.org/drawingml/2006/main">
-            <a:pPr algn="l">
+              <a:t>Fit only earlier quarters. Does its ranking work in genuinely later TRAIN quarters?</a:t>
+            </a:r>
+          </a:p>
+        </p:txBody>
+      </p:sp>
+      <p:sp>
+        <p:nvSpPr>
+          <p:cNvPr id="11" name="Text-Placeholder-16-12">
+            <a:extLst xmlns:a="http://schemas.openxmlformats.org/drawingml/2006/main">
+              <a:ext uri="{FF2B5EF4-FFF2-40B4-BE49-F238E27FC236}">
+                <a16:creationId xmlns:a16="http://schemas.microsoft.com/office/drawing/2014/main" id="{9BF4969B-D3F7-4F6C-A6C3-33A82084DBE5}"/>
+              </a:ext>
+            </a:extLst>
+          </p:cNvPr>
+          <p:cNvSpPr>
+            <a:spLocks xmlns:a="http://schemas.openxmlformats.org/drawingml/2006/main" noGrp="1"/>
+          </p:cNvSpPr>
+          <p:nvPr/>
+        </p:nvSpPr>
+        <p:spPr>
+          <a:xfrm xmlns:a="http://schemas.openxmlformats.org/drawingml/2006/main">
+            <a:off x="399859" y="3822668"/>
+            <a:ext cx="3156109" cy="1586294"/>
+          </a:xfrm>
+          <a:prstGeom xmlns:a="http://schemas.openxmlformats.org/drawingml/2006/main" prst="rect">
+            <a:avLst/>
+          </a:prstGeom>
+        </p:spPr>
+        <p:txBody>
+          <a:bodyPr xmlns:a="http://schemas.openxmlformats.org/drawingml/2006/main" lIns="0" tIns="0" rIns="0" bIns="0">
+            <a:noAutofit/>
+          </a:bodyPr>
+          <a:lstStyle xmlns:a="http://schemas.openxmlformats.org/drawingml/2006/main"/>
+          <a:p xmlns:a="http://schemas.openxmlformats.org/drawingml/2006/main">
+            <a:pPr algn="l">
+              <a:buNone/>
               <a:defRPr sz="2400">
                 <a:solidFill>
                   <a:srgbClr val="000000"/>
@@ -4732,42 +5839,42 @@
               </a:defRPr>
             </a:pPr>
             <a:r>
-              <a:t>log(C[t−21] / C[t−252])
-Skips the most recent month to reduce short-run reversal contamination.</a:t>
-            </a:r>
-          </a:p>
-        </p:txBody>
-      </p:sp>
-      <p:sp>
-        <p:nvSpPr>
-          <p:cNvPr id="4" name="Content-Placeholder-1-5">
-            <a:extLst xmlns:a="http://schemas.openxmlformats.org/drawingml/2006/main">
-              <a:ext uri="{FF2B5EF4-FFF2-40B4-BE49-F238E27FC236}">
-                <a16:creationId xmlns:a16="http://schemas.microsoft.com/office/drawing/2014/main" id="{867C7B59-B2E4-4E03-8531-713D5ED57E4A}"/>
-              </a:ext>
-            </a:extLst>
-          </p:cNvPr>
-          <p:cNvSpPr>
-            <a:spLocks xmlns:a="http://schemas.openxmlformats.org/drawingml/2006/main" noGrp="1"/>
-          </p:cNvSpPr>
-          <p:nvPr/>
-        </p:nvSpPr>
-        <p:spPr>
-          <a:xfrm xmlns:a="http://schemas.openxmlformats.org/drawingml/2006/main">
-            <a:off x="8229600" y="3365468"/>
-            <a:ext cx="3568732" cy="2628900"/>
-          </a:xfrm>
-          <a:prstGeom xmlns:a="http://schemas.openxmlformats.org/drawingml/2006/main" prst="rect">
-            <a:avLst/>
-          </a:prstGeom>
-        </p:spPr>
-        <p:txBody>
-          <a:bodyPr xmlns:a="http://schemas.openxmlformats.org/drawingml/2006/main" lIns="91440" tIns="45720" rIns="91440" bIns="45720">
-            <a:normAutofit fontScale="99458"/>
+              <a:t>Can one formula describe all 15 TRAIN quarters after seeing them together?</a:t>
+            </a:r>
+          </a:p>
+        </p:txBody>
+      </p:sp>
+      <p:sp>
+        <p:nvSpPr>
+          <p:cNvPr id="12" name="Text-Placeholder-16-13">
+            <a:extLst xmlns:a="http://schemas.openxmlformats.org/drawingml/2006/main">
+              <a:ext uri="{FF2B5EF4-FFF2-40B4-BE49-F238E27FC236}">
+                <a16:creationId xmlns:a16="http://schemas.microsoft.com/office/drawing/2014/main" id="{F60300E2-3A3C-414E-8BD2-9F38F9B8042C}"/>
+              </a:ext>
+            </a:extLst>
+          </p:cNvPr>
+          <p:cNvSpPr>
+            <a:spLocks xmlns:a="http://schemas.openxmlformats.org/drawingml/2006/main" noGrp="1"/>
+          </p:cNvSpPr>
+          <p:nvPr/>
+        </p:nvSpPr>
+        <p:spPr>
+          <a:xfrm xmlns:a="http://schemas.openxmlformats.org/drawingml/2006/main">
+            <a:off x="8177879" y="3822668"/>
+            <a:ext cx="3156109" cy="1586294"/>
+          </a:xfrm>
+          <a:prstGeom xmlns:a="http://schemas.openxmlformats.org/drawingml/2006/main" prst="rect">
+            <a:avLst/>
+          </a:prstGeom>
+        </p:spPr>
+        <p:txBody>
+          <a:bodyPr xmlns:a="http://schemas.openxmlformats.org/drawingml/2006/main" lIns="0" tIns="0" rIns="0" bIns="0">
+            <a:noAutofit/>
           </a:bodyPr>
           <a:lstStyle xmlns:a="http://schemas.openxmlformats.org/drawingml/2006/main"/>
           <a:p xmlns:a="http://schemas.openxmlformats.org/drawingml/2006/main">
             <a:pPr algn="l">
+              <a:buNone/>
               <a:defRPr sz="2400">
                 <a:solidFill>
                   <a:srgbClr val="000000"/>
@@ -4778,83 +5885,7 @@
               </a:defRPr>
             </a:pPr>
             <a:r>
-              <a:t>Slow slope / ATR</a:t>
-            </a:r>
-          </a:p>
-          <a:p xmlns:a="http://schemas.openxmlformats.org/drawingml/2006/main">
-            <a:pPr algn="l">
-              <a:defRPr sz="2400">
-                <a:solidFill>
-                  <a:srgbClr val="000000"/>
-                </a:solidFill>
-                <a:latin typeface="Helvetica Neue"/>
-                <a:ea typeface="Helvetica Neue"/>
-                <a:cs typeface="Helvetica Neue"/>
-              </a:defRPr>
-            </a:pPr>
-            <a:r>
-              <a:t>(SMA200[t] − SMA200[t−20]) / ATR20[t]
-Trend direction scaled to the asset's own movement.</a:t>
-            </a:r>
-          </a:p>
-        </p:txBody>
-      </p:sp>
-      <p:sp>
-        <p:nvSpPr>
-          <p:cNvPr id="5" name="Content-Placeholder-2-6">
-            <a:extLst xmlns:a="http://schemas.openxmlformats.org/drawingml/2006/main">
-              <a:ext uri="{FF2B5EF4-FFF2-40B4-BE49-F238E27FC236}">
-                <a16:creationId xmlns:a16="http://schemas.microsoft.com/office/drawing/2014/main" id="{F2BCC425-CD46-46F2-8C46-5A605BDC57D6}"/>
-              </a:ext>
-            </a:extLst>
-          </p:cNvPr>
-          <p:cNvSpPr>
-            <a:spLocks xmlns:a="http://schemas.openxmlformats.org/drawingml/2006/main" noGrp="1"/>
-          </p:cNvSpPr>
-          <p:nvPr/>
-        </p:nvSpPr>
-        <p:spPr>
-          <a:xfrm xmlns:a="http://schemas.openxmlformats.org/drawingml/2006/main">
-            <a:off x="4311682" y="3365468"/>
-            <a:ext cx="3568732" cy="2628900"/>
-          </a:xfrm>
-          <a:prstGeom xmlns:a="http://schemas.openxmlformats.org/drawingml/2006/main" prst="rect">
-            <a:avLst/>
-          </a:prstGeom>
-        </p:spPr>
-        <p:txBody>
-          <a:bodyPr xmlns:a="http://schemas.openxmlformats.org/drawingml/2006/main" lIns="91440" tIns="45720" rIns="91440" bIns="45720">
-            <a:normAutofit fontScale="100000"/>
-          </a:bodyPr>
-          <a:lstStyle xmlns:a="http://schemas.openxmlformats.org/drawingml/2006/main"/>
-          <a:p xmlns:a="http://schemas.openxmlformats.org/drawingml/2006/main">
-            <a:pPr algn="l">
-              <a:defRPr sz="2400">
-                <a:solidFill>
-                  <a:srgbClr val="000000"/>
-                </a:solidFill>
-                <a:latin typeface="Helvetica Neue"/>
-                <a:ea typeface="Helvetica Neue"/>
-                <a:cs typeface="Helvetica Neue"/>
-              </a:defRPr>
-            </a:pPr>
-            <a:r>
-              <a:t>Sector-relative 126</a:t>
-            </a:r>
-          </a:p>
-          <a:p xmlns:a="http://schemas.openxmlformats.org/drawingml/2006/main">
-            <a:pPr algn="l">
-              <a:defRPr sz="2400">
-                <a:solidFill>
-                  <a:srgbClr val="000000"/>
-                </a:solidFill>
-                <a:latin typeface="Helvetica Neue"/>
-                <a:ea typeface="Helvetica Neue"/>
-                <a:cs typeface="Helvetica Neue"/>
-              </a:defRPr>
-            </a:pPr>
-            <a:r>
-              <a:t>Asset six-month log return minus the same-sector cross-sectional mean.</a:t>
+              <a:t>Only if every TRAIN gate passes may the untouched 2021–2023 period be queried.</a:t>
             </a:r>
           </a:p>
         </p:txBody>
@@ -4862,7 +5893,7 @@
     </p:spTree>
     <p:extLst>
       <p:ext uri="{BB962C8B-B14F-4D97-AF65-F5344CB8AC3E}">
-        <p14:creationId xmlns:p14="http://schemas.microsoft.com/office/powerpoint/2010/main" val="545411962"/>
+        <p14:creationId xmlns:p14="http://schemas.microsoft.com/office/powerpoint/2010/main" val="779058837"/>
       </p:ext>
     </p:extLst>
   </p:cSld>
@@ -4883,10 +5914,10 @@
       </p:grpSpPr>
       <p:sp>
         <p:nvSpPr>
-          <p:cNvPr id="6" name="Google-Shape-532-p58-2">
-            <a:extLst xmlns:a="http://schemas.openxmlformats.org/drawingml/2006/main">
-              <a:ext uri="{FF2B5EF4-FFF2-40B4-BE49-F238E27FC236}">
-                <a16:creationId xmlns:a16="http://schemas.microsoft.com/office/drawing/2014/main" id="{3F7F7627-E717-4460-A036-20D2F6EAB4E6}"/>
+          <p:cNvPr id="13" name="Slide-Number-Placeholder-3-2">
+            <a:extLst xmlns:a="http://schemas.openxmlformats.org/drawingml/2006/main">
+              <a:ext uri="{FF2B5EF4-FFF2-40B4-BE49-F238E27FC236}">
+                <a16:creationId xmlns:a16="http://schemas.microsoft.com/office/drawing/2014/main" id="{D54D3255-66D6-4A8C-98C8-699D8C150CF8}"/>
               </a:ext>
             </a:extLst>
           </p:cNvPr>
@@ -4905,102 +5936,344 @@
           </a:prstGeom>
         </p:spPr>
         <p:txBody>
-          <a:bodyPr xmlns:a="http://schemas.openxmlformats.org/drawingml/2006/main" wrap="square" lIns="0" tIns="0" rIns="0" bIns="0" anchor="b">
+          <a:bodyPr xmlns:a="http://schemas.openxmlformats.org/drawingml/2006/main" lIns="0" tIns="0" rIns="0" bIns="0" anchor="b"/>
+          <a:lstStyle xmlns:a="http://schemas.openxmlformats.org/drawingml/2006/main"/>
+          <a:p xmlns:a="http://schemas.openxmlformats.org/drawingml/2006/main">
+            <a:pPr algn="r">
+              <a:buNone/>
+              <a:defRPr sz="1000">
+                <a:solidFill>
+                  <a:srgbClr val="000000"/>
+                </a:solidFill>
+                <a:latin typeface="Helvetica Neue"/>
+                <a:ea typeface="Helvetica Neue"/>
+                <a:cs typeface="Helvetica Neue"/>
+              </a:defRPr>
+            </a:pPr>
+            <a:r>
+              <a:t>5</a:t>
+            </a:r>
+          </a:p>
+        </p:txBody>
+      </p:sp>
+      <p:sp>
+        <p:nvSpPr>
+          <p:cNvPr id="2" name="Title-10-3">
+            <a:extLst xmlns:a="http://schemas.openxmlformats.org/drawingml/2006/main">
+              <a:ext uri="{FF2B5EF4-FFF2-40B4-BE49-F238E27FC236}">
+                <a16:creationId xmlns:a16="http://schemas.microsoft.com/office/drawing/2014/main" id="{F5FA72C1-6972-494D-9400-5BAD16F3F2C2}"/>
+              </a:ext>
+            </a:extLst>
+          </p:cNvPr>
+          <p:cNvSpPr>
+            <a:spLocks xmlns:a="http://schemas.openxmlformats.org/drawingml/2006/main" noGrp="1"/>
+          </p:cNvSpPr>
+          <p:nvPr/>
+        </p:nvSpPr>
+        <p:spPr>
+          <a:xfrm xmlns:a="http://schemas.openxmlformats.org/drawingml/2006/main">
+            <a:off x="393668" y="344043"/>
+            <a:ext cx="11404568" cy="1047464"/>
+          </a:xfrm>
+          <a:prstGeom xmlns:a="http://schemas.openxmlformats.org/drawingml/2006/main" prst="rect">
+            <a:avLst/>
+          </a:prstGeom>
+        </p:spPr>
+        <p:txBody>
+          <a:bodyPr xmlns:a="http://schemas.openxmlformats.org/drawingml/2006/main" lIns="0" tIns="0" rIns="0" bIns="0" anchor="t">
+            <a:normAutofit fontScale="100000"/>
+          </a:bodyPr>
+          <a:lstStyle xmlns:a="http://schemas.openxmlformats.org/drawingml/2006/main"/>
+          <a:p xmlns:a="http://schemas.openxmlformats.org/drawingml/2006/main">
+            <a:pPr algn="l">
+              <a:buNone/>
+              <a:defRPr sz="2900">
+                <a:solidFill>
+                  <a:srgbClr val="000000"/>
+                </a:solidFill>
+                <a:latin typeface="Helvetica Neue"/>
+                <a:ea typeface="Helvetica Neue"/>
+                <a:cs typeface="Helvetica Neue"/>
+              </a:defRPr>
+            </a:pPr>
+            <a:r>
+              <a:t>The evidence boundary was frozen before any outcome was visible</a:t>
+            </a:r>
+          </a:p>
+        </p:txBody>
+      </p:sp>
+      <p:cxnSp>
+        <p:nvCxnSpPr>
+          <p:cNvPr id="21" name="Google-Shape-2259-p159-4"/>
+          <p:cNvCxnSpPr/>
+          <p:nvPr/>
+        </p:nvCxnSpPr>
+        <p:spPr>
+          <a:xfrm xmlns:a="http://schemas.openxmlformats.org/drawingml/2006/main">
+            <a:off x="337757" y="3373755"/>
+            <a:ext cx="12245435" cy="286"/>
+          </a:xfrm>
+          <a:prstGeom xmlns:a="http://schemas.openxmlformats.org/drawingml/2006/main" prst="straightConnector1">
+            <a:avLst/>
+          </a:prstGeom>
+          <a:ln xmlns:a="http://schemas.openxmlformats.org/drawingml/2006/main" w="9525">
+            <a:solidFill>
+              <a:srgbClr val="000000"/>
+            </a:solidFill>
+            <a:prstDash val="solid"/>
+          </a:ln>
+        </p:spPr>
+      </p:cxnSp>
+      <p:sp>
+        <p:nvSpPr>
+          <p:cNvPr id="4" name="Google-Shape-2260-p159-5">
+            <a:extLst xmlns:a="http://schemas.openxmlformats.org/drawingml/2006/main">
+              <a:ext uri="{FF2B5EF4-FFF2-40B4-BE49-F238E27FC236}">
+                <a16:creationId xmlns:a16="http://schemas.microsoft.com/office/drawing/2014/main" id="{F36AEC3B-C048-4552-91A7-A041A570BFEF}"/>
+              </a:ext>
+            </a:extLst>
+          </p:cNvPr>
+          <p:cNvSpPr>
+            <a:spLocks xmlns:a="http://schemas.openxmlformats.org/drawingml/2006/main" noGrp="1"/>
+          </p:cNvSpPr>
+          <p:nvPr/>
+        </p:nvSpPr>
+        <p:spPr>
+          <a:xfrm xmlns:a="http://schemas.openxmlformats.org/drawingml/2006/main">
+            <a:off x="337757" y="3320225"/>
+            <a:ext cx="107061" cy="107061"/>
+          </a:xfrm>
+          <a:prstGeom xmlns:a="http://schemas.openxmlformats.org/drawingml/2006/main" prst="ellipse">
+            <a:avLst/>
+          </a:prstGeom>
+          <a:solidFill xmlns:a="http://schemas.openxmlformats.org/drawingml/2006/main">
+            <a:srgbClr val="000000"/>
+          </a:solidFill>
+        </p:spPr>
+      </p:sp>
+      <p:sp>
+        <p:nvSpPr>
+          <p:cNvPr id="5" name="Google-Shape-2261-p159-6">
+            <a:extLst xmlns:a="http://schemas.openxmlformats.org/drawingml/2006/main">
+              <a:ext uri="{FF2B5EF4-FFF2-40B4-BE49-F238E27FC236}">
+                <a16:creationId xmlns:a16="http://schemas.microsoft.com/office/drawing/2014/main" id="{E096155C-85AC-4590-8B0B-D6D47593683E}"/>
+              </a:ext>
+            </a:extLst>
+          </p:cNvPr>
+          <p:cNvSpPr>
+            <a:spLocks xmlns:a="http://schemas.openxmlformats.org/drawingml/2006/main" noGrp="1"/>
+          </p:cNvSpPr>
+          <p:nvPr/>
+        </p:nvSpPr>
+        <p:spPr>
+          <a:xfrm xmlns:a="http://schemas.openxmlformats.org/drawingml/2006/main">
+            <a:off x="4251770" y="3320225"/>
+            <a:ext cx="107061" cy="107061"/>
+          </a:xfrm>
+          <a:prstGeom xmlns:a="http://schemas.openxmlformats.org/drawingml/2006/main" prst="ellipse">
+            <a:avLst/>
+          </a:prstGeom>
+          <a:solidFill xmlns:a="http://schemas.openxmlformats.org/drawingml/2006/main">
+            <a:srgbClr val="000000"/>
+          </a:solidFill>
+        </p:spPr>
+      </p:sp>
+      <p:sp>
+        <p:nvSpPr>
+          <p:cNvPr id="6" name="Google-Shape-2262-p159-7">
+            <a:extLst xmlns:a="http://schemas.openxmlformats.org/drawingml/2006/main">
+              <a:ext uri="{FF2B5EF4-FFF2-40B4-BE49-F238E27FC236}">
+                <a16:creationId xmlns:a16="http://schemas.microsoft.com/office/drawing/2014/main" id="{F02E53A1-4C89-4571-90AA-56F740ADF6E7}"/>
+              </a:ext>
+            </a:extLst>
+          </p:cNvPr>
+          <p:cNvSpPr>
+            <a:spLocks xmlns:a="http://schemas.openxmlformats.org/drawingml/2006/main" noGrp="1"/>
+          </p:cNvSpPr>
+          <p:nvPr/>
+        </p:nvSpPr>
+        <p:spPr>
+          <a:xfrm xmlns:a="http://schemas.openxmlformats.org/drawingml/2006/main">
+            <a:off x="8176070" y="3320225"/>
+            <a:ext cx="107061" cy="107061"/>
+          </a:xfrm>
+          <a:prstGeom xmlns:a="http://schemas.openxmlformats.org/drawingml/2006/main" prst="ellipse">
+            <a:avLst/>
+          </a:prstGeom>
+          <a:solidFill xmlns:a="http://schemas.openxmlformats.org/drawingml/2006/main">
+            <a:srgbClr val="000000"/>
+          </a:solidFill>
+        </p:spPr>
+      </p:sp>
+      <p:sp>
+        <p:nvSpPr>
+          <p:cNvPr id="7" name="Content-Placeholder-15-8">
+            <a:extLst xmlns:a="http://schemas.openxmlformats.org/drawingml/2006/main">
+              <a:ext uri="{FF2B5EF4-FFF2-40B4-BE49-F238E27FC236}">
+                <a16:creationId xmlns:a16="http://schemas.microsoft.com/office/drawing/2014/main" id="{F6E4560C-3B10-4C4F-B9BD-48BF6E493D89}"/>
+              </a:ext>
+            </a:extLst>
+          </p:cNvPr>
+          <p:cNvSpPr>
+            <a:spLocks xmlns:a="http://schemas.openxmlformats.org/drawingml/2006/main" noGrp="1"/>
+          </p:cNvSpPr>
+          <p:nvPr/>
+        </p:nvSpPr>
+        <p:spPr>
+          <a:xfrm xmlns:a="http://schemas.openxmlformats.org/drawingml/2006/main">
+            <a:off x="393668" y="2843308"/>
+            <a:ext cx="1612868" cy="262414"/>
+          </a:xfrm>
+          <a:prstGeom xmlns:a="http://schemas.openxmlformats.org/drawingml/2006/main" prst="rect">
+            <a:avLst/>
+          </a:prstGeom>
+        </p:spPr>
+        <p:txBody>
+          <a:bodyPr xmlns:a="http://schemas.openxmlformats.org/drawingml/2006/main" lIns="0" tIns="0" rIns="0" bIns="0">
             <a:noAutofit/>
           </a:bodyPr>
           <a:lstStyle xmlns:a="http://schemas.openxmlformats.org/drawingml/2006/main"/>
           <a:p xmlns:a="http://schemas.openxmlformats.org/drawingml/2006/main">
-            <a:pPr algn="r">
-              <a:defRPr sz="1000">
-                <a:solidFill>
-                  <a:srgbClr val="000000"/>
-                </a:solidFill>
-                <a:latin typeface="Helvetica Neue"/>
-                <a:ea typeface="Helvetica Neue"/>
-                <a:cs typeface="Helvetica Neue"/>
-              </a:defRPr>
-            </a:pPr>
-            <a:r>
-              <a:t>5</a:t>
-            </a:r>
-          </a:p>
-        </p:txBody>
-      </p:sp>
-      <p:sp>
-        <p:nvSpPr>
-          <p:cNvPr id="2" name="Google-Shape-533-p58-3">
-            <a:extLst xmlns:a="http://schemas.openxmlformats.org/drawingml/2006/main">
-              <a:ext uri="{FF2B5EF4-FFF2-40B4-BE49-F238E27FC236}">
-                <a16:creationId xmlns:a16="http://schemas.microsoft.com/office/drawing/2014/main" id="{799FA577-4024-4A93-80BA-AAF5C57BD67E}"/>
-              </a:ext>
-            </a:extLst>
-          </p:cNvPr>
-          <p:cNvSpPr>
-            <a:spLocks xmlns:a="http://schemas.openxmlformats.org/drawingml/2006/main" noGrp="1"/>
-          </p:cNvSpPr>
-          <p:nvPr/>
-        </p:nvSpPr>
-        <p:spPr>
-          <a:xfrm xmlns:a="http://schemas.openxmlformats.org/drawingml/2006/main">
-            <a:off x="393668" y="344043"/>
-            <a:ext cx="11404568" cy="1047464"/>
-          </a:xfrm>
-          <a:prstGeom xmlns:a="http://schemas.openxmlformats.org/drawingml/2006/main" prst="rect">
-            <a:avLst/>
-          </a:prstGeom>
-        </p:spPr>
-        <p:txBody>
-          <a:bodyPr xmlns:a="http://schemas.openxmlformats.org/drawingml/2006/main" wrap="square" lIns="0" tIns="0" rIns="0" bIns="0" anchor="t">
+            <a:pPr algn="l">
+              <a:buNone/>
+              <a:defRPr sz="1600">
+                <a:solidFill>
+                  <a:srgbClr val="000000"/>
+                </a:solidFill>
+                <a:latin typeface="Helvetica Neue"/>
+                <a:ea typeface="Helvetica Neue"/>
+                <a:cs typeface="Helvetica Neue"/>
+              </a:defRPr>
+            </a:pPr>
+            <a:r>
+              <a:t>2016</a:t>
+            </a:r>
+          </a:p>
+        </p:txBody>
+      </p:sp>
+      <p:sp>
+        <p:nvSpPr>
+          <p:cNvPr id="8" name="Content-Placeholder-15-9">
+            <a:extLst xmlns:a="http://schemas.openxmlformats.org/drawingml/2006/main">
+              <a:ext uri="{FF2B5EF4-FFF2-40B4-BE49-F238E27FC236}">
+                <a16:creationId xmlns:a16="http://schemas.microsoft.com/office/drawing/2014/main" id="{2ADC04CF-61C0-4848-BB8F-5D05357F2368}"/>
+              </a:ext>
+            </a:extLst>
+          </p:cNvPr>
+          <p:cNvSpPr>
+            <a:spLocks xmlns:a="http://schemas.openxmlformats.org/drawingml/2006/main" noGrp="1"/>
+          </p:cNvSpPr>
+          <p:nvPr/>
+        </p:nvSpPr>
+        <p:spPr>
+          <a:xfrm xmlns:a="http://schemas.openxmlformats.org/drawingml/2006/main">
+            <a:off x="4294156" y="2843308"/>
+            <a:ext cx="1612868" cy="262414"/>
+          </a:xfrm>
+          <a:prstGeom xmlns:a="http://schemas.openxmlformats.org/drawingml/2006/main" prst="rect">
+            <a:avLst/>
+          </a:prstGeom>
+        </p:spPr>
+        <p:txBody>
+          <a:bodyPr xmlns:a="http://schemas.openxmlformats.org/drawingml/2006/main" lIns="0" tIns="0" rIns="0" bIns="0">
             <a:noAutofit/>
           </a:bodyPr>
           <a:lstStyle xmlns:a="http://schemas.openxmlformats.org/drawingml/2006/main"/>
           <a:p xmlns:a="http://schemas.openxmlformats.org/drawingml/2006/main">
             <a:pPr algn="l">
-              <a:defRPr sz="2900">
-                <a:solidFill>
-                  <a:srgbClr val="000000"/>
-                </a:solidFill>
-                <a:latin typeface="Helvetica Neue"/>
-                <a:ea typeface="Helvetica Neue"/>
-                <a:cs typeface="Helvetica Neue"/>
-              </a:defRPr>
-            </a:pPr>
-            <a:r>
-              <a:t>Three features describe extension, volatility, and trend location</a:t>
-            </a:r>
-          </a:p>
-        </p:txBody>
-      </p:sp>
-      <p:sp>
-        <p:nvSpPr>
-          <p:cNvPr id="3" name="Google-Shape-534-p58-4">
-            <a:extLst xmlns:a="http://schemas.openxmlformats.org/drawingml/2006/main">
-              <a:ext uri="{FF2B5EF4-FFF2-40B4-BE49-F238E27FC236}">
-                <a16:creationId xmlns:a16="http://schemas.microsoft.com/office/drawing/2014/main" id="{318C0C28-C0A9-4C7A-8608-BB9E41246B97}"/>
-              </a:ext>
-            </a:extLst>
-          </p:cNvPr>
-          <p:cNvSpPr>
-            <a:spLocks xmlns:a="http://schemas.openxmlformats.org/drawingml/2006/main" noGrp="1"/>
-          </p:cNvSpPr>
-          <p:nvPr/>
-        </p:nvSpPr>
-        <p:spPr>
-          <a:xfrm xmlns:a="http://schemas.openxmlformats.org/drawingml/2006/main">
-            <a:off x="393668" y="3365468"/>
-            <a:ext cx="3568732" cy="2628900"/>
-          </a:xfrm>
-          <a:prstGeom xmlns:a="http://schemas.openxmlformats.org/drawingml/2006/main" prst="rect">
-            <a:avLst/>
-          </a:prstGeom>
-        </p:spPr>
-        <p:txBody>
-          <a:bodyPr xmlns:a="http://schemas.openxmlformats.org/drawingml/2006/main" wrap="square" lIns="0" tIns="0" rIns="0" bIns="0" anchor="t">
+              <a:buNone/>
+              <a:defRPr sz="1600">
+                <a:solidFill>
+                  <a:srgbClr val="000000"/>
+                </a:solidFill>
+                <a:latin typeface="Helvetica Neue"/>
+                <a:ea typeface="Helvetica Neue"/>
+                <a:cs typeface="Helvetica Neue"/>
+              </a:defRPr>
+            </a:pPr>
+            <a:r>
+              <a:t>2017–2020</a:t>
+            </a:r>
+          </a:p>
+        </p:txBody>
+      </p:sp>
+      <p:sp>
+        <p:nvSpPr>
+          <p:cNvPr id="9" name="Content-Placeholder-15-10">
+            <a:extLst xmlns:a="http://schemas.openxmlformats.org/drawingml/2006/main">
+              <a:ext uri="{FF2B5EF4-FFF2-40B4-BE49-F238E27FC236}">
+                <a16:creationId xmlns:a16="http://schemas.microsoft.com/office/drawing/2014/main" id="{F8CE2CCE-AACF-4A2B-B7C6-9FB377056D75}"/>
+              </a:ext>
+            </a:extLst>
+          </p:cNvPr>
+          <p:cNvSpPr>
+            <a:spLocks xmlns:a="http://schemas.openxmlformats.org/drawingml/2006/main" noGrp="1"/>
+          </p:cNvSpPr>
+          <p:nvPr/>
+        </p:nvSpPr>
+        <p:spPr>
+          <a:xfrm xmlns:a="http://schemas.openxmlformats.org/drawingml/2006/main">
+            <a:off x="8223218" y="2843308"/>
+            <a:ext cx="1612868" cy="262414"/>
+          </a:xfrm>
+          <a:prstGeom xmlns:a="http://schemas.openxmlformats.org/drawingml/2006/main" prst="rect">
+            <a:avLst/>
+          </a:prstGeom>
+        </p:spPr>
+        <p:txBody>
+          <a:bodyPr xmlns:a="http://schemas.openxmlformats.org/drawingml/2006/main" lIns="0" tIns="0" rIns="0" bIns="0">
             <a:noAutofit/>
           </a:bodyPr>
           <a:lstStyle xmlns:a="http://schemas.openxmlformats.org/drawingml/2006/main"/>
           <a:p xmlns:a="http://schemas.openxmlformats.org/drawingml/2006/main">
             <a:pPr algn="l">
+              <a:buNone/>
+              <a:defRPr sz="1600">
+                <a:solidFill>
+                  <a:srgbClr val="000000"/>
+                </a:solidFill>
+                <a:latin typeface="Helvetica Neue"/>
+                <a:ea typeface="Helvetica Neue"/>
+                <a:cs typeface="Helvetica Neue"/>
+              </a:defRPr>
+            </a:pPr>
+            <a:r>
+              <a:t>2021–2023</a:t>
+            </a:r>
+          </a:p>
+        </p:txBody>
+      </p:sp>
+      <p:sp>
+        <p:nvSpPr>
+          <p:cNvPr id="10" name="Text-Placeholder-16-11">
+            <a:extLst xmlns:a="http://schemas.openxmlformats.org/drawingml/2006/main">
+              <a:ext uri="{FF2B5EF4-FFF2-40B4-BE49-F238E27FC236}">
+                <a16:creationId xmlns:a16="http://schemas.microsoft.com/office/drawing/2014/main" id="{E44534A2-8A5F-47C9-ADCE-8992BBC582D2}"/>
+              </a:ext>
+            </a:extLst>
+          </p:cNvPr>
+          <p:cNvSpPr>
+            <a:spLocks xmlns:a="http://schemas.openxmlformats.org/drawingml/2006/main" noGrp="1"/>
+          </p:cNvSpPr>
+          <p:nvPr/>
+        </p:nvSpPr>
+        <p:spPr>
+          <a:xfrm xmlns:a="http://schemas.openxmlformats.org/drawingml/2006/main">
+            <a:off x="4317111" y="3822668"/>
+            <a:ext cx="3156109" cy="1586294"/>
+          </a:xfrm>
+          <a:prstGeom xmlns:a="http://schemas.openxmlformats.org/drawingml/2006/main" prst="rect">
+            <a:avLst/>
+          </a:prstGeom>
+        </p:spPr>
+        <p:txBody>
+          <a:bodyPr xmlns:a="http://schemas.openxmlformats.org/drawingml/2006/main" lIns="0" tIns="0" rIns="0" bIns="0">
+            <a:noAutofit/>
+          </a:bodyPr>
+          <a:lstStyle xmlns:a="http://schemas.openxmlformats.org/drawingml/2006/main"/>
+          <a:p xmlns:a="http://schemas.openxmlformats.org/drawingml/2006/main">
+            <a:pPr algn="l">
+              <a:buNone/>
               <a:defRPr sz="2400">
                 <a:solidFill>
                   <a:srgbClr val="000000"/>
@@ -5011,11 +6284,12 @@
               </a:defRPr>
             </a:pPr>
             <a:r>
-              <a:t>20-session extension</a:t>
-            </a:r>
-          </a:p>
-          <a:p xmlns:a="http://schemas.openxmlformats.org/drawingml/2006/main">
-            <a:pPr algn="l">
+              <a:t>TRAIN</a:t>
+            </a:r>
+          </a:p>
+          <a:p xmlns:a="http://schemas.openxmlformats.org/drawingml/2006/main">
+            <a:pPr algn="l">
+              <a:buNone/>
               <a:defRPr sz="2400">
                 <a:solidFill>
                   <a:srgbClr val="000000"/>
@@ -5026,41 +6300,42 @@
               </a:defRPr>
             </a:pPr>
             <a:r>
-              <a:t>Current log price as a z-score of its last 20 closes. Theory sign: negative.</a:t>
-            </a:r>
-          </a:p>
-        </p:txBody>
-      </p:sp>
-      <p:sp>
-        <p:nvSpPr>
-          <p:cNvPr id="4" name="Content-Placeholder-1-5">
-            <a:extLst xmlns:a="http://schemas.openxmlformats.org/drawingml/2006/main">
-              <a:ext uri="{FF2B5EF4-FFF2-40B4-BE49-F238E27FC236}">
-                <a16:creationId xmlns:a16="http://schemas.microsoft.com/office/drawing/2014/main" id="{35F3CA12-3BFA-46F2-88EB-5F669472EB7A}"/>
-              </a:ext>
-            </a:extLst>
-          </p:cNvPr>
-          <p:cNvSpPr>
-            <a:spLocks xmlns:a="http://schemas.openxmlformats.org/drawingml/2006/main" noGrp="1"/>
-          </p:cNvSpPr>
-          <p:nvPr/>
-        </p:nvSpPr>
-        <p:spPr>
-          <a:xfrm xmlns:a="http://schemas.openxmlformats.org/drawingml/2006/main">
-            <a:off x="8229600" y="3365468"/>
-            <a:ext cx="3568732" cy="2628900"/>
-          </a:xfrm>
-          <a:prstGeom xmlns:a="http://schemas.openxmlformats.org/drawingml/2006/main" prst="rect">
-            <a:avLst/>
-          </a:prstGeom>
-        </p:spPr>
-        <p:txBody>
-          <a:bodyPr xmlns:a="http://schemas.openxmlformats.org/drawingml/2006/main" lIns="91440" tIns="45720" rIns="91440" bIns="45720">
-            <a:normAutofit fontScale="100000"/>
+              <a:t>15 signal quarters. Fit, validate, gate, then freeze.</a:t>
+            </a:r>
+          </a:p>
+        </p:txBody>
+      </p:sp>
+      <p:sp>
+        <p:nvSpPr>
+          <p:cNvPr id="11" name="Text-Placeholder-16-12">
+            <a:extLst xmlns:a="http://schemas.openxmlformats.org/drawingml/2006/main">
+              <a:ext uri="{FF2B5EF4-FFF2-40B4-BE49-F238E27FC236}">
+                <a16:creationId xmlns:a16="http://schemas.microsoft.com/office/drawing/2014/main" id="{9BF4969B-D3F7-4F6C-A6C3-33A82084DBE5}"/>
+              </a:ext>
+            </a:extLst>
+          </p:cNvPr>
+          <p:cNvSpPr>
+            <a:spLocks xmlns:a="http://schemas.openxmlformats.org/drawingml/2006/main" noGrp="1"/>
+          </p:cNvSpPr>
+          <p:nvPr/>
+        </p:nvSpPr>
+        <p:spPr>
+          <a:xfrm xmlns:a="http://schemas.openxmlformats.org/drawingml/2006/main">
+            <a:off x="399859" y="3822668"/>
+            <a:ext cx="3156109" cy="1586294"/>
+          </a:xfrm>
+          <a:prstGeom xmlns:a="http://schemas.openxmlformats.org/drawingml/2006/main" prst="rect">
+            <a:avLst/>
+          </a:prstGeom>
+        </p:spPr>
+        <p:txBody>
+          <a:bodyPr xmlns:a="http://schemas.openxmlformats.org/drawingml/2006/main" lIns="0" tIns="0" rIns="0" bIns="0">
+            <a:noAutofit/>
           </a:bodyPr>
           <a:lstStyle xmlns:a="http://schemas.openxmlformats.org/drawingml/2006/main"/>
           <a:p xmlns:a="http://schemas.openxmlformats.org/drawingml/2006/main">
             <a:pPr algn="l">
+              <a:buNone/>
               <a:defRPr sz="2400">
                 <a:solidFill>
                   <a:srgbClr val="000000"/>
@@ -5071,11 +6346,12 @@
               </a:defRPr>
             </a:pPr>
             <a:r>
-              <a:t>252-session high proximity</a:t>
-            </a:r>
-          </a:p>
-          <a:p xmlns:a="http://schemas.openxmlformats.org/drawingml/2006/main">
-            <a:pPr algn="l">
+              <a:t>Warm-up</a:t>
+            </a:r>
+          </a:p>
+          <a:p xmlns:a="http://schemas.openxmlformats.org/drawingml/2006/main">
+            <a:pPr algn="l">
+              <a:buNone/>
               <a:defRPr sz="2400">
                 <a:solidFill>
                   <a:srgbClr val="000000"/>
@@ -5086,42 +6362,42 @@
               </a:defRPr>
             </a:pPr>
             <a:r>
-              <a:t>C[t] / max252(C)
-Measures whether price is near its one-year high.</a:t>
-            </a:r>
-          </a:p>
-        </p:txBody>
-      </p:sp>
-      <p:sp>
-        <p:nvSpPr>
-          <p:cNvPr id="5" name="Content-Placeholder-2-6">
-            <a:extLst xmlns:a="http://schemas.openxmlformats.org/drawingml/2006/main">
-              <a:ext uri="{FF2B5EF4-FFF2-40B4-BE49-F238E27FC236}">
-                <a16:creationId xmlns:a16="http://schemas.microsoft.com/office/drawing/2014/main" id="{FAE9B73B-7AAA-4B64-8287-08E8E768B9C7}"/>
-              </a:ext>
-            </a:extLst>
-          </p:cNvPr>
-          <p:cNvSpPr>
-            <a:spLocks xmlns:a="http://schemas.openxmlformats.org/drawingml/2006/main" noGrp="1"/>
-          </p:cNvSpPr>
-          <p:nvPr/>
-        </p:nvSpPr>
-        <p:spPr>
-          <a:xfrm xmlns:a="http://schemas.openxmlformats.org/drawingml/2006/main">
-            <a:off x="4311682" y="3365468"/>
-            <a:ext cx="3568732" cy="2628900"/>
-          </a:xfrm>
-          <a:prstGeom xmlns:a="http://schemas.openxmlformats.org/drawingml/2006/main" prst="rect">
-            <a:avLst/>
-          </a:prstGeom>
-        </p:spPr>
-        <p:txBody>
-          <a:bodyPr xmlns:a="http://schemas.openxmlformats.org/drawingml/2006/main" lIns="91440" tIns="45720" rIns="91440" bIns="45720">
-            <a:normAutofit fontScale="100000"/>
+              <a:t>Indicators only. No target or selection authority.</a:t>
+            </a:r>
+          </a:p>
+        </p:txBody>
+      </p:sp>
+      <p:sp>
+        <p:nvSpPr>
+          <p:cNvPr id="12" name="Text-Placeholder-16-13">
+            <a:extLst xmlns:a="http://schemas.openxmlformats.org/drawingml/2006/main">
+              <a:ext uri="{FF2B5EF4-FFF2-40B4-BE49-F238E27FC236}">
+                <a16:creationId xmlns:a16="http://schemas.microsoft.com/office/drawing/2014/main" id="{F60300E2-3A3C-414E-8BD2-9F38F9B8042C}"/>
+              </a:ext>
+            </a:extLst>
+          </p:cNvPr>
+          <p:cNvSpPr>
+            <a:spLocks xmlns:a="http://schemas.openxmlformats.org/drawingml/2006/main" noGrp="1"/>
+          </p:cNvSpPr>
+          <p:nvPr/>
+        </p:nvSpPr>
+        <p:spPr>
+          <a:xfrm xmlns:a="http://schemas.openxmlformats.org/drawingml/2006/main">
+            <a:off x="8177879" y="3822668"/>
+            <a:ext cx="3156109" cy="1586294"/>
+          </a:xfrm>
+          <a:prstGeom xmlns:a="http://schemas.openxmlformats.org/drawingml/2006/main" prst="rect">
+            <a:avLst/>
+          </a:prstGeom>
+        </p:spPr>
+        <p:txBody>
+          <a:bodyPr xmlns:a="http://schemas.openxmlformats.org/drawingml/2006/main" lIns="0" tIns="0" rIns="0" bIns="0">
+            <a:noAutofit/>
           </a:bodyPr>
           <a:lstStyle xmlns:a="http://schemas.openxmlformats.org/drawingml/2006/main"/>
           <a:p xmlns:a="http://schemas.openxmlformats.org/drawingml/2006/main">
             <a:pPr algn="l">
+              <a:buNone/>
               <a:defRPr sz="2400">
                 <a:solidFill>
                   <a:srgbClr val="000000"/>
@@ -5132,11 +6408,12 @@
               </a:defRPr>
             </a:pPr>
             <a:r>
-              <a:t>Volatility ratio</a:t>
-            </a:r>
-          </a:p>
-          <a:p xmlns:a="http://schemas.openxmlformats.org/drawingml/2006/main">
-            <a:pPr algn="l">
+              <a:t>OOS lock</a:t>
+            </a:r>
+          </a:p>
+          <a:p xmlns:a="http://schemas.openxmlformats.org/drawingml/2006/main">
+            <a:pPr algn="l">
+              <a:buNone/>
               <a:defRPr sz="2400">
                 <a:solidFill>
                   <a:srgbClr val="000000"/>
@@ -5147,8 +6424,7 @@
               </a:defRPr>
             </a:pPr>
             <a:r>
-              <a:t>RV20 / RV126
-Asks whether short-run volatility has expanded relative to the slower state.</a:t>
+              <a:t>Accessible only if every TRAIN gate passes.</a:t>
             </a:r>
           </a:p>
         </p:txBody>
@@ -5156,7 +6432,7 @@
     </p:spTree>
     <p:extLst>
       <p:ext uri="{BB962C8B-B14F-4D97-AF65-F5344CB8AC3E}">
-        <p14:creationId xmlns:p14="http://schemas.microsoft.com/office/powerpoint/2010/main" val="476807716"/>
+        <p14:creationId xmlns:p14="http://schemas.microsoft.com/office/powerpoint/2010/main" val="779058837"/>
       </p:ext>
     </p:extLst>
   </p:cSld>
@@ -5177,10 +6453,10 @@
       </p:grpSpPr>
       <p:sp>
         <p:nvSpPr>
-          <p:cNvPr id="5" name="Google-Shape-532-p58-2">
-            <a:extLst xmlns:a="http://schemas.openxmlformats.org/drawingml/2006/main">
-              <a:ext uri="{FF2B5EF4-FFF2-40B4-BE49-F238E27FC236}">
-                <a16:creationId xmlns:a16="http://schemas.microsoft.com/office/drawing/2014/main" id="{39D7E226-8653-4211-B710-C120D8235D3E}"/>
+          <p:cNvPr id="6" name="Google-Shape-532-p58-2">
+            <a:extLst xmlns:a="http://schemas.openxmlformats.org/drawingml/2006/main">
+              <a:ext uri="{FF2B5EF4-FFF2-40B4-BE49-F238E27FC236}">
+                <a16:creationId xmlns:a16="http://schemas.microsoft.com/office/drawing/2014/main" id="{7F04A8CB-F2A8-4B45-BDB8-034023C7D5AB}"/>
               </a:ext>
             </a:extLst>
           </p:cNvPr>
@@ -5205,6 +6481,7 @@
           <a:lstStyle xmlns:a="http://schemas.openxmlformats.org/drawingml/2006/main"/>
           <a:p xmlns:a="http://schemas.openxmlformats.org/drawingml/2006/main">
             <a:pPr algn="r">
+              <a:buNone/>
               <a:defRPr sz="1000">
                 <a:solidFill>
                   <a:srgbClr val="000000"/>
@@ -5225,19 +6502,19 @@
           <p:cNvPr id="2" name="Google-Shape-533-p58-3">
             <a:extLst xmlns:a="http://schemas.openxmlformats.org/drawingml/2006/main">
               <a:ext uri="{FF2B5EF4-FFF2-40B4-BE49-F238E27FC236}">
-                <a16:creationId xmlns:a16="http://schemas.microsoft.com/office/drawing/2014/main" id="{10E51D1C-18DB-4515-9914-87773A022615}"/>
-              </a:ext>
-            </a:extLst>
-          </p:cNvPr>
-          <p:cNvSpPr>
-            <a:spLocks xmlns:a="http://schemas.openxmlformats.org/drawingml/2006/main" noGrp="1"/>
-          </p:cNvSpPr>
-          <p:nvPr/>
-        </p:nvSpPr>
-        <p:spPr>
-          <a:xfrm xmlns:a="http://schemas.openxmlformats.org/drawingml/2006/main">
-            <a:off x="393668" y="344043"/>
-            <a:ext cx="11404568" cy="1047464"/>
+                <a16:creationId xmlns:a16="http://schemas.microsoft.com/office/drawing/2014/main" id="{A5B2509C-704C-4AA9-9EAB-0C2399D5E2E3}"/>
+              </a:ext>
+            </a:extLst>
+          </p:cNvPr>
+          <p:cNvSpPr>
+            <a:spLocks xmlns:a="http://schemas.openxmlformats.org/drawingml/2006/main" noGrp="1"/>
+          </p:cNvSpPr>
+          <p:nvPr/>
+        </p:nvSpPr>
+        <p:spPr>
+          <a:xfrm xmlns:a="http://schemas.openxmlformats.org/drawingml/2006/main">
+            <a:off x="523875" y="344043"/>
+            <a:ext cx="11277600" cy="1047464"/>
           </a:xfrm>
           <a:prstGeom xmlns:a="http://schemas.openxmlformats.org/drawingml/2006/main" prst="rect">
             <a:avLst/>
@@ -5250,6 +6527,7 @@
           <a:lstStyle xmlns:a="http://schemas.openxmlformats.org/drawingml/2006/main"/>
           <a:p xmlns:a="http://schemas.openxmlformats.org/drawingml/2006/main">
             <a:pPr algn="l">
+              <a:buNone/>
               <a:defRPr sz="2900">
                 <a:solidFill>
                   <a:srgbClr val="000000"/>
@@ -5260,7 +6538,7 @@
               </a:defRPr>
             </a:pPr>
             <a:r>
-              <a:t>Relative return is the target</a:t>
+              <a:t>Three features capture persistent trend</a:t>
             </a:r>
           </a:p>
         </p:txBody>
@@ -5270,19 +6548,19 @@
           <p:cNvPr id="3" name="Google-Shape-534-p58-4">
             <a:extLst xmlns:a="http://schemas.openxmlformats.org/drawingml/2006/main">
               <a:ext uri="{FF2B5EF4-FFF2-40B4-BE49-F238E27FC236}">
-                <a16:creationId xmlns:a16="http://schemas.microsoft.com/office/drawing/2014/main" id="{6AF50458-FB0C-4B5E-B372-0AA6DD93D95A}"/>
-              </a:ext>
-            </a:extLst>
-          </p:cNvPr>
-          <p:cNvSpPr>
-            <a:spLocks xmlns:a="http://schemas.openxmlformats.org/drawingml/2006/main" noGrp="1"/>
-          </p:cNvSpPr>
-          <p:nvPr/>
-        </p:nvSpPr>
-        <p:spPr>
-          <a:xfrm xmlns:a="http://schemas.openxmlformats.org/drawingml/2006/main">
-            <a:off x="393668" y="2031968"/>
-            <a:ext cx="5537168" cy="3534823"/>
+                <a16:creationId xmlns:a16="http://schemas.microsoft.com/office/drawing/2014/main" id="{BD53BBDF-7F30-43A1-B92A-F0849D33B88D}"/>
+              </a:ext>
+            </a:extLst>
+          </p:cNvPr>
+          <p:cNvSpPr>
+            <a:spLocks xmlns:a="http://schemas.openxmlformats.org/drawingml/2006/main" noGrp="1"/>
+          </p:cNvSpPr>
+          <p:nvPr/>
+        </p:nvSpPr>
+        <p:spPr>
+          <a:xfrm xmlns:a="http://schemas.openxmlformats.org/drawingml/2006/main">
+            <a:off x="393668" y="3365468"/>
+            <a:ext cx="3568732" cy="2628900"/>
           </a:xfrm>
           <a:prstGeom xmlns:a="http://schemas.openxmlformats.org/drawingml/2006/main" prst="rect">
             <a:avLst/>
@@ -5295,6 +6573,7 @@
           <a:lstStyle xmlns:a="http://schemas.openxmlformats.org/drawingml/2006/main"/>
           <a:p xmlns:a="http://schemas.openxmlformats.org/drawingml/2006/main">
             <a:pPr algn="l">
+              <a:buNone/>
               <a:defRPr sz="2400">
                 <a:solidFill>
                   <a:srgbClr val="000000"/>
@@ -5305,11 +6584,12 @@
               </a:defRPr>
             </a:pPr>
             <a:r>
-              <a:t>Target</a:t>
-            </a:r>
-          </a:p>
-          <a:p xmlns:a="http://schemas.openxmlformats.org/drawingml/2006/main">
-            <a:pPr algn="l">
+              <a:t>12–1 momentum</a:t>
+            </a:r>
+          </a:p>
+          <a:p xmlns:a="http://schemas.openxmlformats.org/drawingml/2006/main">
+            <a:pPr algn="l">
+              <a:buNone/>
               <a:defRPr sz="2400">
                 <a:solidFill>
                   <a:srgbClr val="000000"/>
@@ -5320,44 +6600,106 @@
               </a:defRPr>
             </a:pPr>
             <a:r>
-              <a:t>Next-quarter first-open to last-open return
-minus
-equal-weight eligible-universe return.
-A positive target means the stock beat its contemporaneous cross-section.</a:t>
-            </a:r>
-          </a:p>
-        </p:txBody>
-      </p:sp>
-      <p:sp>
-        <p:nvSpPr>
-          <p:cNvPr id="4" name="Content-Placeholder-3-5">
-            <a:extLst xmlns:a="http://schemas.openxmlformats.org/drawingml/2006/main">
-              <a:ext uri="{FF2B5EF4-FFF2-40B4-BE49-F238E27FC236}">
-                <a16:creationId xmlns:a16="http://schemas.microsoft.com/office/drawing/2014/main" id="{75EC59B8-FA48-4458-B661-E61F404C7832}"/>
-              </a:ext>
-            </a:extLst>
-          </p:cNvPr>
-          <p:cNvSpPr>
-            <a:spLocks xmlns:a="http://schemas.openxmlformats.org/drawingml/2006/main" noGrp="1"/>
-          </p:cNvSpPr>
-          <p:nvPr/>
-        </p:nvSpPr>
-        <p:spPr>
-          <a:xfrm xmlns:a="http://schemas.openxmlformats.org/drawingml/2006/main">
-            <a:off x="6256592" y="2031968"/>
-            <a:ext cx="5537168" cy="3534823"/>
-          </a:xfrm>
-          <a:prstGeom xmlns:a="http://schemas.openxmlformats.org/drawingml/2006/main" prst="rect">
-            <a:avLst/>
-          </a:prstGeom>
-        </p:spPr>
-        <p:txBody>
-          <a:bodyPr xmlns:a="http://schemas.openxmlformats.org/drawingml/2006/main" lIns="0" tIns="0" rIns="0" bIns="0">
+              <a:t>log(C[t−21] / C[t−252])
+Skips the most recent month to reduce short-run reversal contamination.</a:t>
+            </a:r>
+          </a:p>
+        </p:txBody>
+      </p:sp>
+      <p:sp>
+        <p:nvSpPr>
+          <p:cNvPr id="4" name="Content-Placeholder-1-5">
+            <a:extLst xmlns:a="http://schemas.openxmlformats.org/drawingml/2006/main">
+              <a:ext uri="{FF2B5EF4-FFF2-40B4-BE49-F238E27FC236}">
+                <a16:creationId xmlns:a16="http://schemas.microsoft.com/office/drawing/2014/main" id="{867C7B59-B2E4-4E03-8531-713D5ED57E4A}"/>
+              </a:ext>
+            </a:extLst>
+          </p:cNvPr>
+          <p:cNvSpPr>
+            <a:spLocks xmlns:a="http://schemas.openxmlformats.org/drawingml/2006/main" noGrp="1"/>
+          </p:cNvSpPr>
+          <p:nvPr/>
+        </p:nvSpPr>
+        <p:spPr>
+          <a:xfrm xmlns:a="http://schemas.openxmlformats.org/drawingml/2006/main">
+            <a:off x="8229600" y="3365468"/>
+            <a:ext cx="3568732" cy="2628900"/>
+          </a:xfrm>
+          <a:prstGeom xmlns:a="http://schemas.openxmlformats.org/drawingml/2006/main" prst="rect">
+            <a:avLst/>
+          </a:prstGeom>
+        </p:spPr>
+        <p:txBody>
+          <a:bodyPr xmlns:a="http://schemas.openxmlformats.org/drawingml/2006/main" lIns="91440" tIns="45720" rIns="91440" bIns="45720">
+            <a:normAutofit fontScale="99458"/>
+          </a:bodyPr>
+          <a:lstStyle xmlns:a="http://schemas.openxmlformats.org/drawingml/2006/main"/>
+          <a:p xmlns:a="http://schemas.openxmlformats.org/drawingml/2006/main">
+            <a:pPr algn="l">
+              <a:buNone/>
+              <a:defRPr sz="2400">
+                <a:solidFill>
+                  <a:srgbClr val="000000"/>
+                </a:solidFill>
+                <a:latin typeface="Helvetica Neue"/>
+                <a:ea typeface="Helvetica Neue"/>
+                <a:cs typeface="Helvetica Neue"/>
+              </a:defRPr>
+            </a:pPr>
+            <a:r>
+              <a:t>Slow slope / ATR</a:t>
+            </a:r>
+          </a:p>
+          <a:p xmlns:a="http://schemas.openxmlformats.org/drawingml/2006/main">
+            <a:pPr algn="l">
+              <a:buNone/>
+              <a:defRPr sz="2400">
+                <a:solidFill>
+                  <a:srgbClr val="000000"/>
+                </a:solidFill>
+                <a:latin typeface="Helvetica Neue"/>
+                <a:ea typeface="Helvetica Neue"/>
+                <a:cs typeface="Helvetica Neue"/>
+              </a:defRPr>
+            </a:pPr>
+            <a:r>
+              <a:t>(SMA200[t] − SMA200[t−20]) / ATR20[t]
+Trend direction scaled to the asset's own movement.</a:t>
+            </a:r>
+          </a:p>
+        </p:txBody>
+      </p:sp>
+      <p:sp>
+        <p:nvSpPr>
+          <p:cNvPr id="5" name="Content-Placeholder-2-6">
+            <a:extLst xmlns:a="http://schemas.openxmlformats.org/drawingml/2006/main">
+              <a:ext uri="{FF2B5EF4-FFF2-40B4-BE49-F238E27FC236}">
+                <a16:creationId xmlns:a16="http://schemas.microsoft.com/office/drawing/2014/main" id="{F2BCC425-CD46-46F2-8C46-5A605BDC57D6}"/>
+              </a:ext>
+            </a:extLst>
+          </p:cNvPr>
+          <p:cNvSpPr>
+            <a:spLocks xmlns:a="http://schemas.openxmlformats.org/drawingml/2006/main" noGrp="1"/>
+          </p:cNvSpPr>
+          <p:nvPr/>
+        </p:nvSpPr>
+        <p:spPr>
+          <a:xfrm xmlns:a="http://schemas.openxmlformats.org/drawingml/2006/main">
+            <a:off x="4311682" y="3365468"/>
+            <a:ext cx="3568732" cy="2628900"/>
+          </a:xfrm>
+          <a:prstGeom xmlns:a="http://schemas.openxmlformats.org/drawingml/2006/main" prst="rect">
+            <a:avLst/>
+          </a:prstGeom>
+        </p:spPr>
+        <p:txBody>
+          <a:bodyPr xmlns:a="http://schemas.openxmlformats.org/drawingml/2006/main" lIns="91440" tIns="45720" rIns="91440" bIns="45720">
             <a:normAutofit fontScale="100000"/>
           </a:bodyPr>
           <a:lstStyle xmlns:a="http://schemas.openxmlformats.org/drawingml/2006/main"/>
           <a:p xmlns:a="http://schemas.openxmlformats.org/drawingml/2006/main">
             <a:pPr algn="l">
+              <a:buNone/>
               <a:defRPr sz="2400">
                 <a:solidFill>
                   <a:srgbClr val="000000"/>
@@ -5368,11 +6710,12 @@
               </a:defRPr>
             </a:pPr>
             <a:r>
-              <a:t>Preprocessing</a:t>
-            </a:r>
-          </a:p>
-          <a:p xmlns:a="http://schemas.openxmlformats.org/drawingml/2006/main">
-            <a:pPr algn="l">
+              <a:t>Sector-relative 126</a:t>
+            </a:r>
+          </a:p>
+          <a:p xmlns:a="http://schemas.openxmlformats.org/drawingml/2006/main">
+            <a:pPr algn="l">
+              <a:buNone/>
               <a:defRPr sz="2400">
                 <a:solidFill>
                   <a:srgbClr val="000000"/>
@@ -5383,9 +6726,7 @@
               </a:defRPr>
             </a:pPr>
             <a:r>
-              <a:t>Within each signal quarter:
-z = Φ⁻¹((rank − 0.5) / n)
-TRAIN pooled center and scale are then frozen for later scoring.</a:t>
+              <a:t>Asset six-month log return minus the same-sector cross-sectional mean.</a:t>
             </a:r>
           </a:p>
         </p:txBody>
@@ -5393,7 +6734,7 @@
     </p:spTree>
     <p:extLst>
       <p:ext uri="{BB962C8B-B14F-4D97-AF65-F5344CB8AC3E}">
-        <p14:creationId xmlns:p14="http://schemas.microsoft.com/office/powerpoint/2010/main" val="920191251"/>
+        <p14:creationId xmlns:p14="http://schemas.microsoft.com/office/powerpoint/2010/main" val="545411962"/>
       </p:ext>
     </p:extLst>
   </p:cSld>
@@ -5414,10 +6755,10 @@
       </p:grpSpPr>
       <p:sp>
         <p:nvSpPr>
-          <p:cNvPr id="11" name="Slide-Number-Placeholder-3-2">
-            <a:extLst xmlns:a="http://schemas.openxmlformats.org/drawingml/2006/main">
-              <a:ext uri="{FF2B5EF4-FFF2-40B4-BE49-F238E27FC236}">
-                <a16:creationId xmlns:a16="http://schemas.microsoft.com/office/drawing/2014/main" id="{2137B4BF-95D1-47E0-AC6C-626979E42B1F}"/>
+          <p:cNvPr id="6" name="Google-Shape-532-p58-2">
+            <a:extLst xmlns:a="http://schemas.openxmlformats.org/drawingml/2006/main">
+              <a:ext uri="{FF2B5EF4-FFF2-40B4-BE49-F238E27FC236}">
+                <a16:creationId xmlns:a16="http://schemas.microsoft.com/office/drawing/2014/main" id="{3F7F7627-E717-4460-A036-20D2F6EAB4E6}"/>
               </a:ext>
             </a:extLst>
           </p:cNvPr>
@@ -5436,10 +6777,13 @@
           </a:prstGeom>
         </p:spPr>
         <p:txBody>
-          <a:bodyPr xmlns:a="http://schemas.openxmlformats.org/drawingml/2006/main" lIns="0" tIns="0" rIns="0" bIns="0" anchor="b"/>
+          <a:bodyPr xmlns:a="http://schemas.openxmlformats.org/drawingml/2006/main" wrap="square" lIns="0" tIns="0" rIns="0" bIns="0" anchor="b">
+            <a:noAutofit/>
+          </a:bodyPr>
           <a:lstStyle xmlns:a="http://schemas.openxmlformats.org/drawingml/2006/main"/>
           <a:p xmlns:a="http://schemas.openxmlformats.org/drawingml/2006/main">
             <a:pPr algn="r">
+              <a:buNone/>
               <a:defRPr sz="1000">
                 <a:solidFill>
                   <a:srgbClr val="000000"/>
@@ -5457,10 +6801,10 @@
       </p:sp>
       <p:sp>
         <p:nvSpPr>
-          <p:cNvPr id="2" name="Title-10-3">
-            <a:extLst xmlns:a="http://schemas.openxmlformats.org/drawingml/2006/main">
-              <a:ext uri="{FF2B5EF4-FFF2-40B4-BE49-F238E27FC236}">
-                <a16:creationId xmlns:a16="http://schemas.microsoft.com/office/drawing/2014/main" id="{2E376405-9293-43D3-BA29-562431025D7C}"/>
+          <p:cNvPr id="2" name="Google-Shape-533-p58-3">
+            <a:extLst xmlns:a="http://schemas.openxmlformats.org/drawingml/2006/main">
+              <a:ext uri="{FF2B5EF4-FFF2-40B4-BE49-F238E27FC236}">
+                <a16:creationId xmlns:a16="http://schemas.microsoft.com/office/drawing/2014/main" id="{799FA577-4024-4A93-80BA-AAF5C57BD67E}"/>
               </a:ext>
             </a:extLst>
           </p:cNvPr>
@@ -5479,503 +6823,212 @@
           </a:prstGeom>
         </p:spPr>
         <p:txBody>
-          <a:bodyPr xmlns:a="http://schemas.openxmlformats.org/drawingml/2006/main" lIns="0" tIns="0" rIns="0" bIns="0" anchor="t">
+          <a:bodyPr xmlns:a="http://schemas.openxmlformats.org/drawingml/2006/main" wrap="square" lIns="0" tIns="0" rIns="0" bIns="0" anchor="t">
+            <a:noAutofit/>
+          </a:bodyPr>
+          <a:lstStyle xmlns:a="http://schemas.openxmlformats.org/drawingml/2006/main"/>
+          <a:p xmlns:a="http://schemas.openxmlformats.org/drawingml/2006/main">
+            <a:pPr algn="l">
+              <a:buNone/>
+              <a:defRPr sz="2900">
+                <a:solidFill>
+                  <a:srgbClr val="000000"/>
+                </a:solidFill>
+                <a:latin typeface="Helvetica Neue"/>
+                <a:ea typeface="Helvetica Neue"/>
+                <a:cs typeface="Helvetica Neue"/>
+              </a:defRPr>
+            </a:pPr>
+            <a:r>
+              <a:t>Three features describe extension, volatility, and trend location</a:t>
+            </a:r>
+          </a:p>
+        </p:txBody>
+      </p:sp>
+      <p:sp>
+        <p:nvSpPr>
+          <p:cNvPr id="3" name="Google-Shape-534-p58-4">
+            <a:extLst xmlns:a="http://schemas.openxmlformats.org/drawingml/2006/main">
+              <a:ext uri="{FF2B5EF4-FFF2-40B4-BE49-F238E27FC236}">
+                <a16:creationId xmlns:a16="http://schemas.microsoft.com/office/drawing/2014/main" id="{318C0C28-C0A9-4C7A-8608-BB9E41246B97}"/>
+              </a:ext>
+            </a:extLst>
+          </p:cNvPr>
+          <p:cNvSpPr>
+            <a:spLocks xmlns:a="http://schemas.openxmlformats.org/drawingml/2006/main" noGrp="1"/>
+          </p:cNvSpPr>
+          <p:nvPr/>
+        </p:nvSpPr>
+        <p:spPr>
+          <a:xfrm xmlns:a="http://schemas.openxmlformats.org/drawingml/2006/main">
+            <a:off x="393668" y="3365468"/>
+            <a:ext cx="3568732" cy="2628900"/>
+          </a:xfrm>
+          <a:prstGeom xmlns:a="http://schemas.openxmlformats.org/drawingml/2006/main" prst="rect">
+            <a:avLst/>
+          </a:prstGeom>
+        </p:spPr>
+        <p:txBody>
+          <a:bodyPr xmlns:a="http://schemas.openxmlformats.org/drawingml/2006/main" wrap="square" lIns="0" tIns="0" rIns="0" bIns="0" anchor="t">
+            <a:noAutofit/>
+          </a:bodyPr>
+          <a:lstStyle xmlns:a="http://schemas.openxmlformats.org/drawingml/2006/main"/>
+          <a:p xmlns:a="http://schemas.openxmlformats.org/drawingml/2006/main">
+            <a:pPr algn="l">
+              <a:buNone/>
+              <a:defRPr sz="2400">
+                <a:solidFill>
+                  <a:srgbClr val="000000"/>
+                </a:solidFill>
+                <a:latin typeface="Helvetica Neue"/>
+                <a:ea typeface="Helvetica Neue"/>
+                <a:cs typeface="Helvetica Neue"/>
+              </a:defRPr>
+            </a:pPr>
+            <a:r>
+              <a:t>20-session extension</a:t>
+            </a:r>
+          </a:p>
+          <a:p xmlns:a="http://schemas.openxmlformats.org/drawingml/2006/main">
+            <a:pPr algn="l">
+              <a:buNone/>
+              <a:defRPr sz="2400">
+                <a:solidFill>
+                  <a:srgbClr val="000000"/>
+                </a:solidFill>
+                <a:latin typeface="Helvetica Neue"/>
+                <a:ea typeface="Helvetica Neue"/>
+                <a:cs typeface="Helvetica Neue"/>
+              </a:defRPr>
+            </a:pPr>
+            <a:r>
+              <a:t>Current log price as a z-score of its last 20 closes. Theory sign: negative.</a:t>
+            </a:r>
+          </a:p>
+        </p:txBody>
+      </p:sp>
+      <p:sp>
+        <p:nvSpPr>
+          <p:cNvPr id="4" name="Content-Placeholder-1-5">
+            <a:extLst xmlns:a="http://schemas.openxmlformats.org/drawingml/2006/main">
+              <a:ext uri="{FF2B5EF4-FFF2-40B4-BE49-F238E27FC236}">
+                <a16:creationId xmlns:a16="http://schemas.microsoft.com/office/drawing/2014/main" id="{35F3CA12-3BFA-46F2-88EB-5F669472EB7A}"/>
+              </a:ext>
+            </a:extLst>
+          </p:cNvPr>
+          <p:cNvSpPr>
+            <a:spLocks xmlns:a="http://schemas.openxmlformats.org/drawingml/2006/main" noGrp="1"/>
+          </p:cNvSpPr>
+          <p:nvPr/>
+        </p:nvSpPr>
+        <p:spPr>
+          <a:xfrm xmlns:a="http://schemas.openxmlformats.org/drawingml/2006/main">
+            <a:off x="8229600" y="3365468"/>
+            <a:ext cx="3568732" cy="2628900"/>
+          </a:xfrm>
+          <a:prstGeom xmlns:a="http://schemas.openxmlformats.org/drawingml/2006/main" prst="rect">
+            <a:avLst/>
+          </a:prstGeom>
+        </p:spPr>
+        <p:txBody>
+          <a:bodyPr xmlns:a="http://schemas.openxmlformats.org/drawingml/2006/main" lIns="91440" tIns="45720" rIns="91440" bIns="45720">
             <a:normAutofit fontScale="100000"/>
           </a:bodyPr>
           <a:lstStyle xmlns:a="http://schemas.openxmlformats.org/drawingml/2006/main"/>
           <a:p xmlns:a="http://schemas.openxmlformats.org/drawingml/2006/main">
             <a:pPr algn="l">
-              <a:defRPr sz="2900">
-                <a:solidFill>
-                  <a:srgbClr val="000000"/>
-                </a:solidFill>
-                <a:latin typeface="Helvetica Neue"/>
-                <a:ea typeface="Helvetica Neue"/>
-                <a:cs typeface="Helvetica Neue"/>
-              </a:defRPr>
-            </a:pPr>
-            <a:r>
-              <a:t>Seven gates stand between an attractive TRAIN fit and OOS access</a:t>
-            </a:r>
-          </a:p>
-        </p:txBody>
-      </p:sp>
-      <p:sp>
-        <p:nvSpPr>
-          <p:cNvPr id="3" name="Content-Placeholder-15-4">
-            <a:extLst xmlns:a="http://schemas.openxmlformats.org/drawingml/2006/main">
-              <a:ext uri="{FF2B5EF4-FFF2-40B4-BE49-F238E27FC236}">
-                <a16:creationId xmlns:a16="http://schemas.microsoft.com/office/drawing/2014/main" id="{FE4BD331-A16E-40D8-99AB-A29B8E1B32AD}"/>
-              </a:ext>
-            </a:extLst>
-          </p:cNvPr>
-          <p:cNvSpPr>
-            <a:spLocks xmlns:a="http://schemas.openxmlformats.org/drawingml/2006/main" noGrp="1"/>
-          </p:cNvSpPr>
-          <p:nvPr/>
-        </p:nvSpPr>
-        <p:spPr>
-          <a:xfrm xmlns:a="http://schemas.openxmlformats.org/drawingml/2006/main">
-            <a:off x="393668" y="4161092"/>
-            <a:ext cx="2595944" cy="1415606"/>
-          </a:xfrm>
-          <a:prstGeom xmlns:a="http://schemas.openxmlformats.org/drawingml/2006/main" prst="rect">
-            <a:avLst/>
-          </a:prstGeom>
-        </p:spPr>
-        <p:txBody>
-          <a:bodyPr xmlns:a="http://schemas.openxmlformats.org/drawingml/2006/main" lIns="0" tIns="0" rIns="0" bIns="0">
-            <a:noAutofit/>
+              <a:buNone/>
+              <a:defRPr sz="2400">
+                <a:solidFill>
+                  <a:srgbClr val="000000"/>
+                </a:solidFill>
+                <a:latin typeface="Helvetica Neue"/>
+                <a:ea typeface="Helvetica Neue"/>
+                <a:cs typeface="Helvetica Neue"/>
+              </a:defRPr>
+            </a:pPr>
+            <a:r>
+              <a:t>252-session high proximity</a:t>
+            </a:r>
+          </a:p>
+          <a:p xmlns:a="http://schemas.openxmlformats.org/drawingml/2006/main">
+            <a:pPr algn="l">
+              <a:buNone/>
+              <a:defRPr sz="2400">
+                <a:solidFill>
+                  <a:srgbClr val="000000"/>
+                </a:solidFill>
+                <a:latin typeface="Helvetica Neue"/>
+                <a:ea typeface="Helvetica Neue"/>
+                <a:cs typeface="Helvetica Neue"/>
+              </a:defRPr>
+            </a:pPr>
+            <a:r>
+              <a:t>C[t] / max252(C)
+Measures whether price is near its one-year high.</a:t>
+            </a:r>
+          </a:p>
+        </p:txBody>
+      </p:sp>
+      <p:sp>
+        <p:nvSpPr>
+          <p:cNvPr id="5" name="Content-Placeholder-2-6">
+            <a:extLst xmlns:a="http://schemas.openxmlformats.org/drawingml/2006/main">
+              <a:ext uri="{FF2B5EF4-FFF2-40B4-BE49-F238E27FC236}">
+                <a16:creationId xmlns:a16="http://schemas.microsoft.com/office/drawing/2014/main" id="{FAE9B73B-7AAA-4B64-8287-08E8E768B9C7}"/>
+              </a:ext>
+            </a:extLst>
+          </p:cNvPr>
+          <p:cNvSpPr>
+            <a:spLocks xmlns:a="http://schemas.openxmlformats.org/drawingml/2006/main" noGrp="1"/>
+          </p:cNvSpPr>
+          <p:nvPr/>
+        </p:nvSpPr>
+        <p:spPr>
+          <a:xfrm xmlns:a="http://schemas.openxmlformats.org/drawingml/2006/main">
+            <a:off x="4311682" y="3365468"/>
+            <a:ext cx="3568732" cy="2628900"/>
+          </a:xfrm>
+          <a:prstGeom xmlns:a="http://schemas.openxmlformats.org/drawingml/2006/main" prst="rect">
+            <a:avLst/>
+          </a:prstGeom>
+        </p:spPr>
+        <p:txBody>
+          <a:bodyPr xmlns:a="http://schemas.openxmlformats.org/drawingml/2006/main" lIns="91440" tIns="45720" rIns="91440" bIns="45720">
+            <a:normAutofit fontScale="100000"/>
           </a:bodyPr>
           <a:lstStyle xmlns:a="http://schemas.openxmlformats.org/drawingml/2006/main"/>
           <a:p xmlns:a="http://schemas.openxmlformats.org/drawingml/2006/main">
             <a:pPr algn="l">
-              <a:defRPr sz="1600">
-                <a:solidFill>
-                  <a:srgbClr val="000000"/>
-                </a:solidFill>
-                <a:latin typeface="Helvetica Neue"/>
-                <a:ea typeface="Helvetica Neue"/>
-                <a:cs typeface="Helvetica Neue"/>
-              </a:defRPr>
-            </a:pPr>
-            <a:r>
-              <a:t>G5 · Ordering</a:t>
-            </a:r>
-          </a:p>
-          <a:p xmlns:a="http://schemas.openxmlformats.org/drawingml/2006/main">
-            <a:pPr algn="l">
-              <a:defRPr sz="1600">
-                <a:solidFill>
-                  <a:srgbClr val="000000"/>
-                </a:solidFill>
-                <a:latin typeface="Helvetica Neue"/>
-                <a:ea typeface="Helvetica Neue"/>
-                <a:cs typeface="Helvetica Neue"/>
-              </a:defRPr>
-            </a:pPr>
-            <a:r>
-              <a:t>Mean Q4 − Q1 &gt; 0</a:t>
-            </a:r>
-          </a:p>
-        </p:txBody>
-      </p:sp>
-      <p:sp>
-        <p:nvSpPr>
-          <p:cNvPr id="4" name="Text-Placeholder-16-5">
-            <a:extLst xmlns:a="http://schemas.openxmlformats.org/drawingml/2006/main">
-              <a:ext uri="{FF2B5EF4-FFF2-40B4-BE49-F238E27FC236}">
-                <a16:creationId xmlns:a16="http://schemas.microsoft.com/office/drawing/2014/main" id="{0DA2FCBE-A172-4A51-BC33-1D126A2DE90A}"/>
-              </a:ext>
-            </a:extLst>
-          </p:cNvPr>
-          <p:cNvSpPr>
-            <a:spLocks xmlns:a="http://schemas.openxmlformats.org/drawingml/2006/main" noGrp="1"/>
-          </p:cNvSpPr>
-          <p:nvPr/>
-        </p:nvSpPr>
-        <p:spPr>
-          <a:xfrm xmlns:a="http://schemas.openxmlformats.org/drawingml/2006/main">
-            <a:off x="3334988" y="4161092"/>
-            <a:ext cx="2595944" cy="1415606"/>
-          </a:xfrm>
-          <a:prstGeom xmlns:a="http://schemas.openxmlformats.org/drawingml/2006/main" prst="rect">
-            <a:avLst/>
-          </a:prstGeom>
-        </p:spPr>
-        <p:txBody>
-          <a:bodyPr xmlns:a="http://schemas.openxmlformats.org/drawingml/2006/main" lIns="0" tIns="0" rIns="0" bIns="0">
-            <a:noAutofit/>
-          </a:bodyPr>
-          <a:lstStyle xmlns:a="http://schemas.openxmlformats.org/drawingml/2006/main"/>
-          <a:p xmlns:a="http://schemas.openxmlformats.org/drawingml/2006/main">
-            <a:pPr algn="l">
-              <a:defRPr sz="1800">
-                <a:solidFill>
-                  <a:srgbClr val="000000"/>
-                </a:solidFill>
-                <a:latin typeface="Helvetica Neue"/>
-                <a:ea typeface="Helvetica Neue"/>
-                <a:cs typeface="Helvetica Neue"/>
-              </a:defRPr>
-            </a:pPr>
-            <a:r>
-              <a:t>G6 · Permutation</a:t>
-            </a:r>
-          </a:p>
-          <a:p xmlns:a="http://schemas.openxmlformats.org/drawingml/2006/main">
-            <a:pPr algn="l">
-              <a:defRPr sz="1800">
-                <a:solidFill>
-                  <a:srgbClr val="000000"/>
-                </a:solidFill>
-                <a:latin typeface="Helvetica Neue"/>
-                <a:ea typeface="Helvetica Neue"/>
-                <a:cs typeface="Helvetica Neue"/>
-              </a:defRPr>
-            </a:pPr>
-            <a:r>
-              <a:t>Observed ≥ 90th percentile</a:t>
-            </a:r>
-          </a:p>
-        </p:txBody>
-      </p:sp>
-      <p:sp>
-        <p:nvSpPr>
-          <p:cNvPr id="5" name="Content-Placeholder-17-6">
-            <a:extLst xmlns:a="http://schemas.openxmlformats.org/drawingml/2006/main">
-              <a:ext uri="{FF2B5EF4-FFF2-40B4-BE49-F238E27FC236}">
-                <a16:creationId xmlns:a16="http://schemas.microsoft.com/office/drawing/2014/main" id="{5968EE07-BE5D-4277-AC32-332A3E50E300}"/>
-              </a:ext>
-            </a:extLst>
-          </p:cNvPr>
-          <p:cNvSpPr>
-            <a:spLocks xmlns:a="http://schemas.openxmlformats.org/drawingml/2006/main" noGrp="1"/>
-          </p:cNvSpPr>
-          <p:nvPr/>
-        </p:nvSpPr>
-        <p:spPr>
-          <a:xfrm xmlns:a="http://schemas.openxmlformats.org/drawingml/2006/main">
-            <a:off x="6264402" y="4161092"/>
-            <a:ext cx="2595944" cy="1415606"/>
-          </a:xfrm>
-          <a:prstGeom xmlns:a="http://schemas.openxmlformats.org/drawingml/2006/main" prst="rect">
-            <a:avLst/>
-          </a:prstGeom>
-        </p:spPr>
-        <p:txBody>
-          <a:bodyPr xmlns:a="http://schemas.openxmlformats.org/drawingml/2006/main" lIns="0" tIns="0" rIns="0" bIns="0">
-            <a:noAutofit/>
-          </a:bodyPr>
-          <a:lstStyle xmlns:a="http://schemas.openxmlformats.org/drawingml/2006/main"/>
-          <a:p xmlns:a="http://schemas.openxmlformats.org/drawingml/2006/main">
-            <a:pPr algn="l">
-              <a:defRPr sz="1600">
-                <a:solidFill>
-                  <a:srgbClr val="000000"/>
-                </a:solidFill>
-                <a:latin typeface="Helvetica Neue"/>
-                <a:ea typeface="Helvetica Neue"/>
-                <a:cs typeface="Helvetica Neue"/>
-              </a:defRPr>
-            </a:pPr>
-            <a:r>
-              <a:t>G7 · Breadth</a:t>
-            </a:r>
-          </a:p>
-          <a:p xmlns:a="http://schemas.openxmlformats.org/drawingml/2006/main">
-            <a:pPr algn="l">
-              <a:defRPr sz="1600">
-                <a:solidFill>
-                  <a:srgbClr val="000000"/>
-                </a:solidFill>
-                <a:latin typeface="Helvetica Neue"/>
-                <a:ea typeface="Helvetica Neue"/>
-                <a:cs typeface="Helvetica Neue"/>
-              </a:defRPr>
-            </a:pPr>
-            <a:r>
-              <a:t>Largest sector ≤ 35%</a:t>
-            </a:r>
-          </a:p>
-        </p:txBody>
-      </p:sp>
-      <p:sp>
-        <p:nvSpPr>
-          <p:cNvPr id="6" name="Text-Placeholder-18-7">
-            <a:extLst xmlns:a="http://schemas.openxmlformats.org/drawingml/2006/main">
-              <a:ext uri="{FF2B5EF4-FFF2-40B4-BE49-F238E27FC236}">
-                <a16:creationId xmlns:a16="http://schemas.microsoft.com/office/drawing/2014/main" id="{A464DC06-7E22-4578-A5CA-5ABF7EBDFF68}"/>
-              </a:ext>
-            </a:extLst>
-          </p:cNvPr>
-          <p:cNvSpPr>
-            <a:spLocks xmlns:a="http://schemas.openxmlformats.org/drawingml/2006/main" noGrp="1"/>
-          </p:cNvSpPr>
-          <p:nvPr/>
-        </p:nvSpPr>
-        <p:spPr>
-          <a:xfrm xmlns:a="http://schemas.openxmlformats.org/drawingml/2006/main">
-            <a:off x="9205722" y="4161092"/>
-            <a:ext cx="2595944" cy="1415606"/>
-          </a:xfrm>
-          <a:prstGeom xmlns:a="http://schemas.openxmlformats.org/drawingml/2006/main" prst="rect">
-            <a:avLst/>
-          </a:prstGeom>
-        </p:spPr>
-        <p:txBody>
-          <a:bodyPr xmlns:a="http://schemas.openxmlformats.org/drawingml/2006/main" lIns="0" tIns="0" rIns="0" bIns="0">
-            <a:noAutofit/>
-          </a:bodyPr>
-          <a:lstStyle xmlns:a="http://schemas.openxmlformats.org/drawingml/2006/main"/>
-          <a:p xmlns:a="http://schemas.openxmlformats.org/drawingml/2006/main">
-            <a:pPr algn="l">
-              <a:defRPr sz="1800">
-                <a:solidFill>
-                  <a:srgbClr val="000000"/>
-                </a:solidFill>
-                <a:latin typeface="Helvetica Neue"/>
-                <a:ea typeface="Helvetica Neue"/>
-                <a:cs typeface="Helvetica Neue"/>
-              </a:defRPr>
-            </a:pPr>
-            <a:r>
-              <a:t>OOS lock</a:t>
-            </a:r>
-          </a:p>
-          <a:p xmlns:a="http://schemas.openxmlformats.org/drawingml/2006/main">
-            <a:pPr algn="l">
-              <a:defRPr sz="1800">
-                <a:solidFill>
-                  <a:srgbClr val="000000"/>
-                </a:solidFill>
-                <a:latin typeface="Helvetica Neue"/>
-                <a:ea typeface="Helvetica Neue"/>
-                <a:cs typeface="Helvetica Neue"/>
-              </a:defRPr>
-            </a:pPr>
-            <a:r>
-              <a:t>All seven—or no query</a:t>
-            </a:r>
-          </a:p>
-        </p:txBody>
-      </p:sp>
-      <p:sp>
-        <p:nvSpPr>
-          <p:cNvPr id="7" name="Content-Placeholder-15-8">
-            <a:extLst xmlns:a="http://schemas.openxmlformats.org/drawingml/2006/main">
-              <a:ext uri="{FF2B5EF4-FFF2-40B4-BE49-F238E27FC236}">
-                <a16:creationId xmlns:a16="http://schemas.microsoft.com/office/drawing/2014/main" id="{436C583E-8916-4C9A-8B24-035E13710FB7}"/>
-              </a:ext>
-            </a:extLst>
-          </p:cNvPr>
-          <p:cNvSpPr>
-            <a:spLocks xmlns:a="http://schemas.openxmlformats.org/drawingml/2006/main" noGrp="1"/>
-          </p:cNvSpPr>
-          <p:nvPr/>
-        </p:nvSpPr>
-        <p:spPr>
-          <a:xfrm xmlns:a="http://schemas.openxmlformats.org/drawingml/2006/main">
-            <a:off x="393668" y="2208086"/>
-            <a:ext cx="2595944" cy="1415606"/>
-          </a:xfrm>
-          <a:prstGeom xmlns:a="http://schemas.openxmlformats.org/drawingml/2006/main" prst="rect">
-            <a:avLst/>
-          </a:prstGeom>
-        </p:spPr>
-        <p:txBody>
-          <a:bodyPr xmlns:a="http://schemas.openxmlformats.org/drawingml/2006/main" lIns="0" tIns="0" rIns="0" bIns="0">
-            <a:noAutofit/>
-          </a:bodyPr>
-          <a:lstStyle xmlns:a="http://schemas.openxmlformats.org/drawingml/2006/main"/>
-          <a:p xmlns:a="http://schemas.openxmlformats.org/drawingml/2006/main">
-            <a:pPr algn="l">
-              <a:defRPr sz="1600">
-                <a:solidFill>
-                  <a:srgbClr val="000000"/>
-                </a:solidFill>
-                <a:latin typeface="Helvetica Neue"/>
-                <a:ea typeface="Helvetica Neue"/>
-                <a:cs typeface="Helvetica Neue"/>
-              </a:defRPr>
-            </a:pPr>
-            <a:r>
-              <a:t>G1 · Integrity</a:t>
-            </a:r>
-          </a:p>
-          <a:p xmlns:a="http://schemas.openxmlformats.org/drawingml/2006/main">
-            <a:pPr algn="l">
-              <a:defRPr sz="1600">
-                <a:solidFill>
-                  <a:srgbClr val="000000"/>
-                </a:solidFill>
-                <a:latin typeface="Helvetica Neue"/>
-                <a:ea typeface="Helvetica Neue"/>
-                <a:cs typeface="Helvetica Neue"/>
-              </a:defRPr>
-            </a:pPr>
-            <a:r>
-              <a:t>Dates, bars, registry, target timing</a:t>
-            </a:r>
-          </a:p>
-        </p:txBody>
-      </p:sp>
-      <p:sp>
-        <p:nvSpPr>
-          <p:cNvPr id="8" name="Text-Placeholder-16-9">
-            <a:extLst xmlns:a="http://schemas.openxmlformats.org/drawingml/2006/main">
-              <a:ext uri="{FF2B5EF4-FFF2-40B4-BE49-F238E27FC236}">
-                <a16:creationId xmlns:a16="http://schemas.microsoft.com/office/drawing/2014/main" id="{18733E52-9A04-4859-B8BC-DD6903DEC196}"/>
-              </a:ext>
-            </a:extLst>
-          </p:cNvPr>
-          <p:cNvSpPr>
-            <a:spLocks xmlns:a="http://schemas.openxmlformats.org/drawingml/2006/main" noGrp="1"/>
-          </p:cNvSpPr>
-          <p:nvPr/>
-        </p:nvSpPr>
-        <p:spPr>
-          <a:xfrm xmlns:a="http://schemas.openxmlformats.org/drawingml/2006/main">
-            <a:off x="3334988" y="2208086"/>
-            <a:ext cx="2595944" cy="1415606"/>
-          </a:xfrm>
-          <a:prstGeom xmlns:a="http://schemas.openxmlformats.org/drawingml/2006/main" prst="rect">
-            <a:avLst/>
-          </a:prstGeom>
-        </p:spPr>
-        <p:txBody>
-          <a:bodyPr xmlns:a="http://schemas.openxmlformats.org/drawingml/2006/main" lIns="0" tIns="0" rIns="0" bIns="0">
-            <a:noAutofit/>
-          </a:bodyPr>
-          <a:lstStyle xmlns:a="http://schemas.openxmlformats.org/drawingml/2006/main"/>
-          <a:p xmlns:a="http://schemas.openxmlformats.org/drawingml/2006/main">
-            <a:pPr algn="l">
-              <a:defRPr sz="1800">
-                <a:solidFill>
-                  <a:srgbClr val="000000"/>
-                </a:solidFill>
-                <a:latin typeface="Helvetica Neue"/>
-                <a:ea typeface="Helvetica Neue"/>
-                <a:cs typeface="Helvetica Neue"/>
-              </a:defRPr>
-            </a:pPr>
-            <a:r>
-              <a:t>G2 · Support</a:t>
-            </a:r>
-          </a:p>
-          <a:p xmlns:a="http://schemas.openxmlformats.org/drawingml/2006/main">
-            <a:pPr algn="l">
-              <a:defRPr sz="1800">
-                <a:solidFill>
-                  <a:srgbClr val="000000"/>
-                </a:solidFill>
-                <a:latin typeface="Helvetica Neue"/>
-                <a:ea typeface="Helvetica Neue"/>
-                <a:cs typeface="Helvetica Neue"/>
-              </a:defRPr>
-            </a:pPr>
-            <a:r>
-              <a:t>≥12 quarters; ≥20 assets</a:t>
-            </a:r>
-          </a:p>
-        </p:txBody>
-      </p:sp>
-      <p:sp>
-        <p:nvSpPr>
-          <p:cNvPr id="9" name="Content-Placeholder-17-10">
-            <a:extLst xmlns:a="http://schemas.openxmlformats.org/drawingml/2006/main">
-              <a:ext uri="{FF2B5EF4-FFF2-40B4-BE49-F238E27FC236}">
-                <a16:creationId xmlns:a16="http://schemas.microsoft.com/office/drawing/2014/main" id="{E932ECA6-67E6-4692-8358-C1105B492876}"/>
-              </a:ext>
-            </a:extLst>
-          </p:cNvPr>
-          <p:cNvSpPr>
-            <a:spLocks xmlns:a="http://schemas.openxmlformats.org/drawingml/2006/main" noGrp="1"/>
-          </p:cNvSpPr>
-          <p:nvPr/>
-        </p:nvSpPr>
-        <p:spPr>
-          <a:xfrm xmlns:a="http://schemas.openxmlformats.org/drawingml/2006/main">
-            <a:off x="6264402" y="2208086"/>
-            <a:ext cx="2595944" cy="1415606"/>
-          </a:xfrm>
-          <a:prstGeom xmlns:a="http://schemas.openxmlformats.org/drawingml/2006/main" prst="rect">
-            <a:avLst/>
-          </a:prstGeom>
-        </p:spPr>
-        <p:txBody>
-          <a:bodyPr xmlns:a="http://schemas.openxmlformats.org/drawingml/2006/main" lIns="0" tIns="0" rIns="0" bIns="0">
-            <a:noAutofit/>
-          </a:bodyPr>
-          <a:lstStyle xmlns:a="http://schemas.openxmlformats.org/drawingml/2006/main"/>
-          <a:p xmlns:a="http://schemas.openxmlformats.org/drawingml/2006/main">
-            <a:pPr algn="l">
-              <a:defRPr sz="1600">
-                <a:solidFill>
-                  <a:srgbClr val="000000"/>
-                </a:solidFill>
-                <a:latin typeface="Helvetica Neue"/>
-                <a:ea typeface="Helvetica Neue"/>
-                <a:cs typeface="Helvetica Neue"/>
-              </a:defRPr>
-            </a:pPr>
-            <a:r>
-              <a:t>G3 · Forward IC</a:t>
-            </a:r>
-          </a:p>
-          <a:p xmlns:a="http://schemas.openxmlformats.org/drawingml/2006/main">
-            <a:pPr algn="l">
-              <a:defRPr sz="1600">
-                <a:solidFill>
-                  <a:srgbClr val="000000"/>
-                </a:solidFill>
-                <a:latin typeface="Helvetica Neue"/>
-                <a:ea typeface="Helvetica Neue"/>
-                <a:cs typeface="Helvetica Neue"/>
-              </a:defRPr>
-            </a:pPr>
-            <a:r>
-              <a:t>&gt;0 mean; ≥60% positive</a:t>
-            </a:r>
-          </a:p>
-        </p:txBody>
-      </p:sp>
-      <p:sp>
-        <p:nvSpPr>
-          <p:cNvPr id="10" name="Text-Placeholder-18-11">
-            <a:extLst xmlns:a="http://schemas.openxmlformats.org/drawingml/2006/main">
-              <a:ext uri="{FF2B5EF4-FFF2-40B4-BE49-F238E27FC236}">
-                <a16:creationId xmlns:a16="http://schemas.microsoft.com/office/drawing/2014/main" id="{4186F682-B2DC-43F6-A234-CA3E3D868479}"/>
-              </a:ext>
-            </a:extLst>
-          </p:cNvPr>
-          <p:cNvSpPr>
-            <a:spLocks xmlns:a="http://schemas.openxmlformats.org/drawingml/2006/main" noGrp="1"/>
-          </p:cNvSpPr>
-          <p:nvPr/>
-        </p:nvSpPr>
-        <p:spPr>
-          <a:xfrm xmlns:a="http://schemas.openxmlformats.org/drawingml/2006/main">
-            <a:off x="9205722" y="2208086"/>
-            <a:ext cx="2595944" cy="1415606"/>
-          </a:xfrm>
-          <a:prstGeom xmlns:a="http://schemas.openxmlformats.org/drawingml/2006/main" prst="rect">
-            <a:avLst/>
-          </a:prstGeom>
-        </p:spPr>
-        <p:txBody>
-          <a:bodyPr xmlns:a="http://schemas.openxmlformats.org/drawingml/2006/main" lIns="0" tIns="0" rIns="0" bIns="0">
-            <a:noAutofit/>
-          </a:bodyPr>
-          <a:lstStyle xmlns:a="http://schemas.openxmlformats.org/drawingml/2006/main"/>
-          <a:p xmlns:a="http://schemas.openxmlformats.org/drawingml/2006/main">
-            <a:pPr algn="l">
-              <a:defRPr sz="1800">
-                <a:solidFill>
-                  <a:srgbClr val="000000"/>
-                </a:solidFill>
-                <a:latin typeface="Helvetica Neue"/>
-                <a:ea typeface="Helvetica Neue"/>
-                <a:cs typeface="Helvetica Neue"/>
-              </a:defRPr>
-            </a:pPr>
-            <a:r>
-              <a:t>G4 · Q4 excess</a:t>
-            </a:r>
-          </a:p>
-          <a:p xmlns:a="http://schemas.openxmlformats.org/drawingml/2006/main">
-            <a:pPr algn="l">
-              <a:defRPr sz="1800">
-                <a:solidFill>
-                  <a:srgbClr val="000000"/>
-                </a:solidFill>
-                <a:latin typeface="Helvetica Neue"/>
-                <a:ea typeface="Helvetica Neue"/>
-                <a:cs typeface="Helvetica Neue"/>
-              </a:defRPr>
-            </a:pPr>
-            <a:r>
-              <a:t>&gt;0 mean; ≥60% positive</a:t>
+              <a:buNone/>
+              <a:defRPr sz="2400">
+                <a:solidFill>
+                  <a:srgbClr val="000000"/>
+                </a:solidFill>
+                <a:latin typeface="Helvetica Neue"/>
+                <a:ea typeface="Helvetica Neue"/>
+                <a:cs typeface="Helvetica Neue"/>
+              </a:defRPr>
+            </a:pPr>
+            <a:r>
+              <a:t>Volatility ratio</a:t>
+            </a:r>
+          </a:p>
+          <a:p xmlns:a="http://schemas.openxmlformats.org/drawingml/2006/main">
+            <a:pPr algn="l">
+              <a:buNone/>
+              <a:defRPr sz="2400">
+                <a:solidFill>
+                  <a:srgbClr val="000000"/>
+                </a:solidFill>
+                <a:latin typeface="Helvetica Neue"/>
+                <a:ea typeface="Helvetica Neue"/>
+                <a:cs typeface="Helvetica Neue"/>
+              </a:defRPr>
+            </a:pPr>
+            <a:r>
+              <a:t>RV20 / RV126
+Asks whether short-run volatility has expanded relative to the slower state.</a:t>
             </a:r>
           </a:p>
         </p:txBody>
@@ -5983,7 +7036,7 @@
     </p:spTree>
     <p:extLst>
       <p:ext uri="{BB962C8B-B14F-4D97-AF65-F5344CB8AC3E}">
-        <p14:creationId xmlns:p14="http://schemas.microsoft.com/office/powerpoint/2010/main" val="2088880555"/>
+        <p14:creationId xmlns:p14="http://schemas.microsoft.com/office/powerpoint/2010/main" val="476807716"/>
       </p:ext>
     </p:extLst>
   </p:cSld>
@@ -6004,97 +7057,10 @@
       </p:grpSpPr>
       <p:sp>
         <p:nvSpPr>
-          <p:cNvPr id="13" name="Rounded-Rectangle-5-1">
-            <a:extLst xmlns:a="http://schemas.openxmlformats.org/drawingml/2006/main">
-              <a:ext uri="{FF2B5EF4-FFF2-40B4-BE49-F238E27FC236}">
-                <a16:creationId xmlns:a16="http://schemas.microsoft.com/office/drawing/2014/main" id="{17C06F09-B532-40B9-873C-AD5632712289}"/>
-              </a:ext>
-            </a:extLst>
-          </p:cNvPr>
-          <p:cNvSpPr>
-            <a:spLocks xmlns:a="http://schemas.openxmlformats.org/drawingml/2006/main" noGrp="1"/>
-          </p:cNvSpPr>
-          <p:nvPr/>
-        </p:nvSpPr>
-        <p:spPr>
-          <a:xfrm xmlns:a="http://schemas.openxmlformats.org/drawingml/2006/main">
-            <a:off x="393668" y="3022568"/>
-            <a:ext cx="3568732" cy="2971800"/>
-          </a:xfrm>
-          <a:prstGeom xmlns:a="http://schemas.openxmlformats.org/drawingml/2006/main" prst="roundRect">
-            <a:avLst>
-              <a:gd name="adj" fmla="val 2564"/>
-            </a:avLst>
-          </a:prstGeom>
-          <a:solidFill xmlns:a="http://schemas.openxmlformats.org/drawingml/2006/main">
-            <a:srgbClr val="F2F2F2"/>
-          </a:solidFill>
-        </p:spPr>
-      </p:sp>
-      <p:sp>
-        <p:nvSpPr>
-          <p:cNvPr id="2" name="Rounded-Rectangle-6-2">
-            <a:extLst xmlns:a="http://schemas.openxmlformats.org/drawingml/2006/main">
-              <a:ext uri="{FF2B5EF4-FFF2-40B4-BE49-F238E27FC236}">
-                <a16:creationId xmlns:a16="http://schemas.microsoft.com/office/drawing/2014/main" id="{F76997C6-7E75-4EFF-936A-64F4F95E0A54}"/>
-              </a:ext>
-            </a:extLst>
-          </p:cNvPr>
-          <p:cNvSpPr>
-            <a:spLocks xmlns:a="http://schemas.openxmlformats.org/drawingml/2006/main" noGrp="1"/>
-          </p:cNvSpPr>
-          <p:nvPr/>
-        </p:nvSpPr>
-        <p:spPr>
-          <a:xfrm xmlns:a="http://schemas.openxmlformats.org/drawingml/2006/main">
-            <a:off x="4311682" y="3022568"/>
-            <a:ext cx="3568732" cy="2971800"/>
-          </a:xfrm>
-          <a:prstGeom xmlns:a="http://schemas.openxmlformats.org/drawingml/2006/main" prst="roundRect">
-            <a:avLst>
-              <a:gd name="adj" fmla="val 2564"/>
-            </a:avLst>
-          </a:prstGeom>
-          <a:solidFill xmlns:a="http://schemas.openxmlformats.org/drawingml/2006/main">
-            <a:srgbClr val="F2F2F2"/>
-          </a:solidFill>
-        </p:spPr>
-      </p:sp>
-      <p:sp>
-        <p:nvSpPr>
-          <p:cNvPr id="3" name="Rounded-Rectangle-7-3">
-            <a:extLst xmlns:a="http://schemas.openxmlformats.org/drawingml/2006/main">
-              <a:ext uri="{FF2B5EF4-FFF2-40B4-BE49-F238E27FC236}">
-                <a16:creationId xmlns:a16="http://schemas.microsoft.com/office/drawing/2014/main" id="{C8D56EED-C6DF-4DA7-A0E7-7C5D61CC94BE}"/>
-              </a:ext>
-            </a:extLst>
-          </p:cNvPr>
-          <p:cNvSpPr>
-            <a:spLocks xmlns:a="http://schemas.openxmlformats.org/drawingml/2006/main" noGrp="1"/>
-          </p:cNvSpPr>
-          <p:nvPr/>
-        </p:nvSpPr>
-        <p:spPr>
-          <a:xfrm xmlns:a="http://schemas.openxmlformats.org/drawingml/2006/main">
-            <a:off x="8232267" y="3022568"/>
-            <a:ext cx="3568732" cy="2971800"/>
-          </a:xfrm>
-          <a:prstGeom xmlns:a="http://schemas.openxmlformats.org/drawingml/2006/main" prst="roundRect">
-            <a:avLst>
-              <a:gd name="adj" fmla="val 2564"/>
-            </a:avLst>
-          </a:prstGeom>
-          <a:solidFill xmlns:a="http://schemas.openxmlformats.org/drawingml/2006/main">
-            <a:srgbClr val="F2F2F2"/>
-          </a:solidFill>
-        </p:spPr>
-      </p:sp>
-      <p:sp>
-        <p:nvSpPr>
-          <p:cNvPr id="4" name="Slide-Number-Placeholder-1-4">
-            <a:extLst xmlns:a="http://schemas.openxmlformats.org/drawingml/2006/main">
-              <a:ext uri="{FF2B5EF4-FFF2-40B4-BE49-F238E27FC236}">
-                <a16:creationId xmlns:a16="http://schemas.microsoft.com/office/drawing/2014/main" id="{E9E8DBE8-6D28-41F2-9BD8-37100FA57762}"/>
+          <p:cNvPr id="5" name="Google-Shape-532-p58-2">
+            <a:extLst xmlns:a="http://schemas.openxmlformats.org/drawingml/2006/main">
+              <a:ext uri="{FF2B5EF4-FFF2-40B4-BE49-F238E27FC236}">
+                <a16:creationId xmlns:a16="http://schemas.microsoft.com/office/drawing/2014/main" id="{39D7E226-8653-4211-B710-C120D8235D3E}"/>
               </a:ext>
             </a:extLst>
           </p:cNvPr>
@@ -6113,10 +7079,13 @@
           </a:prstGeom>
         </p:spPr>
         <p:txBody>
-          <a:bodyPr xmlns:a="http://schemas.openxmlformats.org/drawingml/2006/main" lIns="0" tIns="0" rIns="0" bIns="0" anchor="b"/>
+          <a:bodyPr xmlns:a="http://schemas.openxmlformats.org/drawingml/2006/main" wrap="square" lIns="0" tIns="0" rIns="0" bIns="0" anchor="b">
+            <a:noAutofit/>
+          </a:bodyPr>
           <a:lstStyle xmlns:a="http://schemas.openxmlformats.org/drawingml/2006/main"/>
           <a:p xmlns:a="http://schemas.openxmlformats.org/drawingml/2006/main">
             <a:pPr algn="r">
+              <a:buNone/>
               <a:defRPr sz="1000">
                 <a:solidFill>
                   <a:srgbClr val="000000"/>
@@ -6134,10 +7103,10 @@
       </p:sp>
       <p:sp>
         <p:nvSpPr>
-          <p:cNvPr id="5" name="Title-2-5">
-            <a:extLst xmlns:a="http://schemas.openxmlformats.org/drawingml/2006/main">
-              <a:ext uri="{FF2B5EF4-FFF2-40B4-BE49-F238E27FC236}">
-                <a16:creationId xmlns:a16="http://schemas.microsoft.com/office/drawing/2014/main" id="{918E5C8A-76FA-4CAC-98DA-5A7A9F695A5D}"/>
+          <p:cNvPr id="2" name="Google-Shape-533-p58-3">
+            <a:extLst xmlns:a="http://schemas.openxmlformats.org/drawingml/2006/main">
+              <a:ext uri="{FF2B5EF4-FFF2-40B4-BE49-F238E27FC236}">
+                <a16:creationId xmlns:a16="http://schemas.microsoft.com/office/drawing/2014/main" id="{10E51D1C-18DB-4515-9914-87773A022615}"/>
               </a:ext>
             </a:extLst>
           </p:cNvPr>
@@ -6156,57 +7125,124 @@
           </a:prstGeom>
         </p:spPr>
         <p:txBody>
-          <a:bodyPr xmlns:a="http://schemas.openxmlformats.org/drawingml/2006/main" lIns="0" tIns="0" rIns="0" bIns="0" anchor="t">
+          <a:bodyPr xmlns:a="http://schemas.openxmlformats.org/drawingml/2006/main" wrap="square" lIns="0" tIns="0" rIns="0" bIns="0" anchor="t">
+            <a:noAutofit/>
+          </a:bodyPr>
+          <a:lstStyle xmlns:a="http://schemas.openxmlformats.org/drawingml/2006/main"/>
+          <a:p xmlns:a="http://schemas.openxmlformats.org/drawingml/2006/main">
+            <a:pPr algn="l">
+              <a:buNone/>
+              <a:defRPr sz="2900">
+                <a:solidFill>
+                  <a:srgbClr val="000000"/>
+                </a:solidFill>
+                <a:latin typeface="Helvetica Neue"/>
+                <a:ea typeface="Helvetica Neue"/>
+                <a:cs typeface="Helvetica Neue"/>
+              </a:defRPr>
+            </a:pPr>
+            <a:r>
+              <a:t>Relative return is the target</a:t>
+            </a:r>
+          </a:p>
+        </p:txBody>
+      </p:sp>
+      <p:sp>
+        <p:nvSpPr>
+          <p:cNvPr id="3" name="Google-Shape-534-p58-4">
+            <a:extLst xmlns:a="http://schemas.openxmlformats.org/drawingml/2006/main">
+              <a:ext uri="{FF2B5EF4-FFF2-40B4-BE49-F238E27FC236}">
+                <a16:creationId xmlns:a16="http://schemas.microsoft.com/office/drawing/2014/main" id="{6AF50458-FB0C-4B5E-B372-0AA6DD93D95A}"/>
+              </a:ext>
+            </a:extLst>
+          </p:cNvPr>
+          <p:cNvSpPr>
+            <a:spLocks xmlns:a="http://schemas.openxmlformats.org/drawingml/2006/main" noGrp="1"/>
+          </p:cNvSpPr>
+          <p:nvPr/>
+        </p:nvSpPr>
+        <p:spPr>
+          <a:xfrm xmlns:a="http://schemas.openxmlformats.org/drawingml/2006/main">
+            <a:off x="393668" y="2031968"/>
+            <a:ext cx="5334000" cy="3534823"/>
+          </a:xfrm>
+          <a:prstGeom xmlns:a="http://schemas.openxmlformats.org/drawingml/2006/main" prst="rect">
+            <a:avLst/>
+          </a:prstGeom>
+        </p:spPr>
+        <p:txBody>
+          <a:bodyPr xmlns:a="http://schemas.openxmlformats.org/drawingml/2006/main" wrap="square" lIns="0" tIns="0" rIns="0" bIns="0" anchor="t">
+            <a:noAutofit/>
+          </a:bodyPr>
+          <a:lstStyle xmlns:a="http://schemas.openxmlformats.org/drawingml/2006/main"/>
+          <a:p xmlns:a="http://schemas.openxmlformats.org/drawingml/2006/main">
+            <a:pPr algn="l">
+              <a:buNone/>
+              <a:defRPr sz="2400">
+                <a:solidFill>
+                  <a:srgbClr val="000000"/>
+                </a:solidFill>
+                <a:latin typeface="Helvetica Neue"/>
+                <a:ea typeface="Helvetica Neue"/>
+                <a:cs typeface="Helvetica Neue"/>
+              </a:defRPr>
+            </a:pPr>
+            <a:r>
+              <a:t>Target</a:t>
+            </a:r>
+          </a:p>
+          <a:p xmlns:a="http://schemas.openxmlformats.org/drawingml/2006/main">
+            <a:pPr algn="l">
+              <a:buNone/>
+              <a:defRPr sz="2400">
+                <a:solidFill>
+                  <a:srgbClr val="000000"/>
+                </a:solidFill>
+                <a:latin typeface="Helvetica Neue"/>
+                <a:ea typeface="Helvetica Neue"/>
+                <a:cs typeface="Helvetica Neue"/>
+              </a:defRPr>
+            </a:pPr>
+            <a:r>
+              <a:t>Next-quarter first-open to last-open return
+minus
+equal-weight eligible-universe return.
+A positive target means the stock beat its contemporaneous cross-section.</a:t>
+            </a:r>
+          </a:p>
+        </p:txBody>
+      </p:sp>
+      <p:sp>
+        <p:nvSpPr>
+          <p:cNvPr id="4" name="Content-Placeholder-3-5">
+            <a:extLst xmlns:a="http://schemas.openxmlformats.org/drawingml/2006/main">
+              <a:ext uri="{FF2B5EF4-FFF2-40B4-BE49-F238E27FC236}">
+                <a16:creationId xmlns:a16="http://schemas.microsoft.com/office/drawing/2014/main" id="{75EC59B8-FA48-4458-B661-E61F404C7832}"/>
+              </a:ext>
+            </a:extLst>
+          </p:cNvPr>
+          <p:cNvSpPr>
+            <a:spLocks xmlns:a="http://schemas.openxmlformats.org/drawingml/2006/main" noGrp="1"/>
+          </p:cNvSpPr>
+          <p:nvPr/>
+        </p:nvSpPr>
+        <p:spPr>
+          <a:xfrm xmlns:a="http://schemas.openxmlformats.org/drawingml/2006/main">
+            <a:off x="6477000" y="2031968"/>
+            <a:ext cx="5316760" cy="3534823"/>
+          </a:xfrm>
+          <a:prstGeom xmlns:a="http://schemas.openxmlformats.org/drawingml/2006/main" prst="rect">
+            <a:avLst/>
+          </a:prstGeom>
+        </p:spPr>
+        <p:txBody>
+          <a:bodyPr xmlns:a="http://schemas.openxmlformats.org/drawingml/2006/main" lIns="0" tIns="0" rIns="0" bIns="0">
             <a:normAutofit fontScale="100000"/>
           </a:bodyPr>
           <a:lstStyle xmlns:a="http://schemas.openxmlformats.org/drawingml/2006/main"/>
           <a:p xmlns:a="http://schemas.openxmlformats.org/drawingml/2006/main">
             <a:pPr algn="l">
-              <a:defRPr sz="2900">
-                <a:solidFill>
-                  <a:srgbClr val="000000"/>
-                </a:solidFill>
-                <a:latin typeface="Helvetica Neue"/>
-                <a:ea typeface="Helvetica Neue"/>
-                <a:cs typeface="Helvetica Neue"/>
-              </a:defRPr>
-            </a:pPr>
-            <a:r>
-              <a:t>The refreshed TRAIN panel retained broad cross-sectional support</a:t>
-            </a:r>
-          </a:p>
-        </p:txBody>
-      </p:sp>
-      <p:sp>
-        <p:nvSpPr>
-          <p:cNvPr id="6" name="Content-Placeholder-9-6">
-            <a:extLst xmlns:a="http://schemas.openxmlformats.org/drawingml/2006/main">
-              <a:ext uri="{FF2B5EF4-FFF2-40B4-BE49-F238E27FC236}">
-                <a16:creationId xmlns:a16="http://schemas.microsoft.com/office/drawing/2014/main" id="{6A7CC687-51E6-4229-872C-B6942E8BF18A}"/>
-              </a:ext>
-            </a:extLst>
-          </p:cNvPr>
-          <p:cNvSpPr>
-            <a:spLocks xmlns:a="http://schemas.openxmlformats.org/drawingml/2006/main" noGrp="1"/>
-          </p:cNvSpPr>
-          <p:nvPr/>
-        </p:nvSpPr>
-        <p:spPr>
-          <a:xfrm xmlns:a="http://schemas.openxmlformats.org/drawingml/2006/main">
-            <a:off x="702374" y="4900613"/>
-            <a:ext cx="2949607" cy="819150"/>
-          </a:xfrm>
-          <a:prstGeom xmlns:a="http://schemas.openxmlformats.org/drawingml/2006/main" prst="rect">
-            <a:avLst/>
-          </a:prstGeom>
-        </p:spPr>
-        <p:txBody>
-          <a:bodyPr xmlns:a="http://schemas.openxmlformats.org/drawingml/2006/main" lIns="91440" tIns="45720" rIns="91440" bIns="45720">
-            <a:normAutofit fontScale="100000"/>
-          </a:bodyPr>
-          <a:lstStyle xmlns:a="http://schemas.openxmlformats.org/drawingml/2006/main"/>
-          <a:p xmlns:a="http://schemas.openxmlformats.org/drawingml/2006/main">
-            <a:pPr algn="l">
+              <a:buNone/>
               <a:defRPr sz="2400">
                 <a:solidFill>
                   <a:srgbClr val="000000"/>
@@ -6217,41 +7253,12 @@
               </a:defRPr>
             </a:pPr>
             <a:r>
-              <a:t>eligible identities</a:t>
-            </a:r>
-          </a:p>
-        </p:txBody>
-      </p:sp>
-      <p:sp>
-        <p:nvSpPr>
-          <p:cNvPr id="7" name="Content-Placeholder-10-7">
-            <a:extLst xmlns:a="http://schemas.openxmlformats.org/drawingml/2006/main">
-              <a:ext uri="{FF2B5EF4-FFF2-40B4-BE49-F238E27FC236}">
-                <a16:creationId xmlns:a16="http://schemas.microsoft.com/office/drawing/2014/main" id="{0F2E6233-6148-44B6-BC9B-AC29EE5593F3}"/>
-              </a:ext>
-            </a:extLst>
-          </p:cNvPr>
-          <p:cNvSpPr>
-            <a:spLocks xmlns:a="http://schemas.openxmlformats.org/drawingml/2006/main" noGrp="1"/>
-          </p:cNvSpPr>
-          <p:nvPr/>
-        </p:nvSpPr>
-        <p:spPr>
-          <a:xfrm xmlns:a="http://schemas.openxmlformats.org/drawingml/2006/main">
-            <a:off x="8541830" y="4900613"/>
-            <a:ext cx="2949607" cy="819150"/>
-          </a:xfrm>
-          <a:prstGeom xmlns:a="http://schemas.openxmlformats.org/drawingml/2006/main" prst="rect">
-            <a:avLst/>
-          </a:prstGeom>
-        </p:spPr>
-        <p:txBody>
-          <a:bodyPr xmlns:a="http://schemas.openxmlformats.org/drawingml/2006/main" lIns="91440" tIns="45720" rIns="91440" bIns="45720">
-            <a:normAutofit fontScale="100000"/>
-          </a:bodyPr>
-          <a:lstStyle xmlns:a="http://schemas.openxmlformats.org/drawingml/2006/main"/>
-          <a:p xmlns:a="http://schemas.openxmlformats.org/drawingml/2006/main">
-            <a:pPr algn="l">
+              <a:t>Preprocessing</a:t>
+            </a:r>
+          </a:p>
+          <a:p xmlns:a="http://schemas.openxmlformats.org/drawingml/2006/main">
+            <a:pPr algn="l">
+              <a:buNone/>
               <a:defRPr sz="2400">
                 <a:solidFill>
                   <a:srgbClr val="000000"/>
@@ -6262,247 +7269,9 @@
               </a:defRPr>
             </a:pPr>
             <a:r>
-              <a:t>assets per quarter</a:t>
-            </a:r>
-          </a:p>
-        </p:txBody>
-      </p:sp>
-      <p:sp>
-        <p:nvSpPr>
-          <p:cNvPr id="8" name="Content-Placeholder-11-8">
-            <a:extLst xmlns:a="http://schemas.openxmlformats.org/drawingml/2006/main">
-              <a:ext uri="{FF2B5EF4-FFF2-40B4-BE49-F238E27FC236}">
-                <a16:creationId xmlns:a16="http://schemas.microsoft.com/office/drawing/2014/main" id="{0AB6F37B-1200-4568-B7D0-7C921DB3798F}"/>
-              </a:ext>
-            </a:extLst>
-          </p:cNvPr>
-          <p:cNvSpPr>
-            <a:spLocks xmlns:a="http://schemas.openxmlformats.org/drawingml/2006/main" noGrp="1"/>
-          </p:cNvSpPr>
-          <p:nvPr/>
-        </p:nvSpPr>
-        <p:spPr>
-          <a:xfrm xmlns:a="http://schemas.openxmlformats.org/drawingml/2006/main">
-            <a:off x="4621244" y="4900613"/>
-            <a:ext cx="2949607" cy="819150"/>
-          </a:xfrm>
-          <a:prstGeom xmlns:a="http://schemas.openxmlformats.org/drawingml/2006/main" prst="rect">
-            <a:avLst/>
-          </a:prstGeom>
-        </p:spPr>
-        <p:txBody>
-          <a:bodyPr xmlns:a="http://schemas.openxmlformats.org/drawingml/2006/main" lIns="91440" tIns="45720" rIns="91440" bIns="45720">
-            <a:normAutofit fontScale="100000"/>
-          </a:bodyPr>
-          <a:lstStyle xmlns:a="http://schemas.openxmlformats.org/drawingml/2006/main"/>
-          <a:p xmlns:a="http://schemas.openxmlformats.org/drawingml/2006/main">
-            <a:pPr algn="l">
-              <a:defRPr sz="2400">
-                <a:solidFill>
-                  <a:srgbClr val="000000"/>
-                </a:solidFill>
-                <a:latin typeface="Helvetica Neue"/>
-                <a:ea typeface="Helvetica Neue"/>
-                <a:cs typeface="Helvetica Neue"/>
-              </a:defRPr>
-            </a:pPr>
-            <a:r>
-              <a:t>asset-quarter rows</a:t>
-            </a:r>
-          </a:p>
-        </p:txBody>
-      </p:sp>
-      <p:sp>
-        <p:nvSpPr>
-          <p:cNvPr id="9" name="Content-Placeholder-9-9">
-            <a:extLst xmlns:a="http://schemas.openxmlformats.org/drawingml/2006/main">
-              <a:ext uri="{FF2B5EF4-FFF2-40B4-BE49-F238E27FC236}">
-                <a16:creationId xmlns:a16="http://schemas.microsoft.com/office/drawing/2014/main" id="{51B9BFDF-77E4-4D5B-B66D-B2DAABECA8D4}"/>
-              </a:ext>
-            </a:extLst>
-          </p:cNvPr>
-          <p:cNvSpPr>
-            <a:spLocks xmlns:a="http://schemas.openxmlformats.org/drawingml/2006/main" noGrp="1"/>
-          </p:cNvSpPr>
-          <p:nvPr/>
-        </p:nvSpPr>
-        <p:spPr>
-          <a:xfrm xmlns:a="http://schemas.openxmlformats.org/drawingml/2006/main">
-            <a:off x="702374" y="3429000"/>
-            <a:ext cx="2940082" cy="1359313"/>
-          </a:xfrm>
-          <a:prstGeom xmlns:a="http://schemas.openxmlformats.org/drawingml/2006/main" prst="rect">
-            <a:avLst/>
-          </a:prstGeom>
-        </p:spPr>
-        <p:txBody>
-          <a:bodyPr xmlns:a="http://schemas.openxmlformats.org/drawingml/2006/main" lIns="0" tIns="0" rIns="0" bIns="0" anchor="b">
-            <a:normAutofit fontScale="100000"/>
-          </a:bodyPr>
-          <a:lstStyle xmlns:a="http://schemas.openxmlformats.org/drawingml/2006/main"/>
-          <a:p xmlns:a="http://schemas.openxmlformats.org/drawingml/2006/main">
-            <a:pPr algn="l">
-              <a:defRPr sz="2400">
-                <a:solidFill>
-                  <a:srgbClr val="000000"/>
-                </a:solidFill>
-                <a:latin typeface="Helvetica Neue"/>
-                <a:ea typeface="Helvetica Neue"/>
-                <a:cs typeface="Helvetica Neue"/>
-              </a:defRPr>
-            </a:pPr>
-            <a:r>
-              <a:t>114</a:t>
-            </a:r>
-          </a:p>
-        </p:txBody>
-      </p:sp>
-      <p:sp>
-        <p:nvSpPr>
-          <p:cNvPr id="10" name="Content-Placeholder-9-10">
-            <a:extLst xmlns:a="http://schemas.openxmlformats.org/drawingml/2006/main">
-              <a:ext uri="{FF2B5EF4-FFF2-40B4-BE49-F238E27FC236}">
-                <a16:creationId xmlns:a16="http://schemas.microsoft.com/office/drawing/2014/main" id="{7F12B4DA-8032-4549-A667-3A1D90732705}"/>
-              </a:ext>
-            </a:extLst>
-          </p:cNvPr>
-          <p:cNvSpPr>
-            <a:spLocks xmlns:a="http://schemas.openxmlformats.org/drawingml/2006/main" noGrp="1"/>
-          </p:cNvSpPr>
-          <p:nvPr/>
-        </p:nvSpPr>
-        <p:spPr>
-          <a:xfrm xmlns:a="http://schemas.openxmlformats.org/drawingml/2006/main">
-            <a:off x="4612958" y="3429000"/>
-            <a:ext cx="2940082" cy="1359313"/>
-          </a:xfrm>
-          <a:prstGeom xmlns:a="http://schemas.openxmlformats.org/drawingml/2006/main" prst="rect">
-            <a:avLst/>
-          </a:prstGeom>
-        </p:spPr>
-        <p:txBody>
-          <a:bodyPr xmlns:a="http://schemas.openxmlformats.org/drawingml/2006/main" lIns="0" tIns="0" rIns="0" bIns="0" anchor="b">
-            <a:normAutofit fontScale="100000"/>
-          </a:bodyPr>
-          <a:lstStyle xmlns:a="http://schemas.openxmlformats.org/drawingml/2006/main"/>
-          <a:p xmlns:a="http://schemas.openxmlformats.org/drawingml/2006/main">
-            <a:pPr algn="l">
-              <a:defRPr sz="2400">
-                <a:solidFill>
-                  <a:srgbClr val="000000"/>
-                </a:solidFill>
-                <a:latin typeface="Helvetica Neue"/>
-                <a:ea typeface="Helvetica Neue"/>
-                <a:cs typeface="Helvetica Neue"/>
-              </a:defRPr>
-            </a:pPr>
-            <a:r>
-              <a:t>1,693</a:t>
-            </a:r>
-          </a:p>
-        </p:txBody>
-      </p:sp>
-      <p:sp>
-        <p:nvSpPr>
-          <p:cNvPr id="11" name="Content-Placeholder-9-11">
-            <a:extLst xmlns:a="http://schemas.openxmlformats.org/drawingml/2006/main">
-              <a:ext uri="{FF2B5EF4-FFF2-40B4-BE49-F238E27FC236}">
-                <a16:creationId xmlns:a16="http://schemas.microsoft.com/office/drawing/2014/main" id="{C19B1259-0AB2-4856-A40D-583403F78C33}"/>
-              </a:ext>
-            </a:extLst>
-          </p:cNvPr>
-          <p:cNvSpPr>
-            <a:spLocks xmlns:a="http://schemas.openxmlformats.org/drawingml/2006/main" noGrp="1"/>
-          </p:cNvSpPr>
-          <p:nvPr/>
-        </p:nvSpPr>
-        <p:spPr>
-          <a:xfrm xmlns:a="http://schemas.openxmlformats.org/drawingml/2006/main">
-            <a:off x="8562404" y="3429000"/>
-            <a:ext cx="2940082" cy="1359313"/>
-          </a:xfrm>
-          <a:prstGeom xmlns:a="http://schemas.openxmlformats.org/drawingml/2006/main" prst="rect">
-            <a:avLst/>
-          </a:prstGeom>
-        </p:spPr>
-        <p:txBody>
-          <a:bodyPr xmlns:a="http://schemas.openxmlformats.org/drawingml/2006/main" lIns="0" tIns="0" rIns="0" bIns="0" anchor="b">
-            <a:normAutofit fontScale="100000"/>
-          </a:bodyPr>
-          <a:lstStyle xmlns:a="http://schemas.openxmlformats.org/drawingml/2006/main"/>
-          <a:p xmlns:a="http://schemas.openxmlformats.org/drawingml/2006/main">
-            <a:pPr algn="l">
-              <a:defRPr sz="2400">
-                <a:solidFill>
-                  <a:srgbClr val="000000"/>
-                </a:solidFill>
-                <a:latin typeface="Helvetica Neue"/>
-                <a:ea typeface="Helvetica Neue"/>
-                <a:cs typeface="Helvetica Neue"/>
-              </a:defRPr>
-            </a:pPr>
-            <a:r>
-              <a:t>111–114</a:t>
-            </a:r>
-          </a:p>
-        </p:txBody>
-      </p:sp>
-      <p:sp>
-        <p:nvSpPr>
-          <p:cNvPr id="12" name="Content-Placeholder-15-12">
-            <a:extLst xmlns:a="http://schemas.openxmlformats.org/drawingml/2006/main">
-              <a:ext uri="{FF2B5EF4-FFF2-40B4-BE49-F238E27FC236}">
-                <a16:creationId xmlns:a16="http://schemas.microsoft.com/office/drawing/2014/main" id="{7682C315-7A82-47BB-BF71-C98DC4580AE3}"/>
-              </a:ext>
-            </a:extLst>
-          </p:cNvPr>
-          <p:cNvSpPr>
-            <a:spLocks xmlns:a="http://schemas.openxmlformats.org/drawingml/2006/main" noGrp="1"/>
-          </p:cNvSpPr>
-          <p:nvPr/>
-        </p:nvSpPr>
-        <p:spPr>
-          <a:xfrm xmlns:a="http://schemas.openxmlformats.org/drawingml/2006/main">
-            <a:off x="393668" y="1138333"/>
-            <a:ext cx="11404568" cy="1599438"/>
-          </a:xfrm>
-          <a:prstGeom xmlns:a="http://schemas.openxmlformats.org/drawingml/2006/main" prst="rect">
-            <a:avLst/>
-          </a:prstGeom>
-        </p:spPr>
-        <p:txBody>
-          <a:bodyPr xmlns:a="http://schemas.openxmlformats.org/drawingml/2006/main" lIns="0" tIns="0" rIns="0" bIns="0">
-            <a:noAutofit/>
-          </a:bodyPr>
-          <a:lstStyle xmlns:a="http://schemas.openxmlformats.org/drawingml/2006/main"/>
-          <a:p xmlns:a="http://schemas.openxmlformats.org/drawingml/2006/main">
-            <a:pPr algn="l">
-              <a:defRPr sz="1600">
-                <a:solidFill>
-                  <a:srgbClr val="000000"/>
-                </a:solidFill>
-                <a:latin typeface="Helvetica Neue"/>
-                <a:ea typeface="Helvetica Neue"/>
-                <a:cs typeface="Helvetica Neue"/>
-              </a:defRPr>
-            </a:pPr>
-            <a:r>
-              <a:t>Coverage</a:t>
-            </a:r>
-          </a:p>
-          <a:p xmlns:a="http://schemas.openxmlformats.org/drawingml/2006/main">
-            <a:pPr algn="l">
-              <a:defRPr sz="1600">
-                <a:solidFill>
-                  <a:srgbClr val="000000"/>
-                </a:solidFill>
-                <a:latin typeface="Helvetica Neue"/>
-                <a:ea typeface="Helvetica Neue"/>
-                <a:cs typeface="Helvetica Neue"/>
-              </a:defRPr>
-            </a:pPr>
-            <a:r>
-              <a:t>Eight later-history identities lacked the full 2016–2020 range and were excluded without replacement. All 15 causal integrity checks passed.</a:t>
+              <a:t>Within each signal quarter:
+z = Φ⁻¹((rank − 0.5) / n)
+TRAIN pooled center and scale are then frozen for later scoring.</a:t>
             </a:r>
           </a:p>
         </p:txBody>
@@ -6510,7 +7279,7 @@
     </p:spTree>
     <p:extLst>
       <p:ext uri="{BB962C8B-B14F-4D97-AF65-F5344CB8AC3E}">
-        <p14:creationId xmlns:p14="http://schemas.microsoft.com/office/powerpoint/2010/main" val="126134171"/>
+        <p14:creationId xmlns:p14="http://schemas.microsoft.com/office/powerpoint/2010/main" val="920191251"/>
       </p:ext>
     </p:extLst>
   </p:cSld>
@@ -6531,10 +7300,10 @@
       </p:grpSpPr>
       <p:sp>
         <p:nvSpPr>
-          <p:cNvPr id="6" name="Google-Shape-532-p58-2">
-            <a:extLst xmlns:a="http://schemas.openxmlformats.org/drawingml/2006/main">
-              <a:ext uri="{FF2B5EF4-FFF2-40B4-BE49-F238E27FC236}">
-                <a16:creationId xmlns:a16="http://schemas.microsoft.com/office/drawing/2014/main" id="{499AC72A-98AF-491E-954F-2743BD1AA086}"/>
+          <p:cNvPr id="11" name="Slide-Number-Placeholder-3-2">
+            <a:extLst xmlns:a="http://schemas.openxmlformats.org/drawingml/2006/main">
+              <a:ext uri="{FF2B5EF4-FFF2-40B4-BE49-F238E27FC236}">
+                <a16:creationId xmlns:a16="http://schemas.microsoft.com/office/drawing/2014/main" id="{2137B4BF-95D1-47E0-AC6C-626979E42B1F}"/>
               </a:ext>
             </a:extLst>
           </p:cNvPr>
@@ -6553,187 +7322,564 @@
           </a:prstGeom>
         </p:spPr>
         <p:txBody>
-          <a:bodyPr xmlns:a="http://schemas.openxmlformats.org/drawingml/2006/main" wrap="square" lIns="0" tIns="0" rIns="0" bIns="0" anchor="b">
+          <a:bodyPr xmlns:a="http://schemas.openxmlformats.org/drawingml/2006/main" lIns="0" tIns="0" rIns="0" bIns="0" anchor="b"/>
+          <a:lstStyle xmlns:a="http://schemas.openxmlformats.org/drawingml/2006/main"/>
+          <a:p xmlns:a="http://schemas.openxmlformats.org/drawingml/2006/main">
+            <a:pPr algn="r">
+              <a:buNone/>
+              <a:defRPr sz="1000">
+                <a:solidFill>
+                  <a:srgbClr val="000000"/>
+                </a:solidFill>
+                <a:latin typeface="Helvetica Neue"/>
+                <a:ea typeface="Helvetica Neue"/>
+                <a:cs typeface="Helvetica Neue"/>
+              </a:defRPr>
+            </a:pPr>
+            <a:r>
+              <a:t>9</a:t>
+            </a:r>
+          </a:p>
+        </p:txBody>
+      </p:sp>
+      <p:sp>
+        <p:nvSpPr>
+          <p:cNvPr id="2" name="Title-10-3">
+            <a:extLst xmlns:a="http://schemas.openxmlformats.org/drawingml/2006/main">
+              <a:ext uri="{FF2B5EF4-FFF2-40B4-BE49-F238E27FC236}">
+                <a16:creationId xmlns:a16="http://schemas.microsoft.com/office/drawing/2014/main" id="{2E376405-9293-43D3-BA29-562431025D7C}"/>
+              </a:ext>
+            </a:extLst>
+          </p:cNvPr>
+          <p:cNvSpPr>
+            <a:spLocks xmlns:a="http://schemas.openxmlformats.org/drawingml/2006/main" noGrp="1"/>
+          </p:cNvSpPr>
+          <p:nvPr/>
+        </p:nvSpPr>
+        <p:spPr>
+          <a:xfrm xmlns:a="http://schemas.openxmlformats.org/drawingml/2006/main">
+            <a:off x="393668" y="344043"/>
+            <a:ext cx="11404568" cy="1047464"/>
+          </a:xfrm>
+          <a:prstGeom xmlns:a="http://schemas.openxmlformats.org/drawingml/2006/main" prst="rect">
+            <a:avLst/>
+          </a:prstGeom>
+        </p:spPr>
+        <p:txBody>
+          <a:bodyPr xmlns:a="http://schemas.openxmlformats.org/drawingml/2006/main" lIns="0" tIns="0" rIns="0" bIns="0" anchor="t">
+            <a:normAutofit fontScale="100000"/>
+          </a:bodyPr>
+          <a:lstStyle xmlns:a="http://schemas.openxmlformats.org/drawingml/2006/main"/>
+          <a:p xmlns:a="http://schemas.openxmlformats.org/drawingml/2006/main">
+            <a:pPr algn="l">
+              <a:buNone/>
+              <a:defRPr sz="2900">
+                <a:solidFill>
+                  <a:srgbClr val="000000"/>
+                </a:solidFill>
+                <a:latin typeface="Helvetica Neue"/>
+                <a:ea typeface="Helvetica Neue"/>
+                <a:cs typeface="Helvetica Neue"/>
+              </a:defRPr>
+            </a:pPr>
+            <a:r>
+              <a:t>Seven gates stand between an attractive TRAIN fit and OOS access</a:t>
+            </a:r>
+          </a:p>
+        </p:txBody>
+      </p:sp>
+      <p:sp>
+        <p:nvSpPr>
+          <p:cNvPr id="3" name="Content-Placeholder-15-4">
+            <a:extLst xmlns:a="http://schemas.openxmlformats.org/drawingml/2006/main">
+              <a:ext uri="{FF2B5EF4-FFF2-40B4-BE49-F238E27FC236}">
+                <a16:creationId xmlns:a16="http://schemas.microsoft.com/office/drawing/2014/main" id="{FE4BD331-A16E-40D8-99AB-A29B8E1B32AD}"/>
+              </a:ext>
+            </a:extLst>
+          </p:cNvPr>
+          <p:cNvSpPr>
+            <a:spLocks xmlns:a="http://schemas.openxmlformats.org/drawingml/2006/main" noGrp="1"/>
+          </p:cNvSpPr>
+          <p:nvPr/>
+        </p:nvSpPr>
+        <p:spPr>
+          <a:xfrm xmlns:a="http://schemas.openxmlformats.org/drawingml/2006/main">
+            <a:off x="393668" y="4161092"/>
+            <a:ext cx="2595944" cy="1415606"/>
+          </a:xfrm>
+          <a:prstGeom xmlns:a="http://schemas.openxmlformats.org/drawingml/2006/main" prst="rect">
+            <a:avLst/>
+          </a:prstGeom>
+        </p:spPr>
+        <p:txBody>
+          <a:bodyPr xmlns:a="http://schemas.openxmlformats.org/drawingml/2006/main" lIns="0" tIns="0" rIns="0" bIns="0">
             <a:noAutofit/>
           </a:bodyPr>
           <a:lstStyle xmlns:a="http://schemas.openxmlformats.org/drawingml/2006/main"/>
           <a:p xmlns:a="http://schemas.openxmlformats.org/drawingml/2006/main">
-            <a:pPr algn="r">
-              <a:defRPr sz="1000">
-                <a:solidFill>
-                  <a:srgbClr val="000000"/>
-                </a:solidFill>
-                <a:latin typeface="Helvetica Neue"/>
-                <a:ea typeface="Helvetica Neue"/>
-                <a:cs typeface="Helvetica Neue"/>
-              </a:defRPr>
-            </a:pPr>
-            <a:r>
-              <a:t>9</a:t>
-            </a:r>
-          </a:p>
-        </p:txBody>
-      </p:sp>
-      <p:sp>
-        <p:nvSpPr>
-          <p:cNvPr id="2" name="Google-Shape-533-p58-3">
-            <a:extLst xmlns:a="http://schemas.openxmlformats.org/drawingml/2006/main">
-              <a:ext uri="{FF2B5EF4-FFF2-40B4-BE49-F238E27FC236}">
-                <a16:creationId xmlns:a16="http://schemas.microsoft.com/office/drawing/2014/main" id="{A7427B33-1EDE-40C6-ACB4-A2BD3ABCD507}"/>
-              </a:ext>
-            </a:extLst>
-          </p:cNvPr>
-          <p:cNvSpPr>
-            <a:spLocks xmlns:a="http://schemas.openxmlformats.org/drawingml/2006/main" noGrp="1"/>
-          </p:cNvSpPr>
-          <p:nvPr/>
-        </p:nvSpPr>
-        <p:spPr>
-          <a:xfrm xmlns:a="http://schemas.openxmlformats.org/drawingml/2006/main">
-            <a:off x="393668" y="344043"/>
-            <a:ext cx="11404568" cy="1047464"/>
-          </a:xfrm>
-          <a:prstGeom xmlns:a="http://schemas.openxmlformats.org/drawingml/2006/main" prst="rect">
-            <a:avLst/>
-          </a:prstGeom>
-        </p:spPr>
-        <p:txBody>
-          <a:bodyPr xmlns:a="http://schemas.openxmlformats.org/drawingml/2006/main" wrap="square" lIns="0" tIns="0" rIns="0" bIns="0" anchor="t">
+            <a:pPr algn="l">
+              <a:buNone/>
+              <a:defRPr sz="1600">
+                <a:solidFill>
+                  <a:srgbClr val="000000"/>
+                </a:solidFill>
+                <a:latin typeface="Helvetica Neue"/>
+                <a:ea typeface="Helvetica Neue"/>
+                <a:cs typeface="Helvetica Neue"/>
+              </a:defRPr>
+            </a:pPr>
+            <a:r>
+              <a:t>G5 · Ordering</a:t>
+            </a:r>
+          </a:p>
+          <a:p xmlns:a="http://schemas.openxmlformats.org/drawingml/2006/main">
+            <a:pPr algn="l">
+              <a:buNone/>
+              <a:defRPr sz="1600">
+                <a:solidFill>
+                  <a:srgbClr val="000000"/>
+                </a:solidFill>
+                <a:latin typeface="Helvetica Neue"/>
+                <a:ea typeface="Helvetica Neue"/>
+                <a:cs typeface="Helvetica Neue"/>
+              </a:defRPr>
+            </a:pPr>
+            <a:r>
+              <a:t>Mean Q4 − Q1 &gt; 0</a:t>
+            </a:r>
+          </a:p>
+        </p:txBody>
+      </p:sp>
+      <p:sp>
+        <p:nvSpPr>
+          <p:cNvPr id="4" name="Text-Placeholder-16-5">
+            <a:extLst xmlns:a="http://schemas.openxmlformats.org/drawingml/2006/main">
+              <a:ext uri="{FF2B5EF4-FFF2-40B4-BE49-F238E27FC236}">
+                <a16:creationId xmlns:a16="http://schemas.microsoft.com/office/drawing/2014/main" id="{0DA2FCBE-A172-4A51-BC33-1D126A2DE90A}"/>
+              </a:ext>
+            </a:extLst>
+          </p:cNvPr>
+          <p:cNvSpPr>
+            <a:spLocks xmlns:a="http://schemas.openxmlformats.org/drawingml/2006/main" noGrp="1"/>
+          </p:cNvSpPr>
+          <p:nvPr/>
+        </p:nvSpPr>
+        <p:spPr>
+          <a:xfrm xmlns:a="http://schemas.openxmlformats.org/drawingml/2006/main">
+            <a:off x="3334988" y="4161092"/>
+            <a:ext cx="2595944" cy="1415606"/>
+          </a:xfrm>
+          <a:prstGeom xmlns:a="http://schemas.openxmlformats.org/drawingml/2006/main" prst="rect">
+            <a:avLst/>
+          </a:prstGeom>
+        </p:spPr>
+        <p:txBody>
+          <a:bodyPr xmlns:a="http://schemas.openxmlformats.org/drawingml/2006/main" lIns="0" tIns="0" rIns="0" bIns="0">
             <a:noAutofit/>
           </a:bodyPr>
           <a:lstStyle xmlns:a="http://schemas.openxmlformats.org/drawingml/2006/main"/>
           <a:p xmlns:a="http://schemas.openxmlformats.org/drawingml/2006/main">
             <a:pPr algn="l">
-              <a:defRPr sz="2900">
-                <a:solidFill>
-                  <a:srgbClr val="000000"/>
-                </a:solidFill>
-                <a:latin typeface="Helvetica Neue"/>
-                <a:ea typeface="Helvetica Neue"/>
-                <a:cs typeface="Helvetica Neue"/>
-              </a:defRPr>
-            </a:pPr>
-            <a:r>
-              <a:t>Every ridge penalty stayed negative</a:t>
-            </a:r>
-          </a:p>
-        </p:txBody>
-      </p:sp>
-      <p:sp>
-        <p:nvSpPr>
-          <p:cNvPr id="3" name="Picture-3-4-backing">
-            <a:extLst xmlns:a="http://schemas.openxmlformats.org/drawingml/2006/main">
-              <a:ext uri="{FF2B5EF4-FFF2-40B4-BE49-F238E27FC236}">
-                <a16:creationId xmlns:a16="http://schemas.microsoft.com/office/drawing/2014/main" id="{4BE467DC-724A-465C-A53C-C3DCF3F72894}"/>
-              </a:ext>
-            </a:extLst>
-          </p:cNvPr>
-          <p:cNvSpPr>
-            <a:spLocks xmlns:a="http://schemas.openxmlformats.org/drawingml/2006/main" noGrp="1"/>
-          </p:cNvSpPr>
-          <p:nvPr/>
-        </p:nvSpPr>
-        <p:spPr>
-          <a:xfrm xmlns:a="http://schemas.openxmlformats.org/drawingml/2006/main">
-            <a:off x="6269069" y="396431"/>
-            <a:ext cx="5539740" cy="5602034"/>
-          </a:xfrm>
-          <a:prstGeom xmlns:a="http://schemas.openxmlformats.org/drawingml/2006/main" prst="roundRect">
-            <a:avLst>
-              <a:gd name="adj" fmla="val 1376"/>
-            </a:avLst>
-          </a:prstGeom>
-          <a:solidFill xmlns:a="http://schemas.openxmlformats.org/drawingml/2006/main">
-            <a:srgbClr val="EAF5FB"/>
-          </a:solidFill>
-          <a:ln xmlns:a="http://schemas.openxmlformats.org/drawingml/2006/main" w="9525">
-            <a:solidFill>
-              <a:srgbClr val="B8BCC4"/>
-            </a:solidFill>
-            <a:prstDash val="solid"/>
-          </a:ln>
-        </p:spPr>
-      </p:sp>
-      <p:pic>
-        <p:nvPicPr>
-          <p:cNvPr id="9" name="Picture-3-4"/>
-          <p:cNvPicPr>
-            <a:picLocks xmlns:a="http://schemas.openxmlformats.org/drawingml/2006/main" noChangeAspect="1"/>
-          </p:cNvPicPr>
-          <p:nvPr/>
-        </p:nvPicPr>
-        <p:blipFill>
-          <a:blip xmlns:r="http://schemas.openxmlformats.org/officeDocument/2006/relationships" xmlns:a="http://schemas.openxmlformats.org/drawingml/2006/main" r:embed="Rf5f53eadbd184844"/>
-          <a:stretch xmlns:a="http://schemas.openxmlformats.org/drawingml/2006/main"/>
-        </p:blipFill>
-        <p:spPr>
-          <a:xfrm xmlns:a="http://schemas.openxmlformats.org/drawingml/2006/main">
-            <a:off x="6269069" y="1448056"/>
-            <a:ext cx="5539740" cy="3498783"/>
-          </a:xfrm>
-          <a:prstGeom xmlns:a="http://schemas.openxmlformats.org/drawingml/2006/main" prst="roundRect">
-            <a:avLst/>
-          </a:prstGeom>
-        </p:spPr>
-      </p:pic>
-      <p:sp>
-        <p:nvSpPr>
-          <p:cNvPr id="5" name="Google-Shape-534-p58-5">
-            <a:extLst xmlns:a="http://schemas.openxmlformats.org/drawingml/2006/main">
-              <a:ext uri="{FF2B5EF4-FFF2-40B4-BE49-F238E27FC236}">
-                <a16:creationId xmlns:a16="http://schemas.microsoft.com/office/drawing/2014/main" id="{AAE9434C-7245-4684-82EF-C0CE7057B84A}"/>
-              </a:ext>
-            </a:extLst>
-          </p:cNvPr>
-          <p:cNvSpPr>
-            <a:spLocks xmlns:a="http://schemas.openxmlformats.org/drawingml/2006/main" noGrp="1"/>
-          </p:cNvSpPr>
-          <p:nvPr/>
-        </p:nvSpPr>
-        <p:spPr>
-          <a:xfrm xmlns:a="http://schemas.openxmlformats.org/drawingml/2006/main">
-            <a:off x="393668" y="2031968"/>
-            <a:ext cx="5537168" cy="3962400"/>
-          </a:xfrm>
-          <a:prstGeom xmlns:a="http://schemas.openxmlformats.org/drawingml/2006/main" prst="rect">
-            <a:avLst/>
-          </a:prstGeom>
-        </p:spPr>
-        <p:txBody>
-          <a:bodyPr xmlns:a="http://schemas.openxmlformats.org/drawingml/2006/main" wrap="square" lIns="0" tIns="0" rIns="0" bIns="0" anchor="t">
+              <a:buNone/>
+              <a:defRPr sz="1800">
+                <a:solidFill>
+                  <a:srgbClr val="000000"/>
+                </a:solidFill>
+                <a:latin typeface="Helvetica Neue"/>
+                <a:ea typeface="Helvetica Neue"/>
+                <a:cs typeface="Helvetica Neue"/>
+              </a:defRPr>
+            </a:pPr>
+            <a:r>
+              <a:t>G6 · Permutation</a:t>
+            </a:r>
+          </a:p>
+          <a:p xmlns:a="http://schemas.openxmlformats.org/drawingml/2006/main">
+            <a:pPr algn="l">
+              <a:buNone/>
+              <a:defRPr sz="1800">
+                <a:solidFill>
+                  <a:srgbClr val="000000"/>
+                </a:solidFill>
+                <a:latin typeface="Helvetica Neue"/>
+                <a:ea typeface="Helvetica Neue"/>
+                <a:cs typeface="Helvetica Neue"/>
+              </a:defRPr>
+            </a:pPr>
+            <a:r>
+              <a:t>Observed ≥ 90th percentile</a:t>
+            </a:r>
+          </a:p>
+        </p:txBody>
+      </p:sp>
+      <p:sp>
+        <p:nvSpPr>
+          <p:cNvPr id="5" name="Content-Placeholder-17-6">
+            <a:extLst xmlns:a="http://schemas.openxmlformats.org/drawingml/2006/main">
+              <a:ext uri="{FF2B5EF4-FFF2-40B4-BE49-F238E27FC236}">
+                <a16:creationId xmlns:a16="http://schemas.microsoft.com/office/drawing/2014/main" id="{5968EE07-BE5D-4277-AC32-332A3E50E300}"/>
+              </a:ext>
+            </a:extLst>
+          </p:cNvPr>
+          <p:cNvSpPr>
+            <a:spLocks xmlns:a="http://schemas.openxmlformats.org/drawingml/2006/main" noGrp="1"/>
+          </p:cNvSpPr>
+          <p:nvPr/>
+        </p:nvSpPr>
+        <p:spPr>
+          <a:xfrm xmlns:a="http://schemas.openxmlformats.org/drawingml/2006/main">
+            <a:off x="6264402" y="4161092"/>
+            <a:ext cx="2595944" cy="1415606"/>
+          </a:xfrm>
+          <a:prstGeom xmlns:a="http://schemas.openxmlformats.org/drawingml/2006/main" prst="rect">
+            <a:avLst/>
+          </a:prstGeom>
+        </p:spPr>
+        <p:txBody>
+          <a:bodyPr xmlns:a="http://schemas.openxmlformats.org/drawingml/2006/main" lIns="0" tIns="0" rIns="0" bIns="0">
             <a:noAutofit/>
           </a:bodyPr>
           <a:lstStyle xmlns:a="http://schemas.openxmlformats.org/drawingml/2006/main"/>
           <a:p xmlns:a="http://schemas.openxmlformats.org/drawingml/2006/main">
             <a:pPr algn="l">
-              <a:defRPr sz="2400">
-                <a:solidFill>
-                  <a:srgbClr val="000000"/>
-                </a:solidFill>
-                <a:latin typeface="Helvetica Neue"/>
-                <a:ea typeface="Helvetica Neue"/>
-                <a:cs typeface="Helvetica Neue"/>
-              </a:defRPr>
-            </a:pPr>
-            <a:r>
-              <a:t>Selected: λ = 100</a:t>
-            </a:r>
-          </a:p>
-          <a:p xmlns:a="http://schemas.openxmlformats.org/drawingml/2006/main">
-            <a:pPr algn="l">
-              <a:defRPr sz="2400">
-                <a:solidFill>
-                  <a:srgbClr val="000000"/>
-                </a:solidFill>
-                <a:latin typeface="Helvetica Neue"/>
-                <a:ea typeface="Helvetica Neue"/>
-                <a:cs typeface="Helvetica Neue"/>
-              </a:defRPr>
-            </a:pPr>
-            <a:r>
-              <a:t>The one-standard-error rule preferred the strongest shrinkage.
-Mean forward rank IC still ended at −0.0176.
-Regularization reduced variance; it could not create temporal stability.</a:t>
+              <a:buNone/>
+              <a:defRPr sz="1600">
+                <a:solidFill>
+                  <a:srgbClr val="000000"/>
+                </a:solidFill>
+                <a:latin typeface="Helvetica Neue"/>
+                <a:ea typeface="Helvetica Neue"/>
+                <a:cs typeface="Helvetica Neue"/>
+              </a:defRPr>
+            </a:pPr>
+            <a:r>
+              <a:t>G7 · Breadth</a:t>
+            </a:r>
+          </a:p>
+          <a:p xmlns:a="http://schemas.openxmlformats.org/drawingml/2006/main">
+            <a:pPr algn="l">
+              <a:buNone/>
+              <a:defRPr sz="1600">
+                <a:solidFill>
+                  <a:srgbClr val="000000"/>
+                </a:solidFill>
+                <a:latin typeface="Helvetica Neue"/>
+                <a:ea typeface="Helvetica Neue"/>
+                <a:cs typeface="Helvetica Neue"/>
+              </a:defRPr>
+            </a:pPr>
+            <a:r>
+              <a:t>Largest sector ≤ 35%</a:t>
+            </a:r>
+          </a:p>
+        </p:txBody>
+      </p:sp>
+      <p:sp>
+        <p:nvSpPr>
+          <p:cNvPr id="6" name="Text-Placeholder-18-7">
+            <a:extLst xmlns:a="http://schemas.openxmlformats.org/drawingml/2006/main">
+              <a:ext uri="{FF2B5EF4-FFF2-40B4-BE49-F238E27FC236}">
+                <a16:creationId xmlns:a16="http://schemas.microsoft.com/office/drawing/2014/main" id="{A464DC06-7E22-4578-A5CA-5ABF7EBDFF68}"/>
+              </a:ext>
+            </a:extLst>
+          </p:cNvPr>
+          <p:cNvSpPr>
+            <a:spLocks xmlns:a="http://schemas.openxmlformats.org/drawingml/2006/main" noGrp="1"/>
+          </p:cNvSpPr>
+          <p:nvPr/>
+        </p:nvSpPr>
+        <p:spPr>
+          <a:xfrm xmlns:a="http://schemas.openxmlformats.org/drawingml/2006/main">
+            <a:off x="9205722" y="4161092"/>
+            <a:ext cx="2595944" cy="1415606"/>
+          </a:xfrm>
+          <a:prstGeom xmlns:a="http://schemas.openxmlformats.org/drawingml/2006/main" prst="rect">
+            <a:avLst/>
+          </a:prstGeom>
+        </p:spPr>
+        <p:txBody>
+          <a:bodyPr xmlns:a="http://schemas.openxmlformats.org/drawingml/2006/main" lIns="0" tIns="0" rIns="0" bIns="0">
+            <a:noAutofit/>
+          </a:bodyPr>
+          <a:lstStyle xmlns:a="http://schemas.openxmlformats.org/drawingml/2006/main"/>
+          <a:p xmlns:a="http://schemas.openxmlformats.org/drawingml/2006/main">
+            <a:pPr algn="l">
+              <a:buNone/>
+              <a:defRPr sz="1800">
+                <a:solidFill>
+                  <a:srgbClr val="000000"/>
+                </a:solidFill>
+                <a:latin typeface="Helvetica Neue"/>
+                <a:ea typeface="Helvetica Neue"/>
+                <a:cs typeface="Helvetica Neue"/>
+              </a:defRPr>
+            </a:pPr>
+            <a:r>
+              <a:t>OOS lock</a:t>
+            </a:r>
+          </a:p>
+          <a:p xmlns:a="http://schemas.openxmlformats.org/drawingml/2006/main">
+            <a:pPr algn="l">
+              <a:buNone/>
+              <a:defRPr sz="1800">
+                <a:solidFill>
+                  <a:srgbClr val="000000"/>
+                </a:solidFill>
+                <a:latin typeface="Helvetica Neue"/>
+                <a:ea typeface="Helvetica Neue"/>
+                <a:cs typeface="Helvetica Neue"/>
+              </a:defRPr>
+            </a:pPr>
+            <a:r>
+              <a:t>All seven—or no query</a:t>
+            </a:r>
+          </a:p>
+        </p:txBody>
+      </p:sp>
+      <p:sp>
+        <p:nvSpPr>
+          <p:cNvPr id="7" name="Content-Placeholder-15-8">
+            <a:extLst xmlns:a="http://schemas.openxmlformats.org/drawingml/2006/main">
+              <a:ext uri="{FF2B5EF4-FFF2-40B4-BE49-F238E27FC236}">
+                <a16:creationId xmlns:a16="http://schemas.microsoft.com/office/drawing/2014/main" id="{436C583E-8916-4C9A-8B24-035E13710FB7}"/>
+              </a:ext>
+            </a:extLst>
+          </p:cNvPr>
+          <p:cNvSpPr>
+            <a:spLocks xmlns:a="http://schemas.openxmlformats.org/drawingml/2006/main" noGrp="1"/>
+          </p:cNvSpPr>
+          <p:nvPr/>
+        </p:nvSpPr>
+        <p:spPr>
+          <a:xfrm xmlns:a="http://schemas.openxmlformats.org/drawingml/2006/main">
+            <a:off x="393668" y="2208086"/>
+            <a:ext cx="2595944" cy="1415606"/>
+          </a:xfrm>
+          <a:prstGeom xmlns:a="http://schemas.openxmlformats.org/drawingml/2006/main" prst="rect">
+            <a:avLst/>
+          </a:prstGeom>
+        </p:spPr>
+        <p:txBody>
+          <a:bodyPr xmlns:a="http://schemas.openxmlformats.org/drawingml/2006/main" lIns="0" tIns="0" rIns="0" bIns="0">
+            <a:noAutofit/>
+          </a:bodyPr>
+          <a:lstStyle xmlns:a="http://schemas.openxmlformats.org/drawingml/2006/main"/>
+          <a:p xmlns:a="http://schemas.openxmlformats.org/drawingml/2006/main">
+            <a:pPr algn="l">
+              <a:buNone/>
+              <a:defRPr sz="1600">
+                <a:solidFill>
+                  <a:srgbClr val="000000"/>
+                </a:solidFill>
+                <a:latin typeface="Helvetica Neue"/>
+                <a:ea typeface="Helvetica Neue"/>
+                <a:cs typeface="Helvetica Neue"/>
+              </a:defRPr>
+            </a:pPr>
+            <a:r>
+              <a:t>G1 · Integrity</a:t>
+            </a:r>
+          </a:p>
+          <a:p xmlns:a="http://schemas.openxmlformats.org/drawingml/2006/main">
+            <a:pPr algn="l">
+              <a:buNone/>
+              <a:defRPr sz="1600">
+                <a:solidFill>
+                  <a:srgbClr val="000000"/>
+                </a:solidFill>
+                <a:latin typeface="Helvetica Neue"/>
+                <a:ea typeface="Helvetica Neue"/>
+                <a:cs typeface="Helvetica Neue"/>
+              </a:defRPr>
+            </a:pPr>
+            <a:r>
+              <a:t>Dates, bars, registry, target timing</a:t>
+            </a:r>
+          </a:p>
+        </p:txBody>
+      </p:sp>
+      <p:sp>
+        <p:nvSpPr>
+          <p:cNvPr id="8" name="Text-Placeholder-16-9">
+            <a:extLst xmlns:a="http://schemas.openxmlformats.org/drawingml/2006/main">
+              <a:ext uri="{FF2B5EF4-FFF2-40B4-BE49-F238E27FC236}">
+                <a16:creationId xmlns:a16="http://schemas.microsoft.com/office/drawing/2014/main" id="{18733E52-9A04-4859-B8BC-DD6903DEC196}"/>
+              </a:ext>
+            </a:extLst>
+          </p:cNvPr>
+          <p:cNvSpPr>
+            <a:spLocks xmlns:a="http://schemas.openxmlformats.org/drawingml/2006/main" noGrp="1"/>
+          </p:cNvSpPr>
+          <p:nvPr/>
+        </p:nvSpPr>
+        <p:spPr>
+          <a:xfrm xmlns:a="http://schemas.openxmlformats.org/drawingml/2006/main">
+            <a:off x="3334988" y="2208086"/>
+            <a:ext cx="2595944" cy="1415606"/>
+          </a:xfrm>
+          <a:prstGeom xmlns:a="http://schemas.openxmlformats.org/drawingml/2006/main" prst="rect">
+            <a:avLst/>
+          </a:prstGeom>
+        </p:spPr>
+        <p:txBody>
+          <a:bodyPr xmlns:a="http://schemas.openxmlformats.org/drawingml/2006/main" lIns="0" tIns="0" rIns="0" bIns="0">
+            <a:noAutofit/>
+          </a:bodyPr>
+          <a:lstStyle xmlns:a="http://schemas.openxmlformats.org/drawingml/2006/main"/>
+          <a:p xmlns:a="http://schemas.openxmlformats.org/drawingml/2006/main">
+            <a:pPr algn="l">
+              <a:buNone/>
+              <a:defRPr sz="1800">
+                <a:solidFill>
+                  <a:srgbClr val="000000"/>
+                </a:solidFill>
+                <a:latin typeface="Helvetica Neue"/>
+                <a:ea typeface="Helvetica Neue"/>
+                <a:cs typeface="Helvetica Neue"/>
+              </a:defRPr>
+            </a:pPr>
+            <a:r>
+              <a:t>G2 · Support</a:t>
+            </a:r>
+          </a:p>
+          <a:p xmlns:a="http://schemas.openxmlformats.org/drawingml/2006/main">
+            <a:pPr algn="l">
+              <a:buNone/>
+              <a:defRPr sz="1800">
+                <a:solidFill>
+                  <a:srgbClr val="000000"/>
+                </a:solidFill>
+                <a:latin typeface="Helvetica Neue"/>
+                <a:ea typeface="Helvetica Neue"/>
+                <a:cs typeface="Helvetica Neue"/>
+              </a:defRPr>
+            </a:pPr>
+            <a:r>
+              <a:t>≥12 quarters; ≥20 assets</a:t>
+            </a:r>
+          </a:p>
+        </p:txBody>
+      </p:sp>
+      <p:sp>
+        <p:nvSpPr>
+          <p:cNvPr id="9" name="Content-Placeholder-17-10">
+            <a:extLst xmlns:a="http://schemas.openxmlformats.org/drawingml/2006/main">
+              <a:ext uri="{FF2B5EF4-FFF2-40B4-BE49-F238E27FC236}">
+                <a16:creationId xmlns:a16="http://schemas.microsoft.com/office/drawing/2014/main" id="{E932ECA6-67E6-4692-8358-C1105B492876}"/>
+              </a:ext>
+            </a:extLst>
+          </p:cNvPr>
+          <p:cNvSpPr>
+            <a:spLocks xmlns:a="http://schemas.openxmlformats.org/drawingml/2006/main" noGrp="1"/>
+          </p:cNvSpPr>
+          <p:nvPr/>
+        </p:nvSpPr>
+        <p:spPr>
+          <a:xfrm xmlns:a="http://schemas.openxmlformats.org/drawingml/2006/main">
+            <a:off x="6264402" y="2208086"/>
+            <a:ext cx="2595944" cy="1415606"/>
+          </a:xfrm>
+          <a:prstGeom xmlns:a="http://schemas.openxmlformats.org/drawingml/2006/main" prst="rect">
+            <a:avLst/>
+          </a:prstGeom>
+        </p:spPr>
+        <p:txBody>
+          <a:bodyPr xmlns:a="http://schemas.openxmlformats.org/drawingml/2006/main" lIns="0" tIns="0" rIns="0" bIns="0">
+            <a:noAutofit/>
+          </a:bodyPr>
+          <a:lstStyle xmlns:a="http://schemas.openxmlformats.org/drawingml/2006/main"/>
+          <a:p xmlns:a="http://schemas.openxmlformats.org/drawingml/2006/main">
+            <a:pPr algn="l">
+              <a:buNone/>
+              <a:defRPr sz="1600">
+                <a:solidFill>
+                  <a:srgbClr val="000000"/>
+                </a:solidFill>
+                <a:latin typeface="Helvetica Neue"/>
+                <a:ea typeface="Helvetica Neue"/>
+                <a:cs typeface="Helvetica Neue"/>
+              </a:defRPr>
+            </a:pPr>
+            <a:r>
+              <a:t>G3 · Forward IC</a:t>
+            </a:r>
+          </a:p>
+          <a:p xmlns:a="http://schemas.openxmlformats.org/drawingml/2006/main">
+            <a:pPr algn="l">
+              <a:buNone/>
+              <a:defRPr sz="1600">
+                <a:solidFill>
+                  <a:srgbClr val="000000"/>
+                </a:solidFill>
+                <a:latin typeface="Helvetica Neue"/>
+                <a:ea typeface="Helvetica Neue"/>
+                <a:cs typeface="Helvetica Neue"/>
+              </a:defRPr>
+            </a:pPr>
+            <a:r>
+              <a:t>&gt;0 mean; ≥60% positive</a:t>
+            </a:r>
+          </a:p>
+        </p:txBody>
+      </p:sp>
+      <p:sp>
+        <p:nvSpPr>
+          <p:cNvPr id="10" name="Text-Placeholder-18-11">
+            <a:extLst xmlns:a="http://schemas.openxmlformats.org/drawingml/2006/main">
+              <a:ext uri="{FF2B5EF4-FFF2-40B4-BE49-F238E27FC236}">
+                <a16:creationId xmlns:a16="http://schemas.microsoft.com/office/drawing/2014/main" id="{4186F682-B2DC-43F6-A234-CA3E3D868479}"/>
+              </a:ext>
+            </a:extLst>
+          </p:cNvPr>
+          <p:cNvSpPr>
+            <a:spLocks xmlns:a="http://schemas.openxmlformats.org/drawingml/2006/main" noGrp="1"/>
+          </p:cNvSpPr>
+          <p:nvPr/>
+        </p:nvSpPr>
+        <p:spPr>
+          <a:xfrm xmlns:a="http://schemas.openxmlformats.org/drawingml/2006/main">
+            <a:off x="9205722" y="2208086"/>
+            <a:ext cx="2595944" cy="1415606"/>
+          </a:xfrm>
+          <a:prstGeom xmlns:a="http://schemas.openxmlformats.org/drawingml/2006/main" prst="rect">
+            <a:avLst/>
+          </a:prstGeom>
+        </p:spPr>
+        <p:txBody>
+          <a:bodyPr xmlns:a="http://schemas.openxmlformats.org/drawingml/2006/main" lIns="0" tIns="0" rIns="0" bIns="0">
+            <a:noAutofit/>
+          </a:bodyPr>
+          <a:lstStyle xmlns:a="http://schemas.openxmlformats.org/drawingml/2006/main"/>
+          <a:p xmlns:a="http://schemas.openxmlformats.org/drawingml/2006/main">
+            <a:pPr algn="l">
+              <a:buNone/>
+              <a:defRPr sz="1800">
+                <a:solidFill>
+                  <a:srgbClr val="000000"/>
+                </a:solidFill>
+                <a:latin typeface="Helvetica Neue"/>
+                <a:ea typeface="Helvetica Neue"/>
+                <a:cs typeface="Helvetica Neue"/>
+              </a:defRPr>
+            </a:pPr>
+            <a:r>
+              <a:t>G4 · Q4 excess</a:t>
+            </a:r>
+          </a:p>
+          <a:p xmlns:a="http://schemas.openxmlformats.org/drawingml/2006/main">
+            <a:pPr algn="l">
+              <a:buNone/>
+              <a:defRPr sz="1800">
+                <a:solidFill>
+                  <a:srgbClr val="000000"/>
+                </a:solidFill>
+                <a:latin typeface="Helvetica Neue"/>
+                <a:ea typeface="Helvetica Neue"/>
+                <a:cs typeface="Helvetica Neue"/>
+              </a:defRPr>
+            </a:pPr>
+            <a:r>
+              <a:t>&gt;0 mean; ≥60% positive</a:t>
             </a:r>
           </a:p>
         </p:txBody>
@@ -6741,7 +7887,7 @@
     </p:spTree>
     <p:extLst>
       <p:ext uri="{BB962C8B-B14F-4D97-AF65-F5344CB8AC3E}">
-        <p14:creationId xmlns:p14="http://schemas.microsoft.com/office/powerpoint/2010/main" val="648134586"/>
+        <p14:creationId xmlns:p14="http://schemas.microsoft.com/office/powerpoint/2010/main" val="2088880555"/>
       </p:ext>
     </p:extLst>
   </p:cSld>
